--- a/presentations/Olasz_holokauszt_es_Europa.pptx
+++ b/presentations/Olasz_holokauszt_es_Europa.pptx
@@ -46,9 +46,21 @@
     <p:sldId id="294" r:id="rId40"/>
     <p:sldId id="295" r:id="rId41"/>
     <p:sldId id="296" r:id="rId42"/>
+    <p:sldId id="297" r:id="rId43"/>
+    <p:sldId id="298" r:id="rId44"/>
+    <p:sldId id="299" r:id="rId45"/>
+    <p:sldId id="300" r:id="rId46"/>
+    <p:sldId id="301" r:id="rId47"/>
+    <p:sldId id="302" r:id="rId48"/>
+    <p:sldId id="303" r:id="rId49"/>
+    <p:sldId id="304" r:id="rId50"/>
+    <p:sldId id="305" r:id="rId51"/>
+    <p:sldId id="306" r:id="rId52"/>
+    <p:sldId id="307" r:id="rId53"/>
+    <p:sldId id="308" r:id="rId54"/>
   </p:sldIdLst>
   <p:notesMasterIdLst>
-    <p:notesMasterId r:id="rId43"/>
+    <p:notesMasterId r:id="rId55"/>
   </p:notesMasterIdLst>
   <p:sldSz cx="12192000" cy="6858000"/>
   <p:notesSz cx="6858000" cy="12192000"/>
@@ -147,14 +159,14 @@
   <p:extLst>
     <p:ext uri="{521415D9-36F7-43E2-AB2F-B90AF26B5E84}">
       <p14:sectionLst xmlns:p14="http://schemas.microsoft.com/office/powerpoint/2010/main">
-        <p14:section name="Bevezetés" id="{0cfab8b6-7c84-864d-9084-f4e3f051288b}">
+        <p14:section name="Bevezetés" id="{2faf51a5-ddfd-f687-cdbc-71a0dc2c08c7}">
           <p14:sldIdLst>
             <p14:sldId id="256"/>
             <p14:sldId id="257"/>
             <p14:sldId id="258"/>
           </p14:sldIdLst>
         </p14:section>
-        <p14:section name="1. Európai keret" id="{7f6adf57-9846-ef9e-5134-4a6716172622}">
+        <p14:section name="1. Európai keret" id="{71aa0fb6-631f-5100-cef5-a0a0db01a06d}">
           <p14:sldIdLst>
             <p14:sldId id="259"/>
             <p14:sldId id="260"/>
@@ -163,7 +175,7 @@
             <p14:sldId id="263"/>
           </p14:sldIdLst>
         </p14:section>
-        <p14:section name="2. Olaszország" id="{539ab069-8b97-577a-542a-3b6028f0a499}">
+        <p14:section name="2. Olaszország" id="{13188355-1771-6bd8-f978-5f9b9861d950}">
           <p14:sldIdLst>
             <p14:sldId id="264"/>
             <p14:sldId id="265"/>
@@ -181,7 +193,7 @@
             <p14:sldId id="277"/>
           </p14:sldIdLst>
         </p14:section>
-        <p14:section name="3. Magyarország" id="{51b96546-5daf-ea4b-be0e-56865ab51b99}">
+        <p14:section name="3. Magyarország" id="{5cb90a23-fe8b-b27f-0fca-d8e197958a6c}">
           <p14:sldIdLst>
             <p14:sldId id="278"/>
             <p14:sldId id="279"/>
@@ -189,7 +201,7 @@
             <p14:sldId id="281"/>
           </p14:sldIdLst>
         </p14:section>
-        <p14:section name="4. Európai összehasonlítás" id="{4634e6a8-e4a5-9ff7-b327-d6b3a49d538e}">
+        <p14:section name="4. Európai összehasonlítás" id="{8638abe9-9bbe-2f07-a578-f02574e24713}">
           <p14:sldIdLst>
             <p14:sldId id="282"/>
             <p14:sldId id="283"/>
@@ -203,13 +215,29 @@
             <p14:sldId id="291"/>
           </p14:sldIdLst>
         </p14:section>
-        <p14:section name="5. Összegzés" id="{6c49f226-9deb-8aff-2d40-e8f8c50401c4}">
+        <p14:section name="5. Összegzés" id="{0e96bfcd-32f8-12a4-7470-76d27d8488e3}">
           <p14:sldIdLst>
             <p14:sldId id="292"/>
             <p14:sldId id="293"/>
             <p14:sldId id="294"/>
             <p14:sldId id="295"/>
+          </p14:sldIdLst>
+        </p14:section>
+        <p14:section name="6. Trieszt – Risiera" id="{bd2ebc68-7fb3-57df-e4bd-cd5eeeed9e70}">
+          <p14:sldIdLst>
             <p14:sldId id="296"/>
+            <p14:sldId id="297"/>
+            <p14:sldId id="298"/>
+            <p14:sldId id="299"/>
+            <p14:sldId id="300"/>
+            <p14:sldId id="301"/>
+            <p14:sldId id="302"/>
+            <p14:sldId id="303"/>
+            <p14:sldId id="304"/>
+            <p14:sldId id="305"/>
+            <p14:sldId id="306"/>
+            <p14:sldId id="307"/>
+            <p14:sldId id="308"/>
           </p14:sldIdLst>
         </p14:section>
       </p14:sectionLst>
@@ -2581,6 +2609,242 @@
 </c:chartSpace>
 </file>
 
+<file path=ppt/charts/chart7.xml><?xml version="1.0" encoding="utf-8"?>
+<c:chartSpace xmlns:c="http://schemas.openxmlformats.org/drawingml/2006/chart" xmlns:a="http://schemas.openxmlformats.org/drawingml/2006/main" xmlns:r="http://schemas.openxmlformats.org/officeDocument/2006/relationships">
+  <c:date1904 val="0"/>
+  <c:roundedCorners val="1"/>
+  <c:chart>
+    <c:title>
+      <c:tx>
+        <c:rich>
+          <a:bodyPr/>
+          <a:lstStyle/>
+          <a:p>
+            <a:pPr>
+              <a:defRPr sz="1400" b="0" i="0" u="none" strike="noStrike">
+                <a:solidFill>
+                  <a:srgbClr val="1C1C24"/>
+                </a:solidFill>
+                <a:latin typeface="+mj-lt"/>
+              </a:defRPr>
+            </a:pPr>
+            <a:r>
+              <a:rPr sz="1400" b="0" i="0" u="none" strike="noStrike">
+                <a:solidFill>
+                  <a:srgbClr val="1C1C24"/>
+                </a:solidFill>
+                <a:latin typeface="+mj-lt"/>
+              </a:rPr>
+              <a:t>A 43 zsidó deportálóvonatból ~20–22 Triesztből indult</a:t>
+            </a:r>
+          </a:p>
+        </c:rich>
+      </c:tx>
+      <c:layout/>
+      <c:overlay val="0"/>
+    </c:title>
+    <c:autoTitleDeleted val="0"/>
+    <c:plotArea>
+      <c:layout/>
+      <c:doughnutChart>
+        <c:varyColors val="1"/>
+        <c:ser>
+          <c:idx val="0"/>
+          <c:order val="0"/>
+          <c:tx>
+            <c:strRef>
+              <c:f>Sheet1!$B$1</c:f>
+              <c:strCache>
+                <c:ptCount val="1"/>
+                <c:pt idx="0">
+                  <c:v>Zsidó deportálóvonatok Olaszországból</c:v>
+                </c:pt>
+              </c:strCache>
+            </c:strRef>
+          </c:tx>
+          <c:spPr>
+            <a:solidFill>
+              <a:schemeClr val="accent1"/>
+            </a:solidFill>
+            <a:ln w="9525" cap="flat">
+              <a:solidFill>
+                <a:srgbClr val="F9F9F9"/>
+              </a:solidFill>
+              <a:prstDash val="solid"/>
+              <a:round/>
+            </a:ln>
+            <a:effectLst/>
+          </c:spPr>
+          <c:dPt>
+            <c:idx val="0"/>
+            <c:bubble3D val="0"/>
+            <c:spPr>
+              <a:solidFill>
+                <a:srgbClr val="8B1E1E"/>
+              </a:solidFill>
+              <a:effectLst/>
+            </c:spPr>
+          </c:dPt>
+          <c:dPt>
+            <c:idx val="1"/>
+            <c:bubble3D val="0"/>
+            <c:spPr>
+              <a:solidFill>
+                <a:srgbClr val="D9DCE1"/>
+              </a:solidFill>
+              <a:effectLst/>
+            </c:spPr>
+          </c:dPt>
+          <c:dLbls>
+            <c:dLbl>
+              <c:idx val="0"/>
+              <c:numFmt formatCode="General" sourceLinked="0"/>
+              <c:spPr/>
+              <c:txPr>
+                <a:bodyPr/>
+                <a:lstStyle/>
+                <a:p>
+                  <a:pPr>
+                    <a:defRPr sz="1400" b="0" i="0" u="none" strike="noStrike">
+                      <a:solidFill>
+                        <a:srgbClr val="1C1C24"/>
+                      </a:solidFill>
+                      <a:latin typeface="+mn-lt"/>
+                    </a:defRPr>
+                  </a:pPr>
+                </a:p>
+              </c:txPr>
+              <c:showLegendKey val="0"/>
+              <c:showVal val="1"/>
+              <c:showCatName val="0"/>
+              <c:showSerName val="0"/>
+              <c:showPercent val="0"/>
+              <c:showBubbleSize val="0"/>
+            </c:dLbl>
+            <c:dLbl>
+              <c:idx val="1"/>
+              <c:numFmt formatCode="General" sourceLinked="0"/>
+              <c:spPr/>
+              <c:txPr>
+                <a:bodyPr/>
+                <a:lstStyle/>
+                <a:p>
+                  <a:pPr>
+                    <a:defRPr sz="1400" b="0" i="0" u="none" strike="noStrike">
+                      <a:solidFill>
+                        <a:srgbClr val="1C1C24"/>
+                      </a:solidFill>
+                      <a:latin typeface="+mn-lt"/>
+                    </a:defRPr>
+                  </a:pPr>
+                </a:p>
+              </c:txPr>
+              <c:showLegendKey val="0"/>
+              <c:showVal val="1"/>
+              <c:showCatName val="0"/>
+              <c:showSerName val="0"/>
+              <c:showPercent val="0"/>
+              <c:showBubbleSize val="0"/>
+            </c:dLbl>
+            <c:numFmt formatCode="General" sourceLinked="0"/>
+            <c:txPr>
+              <a:bodyPr/>
+              <a:lstStyle/>
+              <a:p>
+                <a:pPr>
+                  <a:defRPr sz="1800" b="0" i="0" u="none" strike="noStrike">
+                    <a:solidFill>
+                      <a:srgbClr val="000000"/>
+                    </a:solidFill>
+                    <a:latin typeface="Arial"/>
+                  </a:defRPr>
+                </a:pPr>
+              </a:p>
+            </c:txPr>
+            <c:showLegendKey val="0"/>
+            <c:showVal val="0"/>
+            <c:showCatName val="1"/>
+            <c:showSerName val="0"/>
+            <c:showPercent val="1"/>
+            <c:showBubbleSize val="0"/>
+            <c:showLeaderLines val="0"/>
+          </c:dLbls>
+          <c:cat>
+            <c:strRef>
+              <c:f>Sheet1!$A$2:$A$3</c:f>
+              <c:strCache>
+                <c:ptCount val="2"/>
+                <c:pt idx="0">
+                  <c:v>Triesztből indult</c:v>
+                </c:pt>
+                <c:pt idx="1">
+                  <c:v>Más olasz városból</c:v>
+                </c:pt>
+              </c:strCache>
+            </c:strRef>
+          </c:cat>
+          <c:val>
+            <c:numRef>
+              <c:f>Sheet1!$B$2:$B$3</c:f>
+              <c:numCache>
+                <c:ptCount val="2"/>
+                <c:pt idx="0">
+                  <c:v>22</c:v>
+                </c:pt>
+                <c:pt idx="1">
+                  <c:v>21</c:v>
+                </c:pt>
+              </c:numCache>
+            </c:numRef>
+          </c:val>
+        </c:ser>
+        <c:firstSliceAng val="0"/>
+        <c:holeSize val="58"/>
+      </c:doughnutChart>
+      <c:spPr>
+        <a:noFill/>
+        <a:ln>
+          <a:noFill/>
+        </a:ln>
+        <a:effectLst/>
+      </c:spPr>
+    </c:plotArea>
+    <c:legend>
+      <c:legendPos val="b"/>
+      <c:overlay val="0"/>
+      <c:txPr>
+        <a:bodyPr/>
+        <a:lstStyle/>
+        <a:p>
+          <a:pPr>
+            <a:defRPr sz="1200">
+              <a:solidFill>
+                <a:srgbClr val="1C1C24"/>
+              </a:solidFill>
+              <a:latin typeface="+mn-lt"/>
+              <a:cs typeface="+mn-lt"/>
+            </a:defRPr>
+          </a:pPr>
+          <a:endParaRPr lang="en-US"/>
+        </a:p>
+      </c:txPr>
+    </c:legend>
+    <c:plotVisOnly val="1"/>
+    <c:dispBlanksAs val="span"/>
+  </c:chart>
+  <c:spPr>
+    <a:noFill/>
+    <a:ln>
+      <a:noFill/>
+    </a:ln>
+    <a:effectLst/>
+  </c:spPr>
+  <c:externalData r:id="rId1">
+    <c:autoUpdate val="0"/>
+  </c:externalData>
+</c:chartSpace>
+</file>
+
 <file path=ppt/notesMasters/notesMaster1.xml><?xml version="1.0" encoding="utf-8"?>
 <p:notesMaster xmlns:a="http://schemas.openxmlformats.org/drawingml/2006/main" xmlns:r="http://schemas.openxmlformats.org/officeDocument/2006/relationships" xmlns:p="http://schemas.openxmlformats.org/presentationml/2006/main">
   <p:cSld>
@@ -6098,6 +6362,710 @@
 </p:notes>
 </file>
 
+<file path=ppt/notesSlides/notesSlide42.xml><?xml version="1.0" encoding="utf-8"?>
+<p:notes xmlns:a="http://schemas.openxmlformats.org/drawingml/2006/main" xmlns:r="http://schemas.openxmlformats.org/officeDocument/2006/relationships" xmlns:p="http://schemas.openxmlformats.org/presentationml/2006/main">
+  <p:cSld>
+    <p:spTree>
+      <p:nvGrpSpPr>
+        <p:cNvPr id="1" name=""/>
+        <p:cNvGrpSpPr/>
+        <p:nvPr/>
+      </p:nvGrpSpPr>
+      <p:grpSpPr>
+        <a:xfrm>
+          <a:off x="0" y="0"/>
+          <a:ext cx="0" cy="0"/>
+          <a:chOff x="0" y="0"/>
+          <a:chExt cx="0" cy="0"/>
+        </a:xfrm>
+      </p:grpSpPr>
+      <p:sp>
+        <p:nvSpPr>
+          <p:cNvPr id="2" name="Slide Image Placeholder 1"/>
+          <p:cNvSpPr>
+            <a:spLocks noGrp="1" noRot="1" noChangeAspect="1"/>
+          </p:cNvSpPr>
+          <p:nvPr>
+            <p:ph type="sldImg"/>
+          </p:nvPr>
+        </p:nvSpPr>
+        <p:spPr/>
+      </p:sp>
+      <p:sp>
+        <p:nvSpPr>
+          <p:cNvPr id="3" name="Notes Placeholder 2"/>
+          <p:cNvSpPr>
+            <a:spLocks noGrp="1"/>
+          </p:cNvSpPr>
+          <p:nvPr>
+            <p:ph type="body" idx="1"/>
+          </p:nvPr>
+        </p:nvSpPr>
+        <p:spPr/>
+        <p:txBody>
+          <a:bodyPr/>
+          <a:lstStyle/>
+          <a:p>
+            <a:r>
+              <a:rPr lang="en-US" dirty="0"/>
+              <a:t/>
+            </a:r>
+            <a:endParaRPr lang="en-US" dirty="0"/>
+          </a:p>
+        </p:txBody>
+      </p:sp>
+      <p:sp>
+        <p:nvSpPr>
+          <p:cNvPr id="4" name="Slide Number Placeholder 3"/>
+          <p:cNvSpPr>
+            <a:spLocks noGrp="1"/>
+          </p:cNvSpPr>
+          <p:nvPr>
+            <p:ph type="sldNum" sz="quarter" idx="10"/>
+          </p:nvPr>
+        </p:nvSpPr>
+        <p:spPr/>
+        <p:txBody>
+          <a:bodyPr/>
+          <a:lstStyle/>
+          <a:p>
+            <a:fld id="{F7021451-1387-4CA6-816F-3879F97B5CBC}" type="slidenum">
+              <a:rPr lang="en-US"/>
+              <a:t>42</a:t>
+            </a:fld>
+            <a:endParaRPr lang="en-US"/>
+          </a:p>
+        </p:txBody>
+      </p:sp>
+    </p:spTree>
+    <p:extLst>
+      <p:ext uri="{BB962C8B-B14F-4D97-AF65-F5344CB8AC3E}">
+        <p14:creationId xmlns:p14="http://schemas.microsoft.com/office/powerpoint/2010/main" val="1024086991"/>
+      </p:ext>
+    </p:extLst>
+  </p:cSld>
+  <p:clrMapOvr>
+    <a:masterClrMapping/>
+  </p:clrMapOvr>
+</p:notes>
+</file>
+
+<file path=ppt/notesSlides/notesSlide43.xml><?xml version="1.0" encoding="utf-8"?>
+<p:notes xmlns:a="http://schemas.openxmlformats.org/drawingml/2006/main" xmlns:r="http://schemas.openxmlformats.org/officeDocument/2006/relationships" xmlns:p="http://schemas.openxmlformats.org/presentationml/2006/main">
+  <p:cSld>
+    <p:spTree>
+      <p:nvGrpSpPr>
+        <p:cNvPr id="1" name=""/>
+        <p:cNvGrpSpPr/>
+        <p:nvPr/>
+      </p:nvGrpSpPr>
+      <p:grpSpPr>
+        <a:xfrm>
+          <a:off x="0" y="0"/>
+          <a:ext cx="0" cy="0"/>
+          <a:chOff x="0" y="0"/>
+          <a:chExt cx="0" cy="0"/>
+        </a:xfrm>
+      </p:grpSpPr>
+      <p:sp>
+        <p:nvSpPr>
+          <p:cNvPr id="2" name="Slide Image Placeholder 1"/>
+          <p:cNvSpPr>
+            <a:spLocks noGrp="1" noRot="1" noChangeAspect="1"/>
+          </p:cNvSpPr>
+          <p:nvPr>
+            <p:ph type="sldImg"/>
+          </p:nvPr>
+        </p:nvSpPr>
+        <p:spPr/>
+      </p:sp>
+      <p:sp>
+        <p:nvSpPr>
+          <p:cNvPr id="3" name="Notes Placeholder 2"/>
+          <p:cNvSpPr>
+            <a:spLocks noGrp="1"/>
+          </p:cNvSpPr>
+          <p:nvPr>
+            <p:ph type="body" idx="1"/>
+          </p:nvPr>
+        </p:nvSpPr>
+        <p:spPr/>
+        <p:txBody>
+          <a:bodyPr/>
+          <a:lstStyle/>
+          <a:p>
+            <a:r>
+              <a:rPr lang="en-US" dirty="0"/>
+              <a:t/>
+            </a:r>
+            <a:endParaRPr lang="en-US" dirty="0"/>
+          </a:p>
+        </p:txBody>
+      </p:sp>
+      <p:sp>
+        <p:nvSpPr>
+          <p:cNvPr id="4" name="Slide Number Placeholder 3"/>
+          <p:cNvSpPr>
+            <a:spLocks noGrp="1"/>
+          </p:cNvSpPr>
+          <p:nvPr>
+            <p:ph type="sldNum" sz="quarter" idx="10"/>
+          </p:nvPr>
+        </p:nvSpPr>
+        <p:spPr/>
+        <p:txBody>
+          <a:bodyPr/>
+          <a:lstStyle/>
+          <a:p>
+            <a:fld id="{F7021451-1387-4CA6-816F-3879F97B5CBC}" type="slidenum">
+              <a:rPr lang="en-US"/>
+              <a:t>43</a:t>
+            </a:fld>
+            <a:endParaRPr lang="en-US"/>
+          </a:p>
+        </p:txBody>
+      </p:sp>
+    </p:spTree>
+    <p:extLst>
+      <p:ext uri="{BB962C8B-B14F-4D97-AF65-F5344CB8AC3E}">
+        <p14:creationId xmlns:p14="http://schemas.microsoft.com/office/powerpoint/2010/main" val="1024086991"/>
+      </p:ext>
+    </p:extLst>
+  </p:cSld>
+  <p:clrMapOvr>
+    <a:masterClrMapping/>
+  </p:clrMapOvr>
+</p:notes>
+</file>
+
+<file path=ppt/notesSlides/notesSlide44.xml><?xml version="1.0" encoding="utf-8"?>
+<p:notes xmlns:a="http://schemas.openxmlformats.org/drawingml/2006/main" xmlns:r="http://schemas.openxmlformats.org/officeDocument/2006/relationships" xmlns:p="http://schemas.openxmlformats.org/presentationml/2006/main">
+  <p:cSld>
+    <p:spTree>
+      <p:nvGrpSpPr>
+        <p:cNvPr id="1" name=""/>
+        <p:cNvGrpSpPr/>
+        <p:nvPr/>
+      </p:nvGrpSpPr>
+      <p:grpSpPr>
+        <a:xfrm>
+          <a:off x="0" y="0"/>
+          <a:ext cx="0" cy="0"/>
+          <a:chOff x="0" y="0"/>
+          <a:chExt cx="0" cy="0"/>
+        </a:xfrm>
+      </p:grpSpPr>
+      <p:sp>
+        <p:nvSpPr>
+          <p:cNvPr id="2" name="Slide Image Placeholder 1"/>
+          <p:cNvSpPr>
+            <a:spLocks noGrp="1" noRot="1" noChangeAspect="1"/>
+          </p:cNvSpPr>
+          <p:nvPr>
+            <p:ph type="sldImg"/>
+          </p:nvPr>
+        </p:nvSpPr>
+        <p:spPr/>
+      </p:sp>
+      <p:sp>
+        <p:nvSpPr>
+          <p:cNvPr id="3" name="Notes Placeholder 2"/>
+          <p:cNvSpPr>
+            <a:spLocks noGrp="1"/>
+          </p:cNvSpPr>
+          <p:nvPr>
+            <p:ph type="body" idx="1"/>
+          </p:nvPr>
+        </p:nvSpPr>
+        <p:spPr/>
+        <p:txBody>
+          <a:bodyPr/>
+          <a:lstStyle/>
+          <a:p>
+            <a:r>
+              <a:rPr lang="en-US" dirty="0"/>
+              <a:t/>
+            </a:r>
+            <a:endParaRPr lang="en-US" dirty="0"/>
+          </a:p>
+        </p:txBody>
+      </p:sp>
+      <p:sp>
+        <p:nvSpPr>
+          <p:cNvPr id="4" name="Slide Number Placeholder 3"/>
+          <p:cNvSpPr>
+            <a:spLocks noGrp="1"/>
+          </p:cNvSpPr>
+          <p:nvPr>
+            <p:ph type="sldNum" sz="quarter" idx="10"/>
+          </p:nvPr>
+        </p:nvSpPr>
+        <p:spPr/>
+        <p:txBody>
+          <a:bodyPr/>
+          <a:lstStyle/>
+          <a:p>
+            <a:fld id="{F7021451-1387-4CA6-816F-3879F97B5CBC}" type="slidenum">
+              <a:rPr lang="en-US"/>
+              <a:t>44</a:t>
+            </a:fld>
+            <a:endParaRPr lang="en-US"/>
+          </a:p>
+        </p:txBody>
+      </p:sp>
+    </p:spTree>
+    <p:extLst>
+      <p:ext uri="{BB962C8B-B14F-4D97-AF65-F5344CB8AC3E}">
+        <p14:creationId xmlns:p14="http://schemas.microsoft.com/office/powerpoint/2010/main" val="1024086991"/>
+      </p:ext>
+    </p:extLst>
+  </p:cSld>
+  <p:clrMapOvr>
+    <a:masterClrMapping/>
+  </p:clrMapOvr>
+</p:notes>
+</file>
+
+<file path=ppt/notesSlides/notesSlide45.xml><?xml version="1.0" encoding="utf-8"?>
+<p:notes xmlns:a="http://schemas.openxmlformats.org/drawingml/2006/main" xmlns:r="http://schemas.openxmlformats.org/officeDocument/2006/relationships" xmlns:p="http://schemas.openxmlformats.org/presentationml/2006/main">
+  <p:cSld>
+    <p:spTree>
+      <p:nvGrpSpPr>
+        <p:cNvPr id="1" name=""/>
+        <p:cNvGrpSpPr/>
+        <p:nvPr/>
+      </p:nvGrpSpPr>
+      <p:grpSpPr>
+        <a:xfrm>
+          <a:off x="0" y="0"/>
+          <a:ext cx="0" cy="0"/>
+          <a:chOff x="0" y="0"/>
+          <a:chExt cx="0" cy="0"/>
+        </a:xfrm>
+      </p:grpSpPr>
+      <p:sp>
+        <p:nvSpPr>
+          <p:cNvPr id="2" name="Slide Image Placeholder 1"/>
+          <p:cNvSpPr>
+            <a:spLocks noGrp="1" noRot="1" noChangeAspect="1"/>
+          </p:cNvSpPr>
+          <p:nvPr>
+            <p:ph type="sldImg"/>
+          </p:nvPr>
+        </p:nvSpPr>
+        <p:spPr/>
+      </p:sp>
+      <p:sp>
+        <p:nvSpPr>
+          <p:cNvPr id="3" name="Notes Placeholder 2"/>
+          <p:cNvSpPr>
+            <a:spLocks noGrp="1"/>
+          </p:cNvSpPr>
+          <p:nvPr>
+            <p:ph type="body" idx="1"/>
+          </p:nvPr>
+        </p:nvSpPr>
+        <p:spPr/>
+        <p:txBody>
+          <a:bodyPr/>
+          <a:lstStyle/>
+          <a:p>
+            <a:r>
+              <a:rPr lang="en-US" dirty="0"/>
+              <a:t>Miért ilyen eltérőek a számok? A krematóriumot 1945 áprilisában felrobbantották, a nyilvántartások nagy része megsemmisült. A 2 000-es bírósági szám alsó határ. A zsidó deportáltak esetében egyes források csak a trieszti zsidókat, mások az összes, a városon áthaladó zsidót számolják.</a:t>
+            </a:r>
+            <a:endParaRPr lang="en-US" dirty="0"/>
+          </a:p>
+        </p:txBody>
+      </p:sp>
+      <p:sp>
+        <p:nvSpPr>
+          <p:cNvPr id="4" name="Slide Number Placeholder 3"/>
+          <p:cNvSpPr>
+            <a:spLocks noGrp="1"/>
+          </p:cNvSpPr>
+          <p:nvPr>
+            <p:ph type="sldNum" sz="quarter" idx="10"/>
+          </p:nvPr>
+        </p:nvSpPr>
+        <p:spPr/>
+        <p:txBody>
+          <a:bodyPr/>
+          <a:lstStyle/>
+          <a:p>
+            <a:fld id="{F7021451-1387-4CA6-816F-3879F97B5CBC}" type="slidenum">
+              <a:rPr lang="en-US"/>
+              <a:t>45</a:t>
+            </a:fld>
+            <a:endParaRPr lang="en-US"/>
+          </a:p>
+        </p:txBody>
+      </p:sp>
+    </p:spTree>
+    <p:extLst>
+      <p:ext uri="{BB962C8B-B14F-4D97-AF65-F5344CB8AC3E}">
+        <p14:creationId xmlns:p14="http://schemas.microsoft.com/office/powerpoint/2010/main" val="1024086991"/>
+      </p:ext>
+    </p:extLst>
+  </p:cSld>
+  <p:clrMapOvr>
+    <a:masterClrMapping/>
+  </p:clrMapOvr>
+</p:notes>
+</file>
+
+<file path=ppt/notesSlides/notesSlide46.xml><?xml version="1.0" encoding="utf-8"?>
+<p:notes xmlns:a="http://schemas.openxmlformats.org/drawingml/2006/main" xmlns:r="http://schemas.openxmlformats.org/officeDocument/2006/relationships" xmlns:p="http://schemas.openxmlformats.org/presentationml/2006/main">
+  <p:cSld>
+    <p:spTree>
+      <p:nvGrpSpPr>
+        <p:cNvPr id="1" name=""/>
+        <p:cNvGrpSpPr/>
+        <p:nvPr/>
+      </p:nvGrpSpPr>
+      <p:grpSpPr>
+        <a:xfrm>
+          <a:off x="0" y="0"/>
+          <a:ext cx="0" cy="0"/>
+          <a:chOff x="0" y="0"/>
+          <a:chExt cx="0" cy="0"/>
+        </a:xfrm>
+      </p:grpSpPr>
+      <p:sp>
+        <p:nvSpPr>
+          <p:cNvPr id="2" name="Slide Image Placeholder 1"/>
+          <p:cNvSpPr>
+            <a:spLocks noGrp="1" noRot="1" noChangeAspect="1"/>
+          </p:cNvSpPr>
+          <p:nvPr>
+            <p:ph type="sldImg"/>
+          </p:nvPr>
+        </p:nvSpPr>
+        <p:spPr/>
+      </p:sp>
+      <p:sp>
+        <p:nvSpPr>
+          <p:cNvPr id="3" name="Notes Placeholder 2"/>
+          <p:cNvSpPr>
+            <a:spLocks noGrp="1"/>
+          </p:cNvSpPr>
+          <p:nvPr>
+            <p:ph type="body" idx="1"/>
+          </p:nvPr>
+        </p:nvSpPr>
+        <p:spPr/>
+        <p:txBody>
+          <a:bodyPr/>
+          <a:lstStyle/>
+          <a:p>
+            <a:r>
+              <a:rPr lang="en-US" dirty="0"/>
+              <a:t/>
+            </a:r>
+            <a:endParaRPr lang="en-US" dirty="0"/>
+          </a:p>
+        </p:txBody>
+      </p:sp>
+      <p:sp>
+        <p:nvSpPr>
+          <p:cNvPr id="4" name="Slide Number Placeholder 3"/>
+          <p:cNvSpPr>
+            <a:spLocks noGrp="1"/>
+          </p:cNvSpPr>
+          <p:nvPr>
+            <p:ph type="sldNum" sz="quarter" idx="10"/>
+          </p:nvPr>
+        </p:nvSpPr>
+        <p:spPr/>
+        <p:txBody>
+          <a:bodyPr/>
+          <a:lstStyle/>
+          <a:p>
+            <a:fld id="{F7021451-1387-4CA6-816F-3879F97B5CBC}" type="slidenum">
+              <a:rPr lang="en-US"/>
+              <a:t>46</a:t>
+            </a:fld>
+            <a:endParaRPr lang="en-US"/>
+          </a:p>
+        </p:txBody>
+      </p:sp>
+    </p:spTree>
+    <p:extLst>
+      <p:ext uri="{BB962C8B-B14F-4D97-AF65-F5344CB8AC3E}">
+        <p14:creationId xmlns:p14="http://schemas.microsoft.com/office/powerpoint/2010/main" val="1024086991"/>
+      </p:ext>
+    </p:extLst>
+  </p:cSld>
+  <p:clrMapOvr>
+    <a:masterClrMapping/>
+  </p:clrMapOvr>
+</p:notes>
+</file>
+
+<file path=ppt/notesSlides/notesSlide47.xml><?xml version="1.0" encoding="utf-8"?>
+<p:notes xmlns:a="http://schemas.openxmlformats.org/drawingml/2006/main" xmlns:r="http://schemas.openxmlformats.org/officeDocument/2006/relationships" xmlns:p="http://schemas.openxmlformats.org/presentationml/2006/main">
+  <p:cSld>
+    <p:spTree>
+      <p:nvGrpSpPr>
+        <p:cNvPr id="1" name=""/>
+        <p:cNvGrpSpPr/>
+        <p:nvPr/>
+      </p:nvGrpSpPr>
+      <p:grpSpPr>
+        <a:xfrm>
+          <a:off x="0" y="0"/>
+          <a:ext cx="0" cy="0"/>
+          <a:chOff x="0" y="0"/>
+          <a:chExt cx="0" cy="0"/>
+        </a:xfrm>
+      </p:grpSpPr>
+      <p:sp>
+        <p:nvSpPr>
+          <p:cNvPr id="2" name="Slide Image Placeholder 1"/>
+          <p:cNvSpPr>
+            <a:spLocks noGrp="1" noRot="1" noChangeAspect="1"/>
+          </p:cNvSpPr>
+          <p:nvPr>
+            <p:ph type="sldImg"/>
+          </p:nvPr>
+        </p:nvSpPr>
+        <p:spPr/>
+      </p:sp>
+      <p:sp>
+        <p:nvSpPr>
+          <p:cNvPr id="3" name="Notes Placeholder 2"/>
+          <p:cNvSpPr>
+            <a:spLocks noGrp="1"/>
+          </p:cNvSpPr>
+          <p:nvPr>
+            <p:ph type="body" idx="1"/>
+          </p:nvPr>
+        </p:nvSpPr>
+        <p:spPr/>
+        <p:txBody>
+          <a:bodyPr/>
+          <a:lstStyle/>
+          <a:p>
+            <a:r>
+              <a:rPr lang="en-US" dirty="0"/>
+              <a:t/>
+            </a:r>
+            <a:endParaRPr lang="en-US" dirty="0"/>
+          </a:p>
+        </p:txBody>
+      </p:sp>
+      <p:sp>
+        <p:nvSpPr>
+          <p:cNvPr id="4" name="Slide Number Placeholder 3"/>
+          <p:cNvSpPr>
+            <a:spLocks noGrp="1"/>
+          </p:cNvSpPr>
+          <p:nvPr>
+            <p:ph type="sldNum" sz="quarter" idx="10"/>
+          </p:nvPr>
+        </p:nvSpPr>
+        <p:spPr/>
+        <p:txBody>
+          <a:bodyPr/>
+          <a:lstStyle/>
+          <a:p>
+            <a:fld id="{F7021451-1387-4CA6-816F-3879F97B5CBC}" type="slidenum">
+              <a:rPr lang="en-US"/>
+              <a:t>47</a:t>
+            </a:fld>
+            <a:endParaRPr lang="en-US"/>
+          </a:p>
+        </p:txBody>
+      </p:sp>
+    </p:spTree>
+    <p:extLst>
+      <p:ext uri="{BB962C8B-B14F-4D97-AF65-F5344CB8AC3E}">
+        <p14:creationId xmlns:p14="http://schemas.microsoft.com/office/powerpoint/2010/main" val="1024086991"/>
+      </p:ext>
+    </p:extLst>
+  </p:cSld>
+  <p:clrMapOvr>
+    <a:masterClrMapping/>
+  </p:clrMapOvr>
+</p:notes>
+</file>
+
+<file path=ppt/notesSlides/notesSlide48.xml><?xml version="1.0" encoding="utf-8"?>
+<p:notes xmlns:a="http://schemas.openxmlformats.org/drawingml/2006/main" xmlns:r="http://schemas.openxmlformats.org/officeDocument/2006/relationships" xmlns:p="http://schemas.openxmlformats.org/presentationml/2006/main">
+  <p:cSld>
+    <p:spTree>
+      <p:nvGrpSpPr>
+        <p:cNvPr id="1" name=""/>
+        <p:cNvGrpSpPr/>
+        <p:nvPr/>
+      </p:nvGrpSpPr>
+      <p:grpSpPr>
+        <a:xfrm>
+          <a:off x="0" y="0"/>
+          <a:ext cx="0" cy="0"/>
+          <a:chOff x="0" y="0"/>
+          <a:chExt cx="0" cy="0"/>
+        </a:xfrm>
+      </p:grpSpPr>
+      <p:sp>
+        <p:nvSpPr>
+          <p:cNvPr id="2" name="Slide Image Placeholder 1"/>
+          <p:cNvSpPr>
+            <a:spLocks noGrp="1" noRot="1" noChangeAspect="1"/>
+          </p:cNvSpPr>
+          <p:nvPr>
+            <p:ph type="sldImg"/>
+          </p:nvPr>
+        </p:nvSpPr>
+        <p:spPr/>
+      </p:sp>
+      <p:sp>
+        <p:nvSpPr>
+          <p:cNvPr id="3" name="Notes Placeholder 2"/>
+          <p:cNvSpPr>
+            <a:spLocks noGrp="1"/>
+          </p:cNvSpPr>
+          <p:nvPr>
+            <p:ph type="body" idx="1"/>
+          </p:nvPr>
+        </p:nvSpPr>
+        <p:spPr/>
+        <p:txBody>
+          <a:bodyPr/>
+          <a:lstStyle/>
+          <a:p>
+            <a:r>
+              <a:rPr lang="en-US" dirty="0"/>
+              <a:t/>
+            </a:r>
+            <a:endParaRPr lang="en-US" dirty="0"/>
+          </a:p>
+        </p:txBody>
+      </p:sp>
+      <p:sp>
+        <p:nvSpPr>
+          <p:cNvPr id="4" name="Slide Number Placeholder 3"/>
+          <p:cNvSpPr>
+            <a:spLocks noGrp="1"/>
+          </p:cNvSpPr>
+          <p:nvPr>
+            <p:ph type="sldNum" sz="quarter" idx="10"/>
+          </p:nvPr>
+        </p:nvSpPr>
+        <p:spPr/>
+        <p:txBody>
+          <a:bodyPr/>
+          <a:lstStyle/>
+          <a:p>
+            <a:fld id="{F7021451-1387-4CA6-816F-3879F97B5CBC}" type="slidenum">
+              <a:rPr lang="en-US"/>
+              <a:t>48</a:t>
+            </a:fld>
+            <a:endParaRPr lang="en-US"/>
+          </a:p>
+        </p:txBody>
+      </p:sp>
+    </p:spTree>
+    <p:extLst>
+      <p:ext uri="{BB962C8B-B14F-4D97-AF65-F5344CB8AC3E}">
+        <p14:creationId xmlns:p14="http://schemas.microsoft.com/office/powerpoint/2010/main" val="1024086991"/>
+      </p:ext>
+    </p:extLst>
+  </p:cSld>
+  <p:clrMapOvr>
+    <a:masterClrMapping/>
+  </p:clrMapOvr>
+</p:notes>
+</file>
+
+<file path=ppt/notesSlides/notesSlide49.xml><?xml version="1.0" encoding="utf-8"?>
+<p:notes xmlns:a="http://schemas.openxmlformats.org/drawingml/2006/main" xmlns:r="http://schemas.openxmlformats.org/officeDocument/2006/relationships" xmlns:p="http://schemas.openxmlformats.org/presentationml/2006/main">
+  <p:cSld>
+    <p:spTree>
+      <p:nvGrpSpPr>
+        <p:cNvPr id="1" name=""/>
+        <p:cNvGrpSpPr/>
+        <p:nvPr/>
+      </p:nvGrpSpPr>
+      <p:grpSpPr>
+        <a:xfrm>
+          <a:off x="0" y="0"/>
+          <a:ext cx="0" cy="0"/>
+          <a:chOff x="0" y="0"/>
+          <a:chExt cx="0" cy="0"/>
+        </a:xfrm>
+      </p:grpSpPr>
+      <p:sp>
+        <p:nvSpPr>
+          <p:cNvPr id="2" name="Slide Image Placeholder 1"/>
+          <p:cNvSpPr>
+            <a:spLocks noGrp="1" noRot="1" noChangeAspect="1"/>
+          </p:cNvSpPr>
+          <p:nvPr>
+            <p:ph type="sldImg"/>
+          </p:nvPr>
+        </p:nvSpPr>
+        <p:spPr/>
+      </p:sp>
+      <p:sp>
+        <p:nvSpPr>
+          <p:cNvPr id="3" name="Notes Placeholder 2"/>
+          <p:cNvSpPr>
+            <a:spLocks noGrp="1"/>
+          </p:cNvSpPr>
+          <p:nvPr>
+            <p:ph type="body" idx="1"/>
+          </p:nvPr>
+        </p:nvSpPr>
+        <p:spPr/>
+        <p:txBody>
+          <a:bodyPr/>
+          <a:lstStyle/>
+          <a:p>
+            <a:r>
+              <a:rPr lang="en-US" dirty="0"/>
+              <a:t/>
+            </a:r>
+            <a:endParaRPr lang="en-US" dirty="0"/>
+          </a:p>
+        </p:txBody>
+      </p:sp>
+      <p:sp>
+        <p:nvSpPr>
+          <p:cNvPr id="4" name="Slide Number Placeholder 3"/>
+          <p:cNvSpPr>
+            <a:spLocks noGrp="1"/>
+          </p:cNvSpPr>
+          <p:nvPr>
+            <p:ph type="sldNum" sz="quarter" idx="10"/>
+          </p:nvPr>
+        </p:nvSpPr>
+        <p:spPr/>
+        <p:txBody>
+          <a:bodyPr/>
+          <a:lstStyle/>
+          <a:p>
+            <a:fld id="{F7021451-1387-4CA6-816F-3879F97B5CBC}" type="slidenum">
+              <a:rPr lang="en-US"/>
+              <a:t>49</a:t>
+            </a:fld>
+            <a:endParaRPr lang="en-US"/>
+          </a:p>
+        </p:txBody>
+      </p:sp>
+    </p:spTree>
+    <p:extLst>
+      <p:ext uri="{BB962C8B-B14F-4D97-AF65-F5344CB8AC3E}">
+        <p14:creationId xmlns:p14="http://schemas.microsoft.com/office/powerpoint/2010/main" val="1024086991"/>
+      </p:ext>
+    </p:extLst>
+  </p:cSld>
+  <p:clrMapOvr>
+    <a:masterClrMapping/>
+  </p:clrMapOvr>
+</p:notes>
+</file>
+
 <file path=ppt/notesSlides/notesSlide5.xml><?xml version="1.0" encoding="utf-8"?>
 <p:notes xmlns:a="http://schemas.openxmlformats.org/drawingml/2006/main" xmlns:r="http://schemas.openxmlformats.org/officeDocument/2006/relationships" xmlns:p="http://schemas.openxmlformats.org/presentationml/2006/main">
   <p:cSld>
@@ -6168,6 +7136,358 @@
             <a:fld id="{F7021451-1387-4CA6-816F-3879F97B5CBC}" type="slidenum">
               <a:rPr lang="en-US"/>
               <a:t>5</a:t>
+            </a:fld>
+            <a:endParaRPr lang="en-US"/>
+          </a:p>
+        </p:txBody>
+      </p:sp>
+    </p:spTree>
+    <p:extLst>
+      <p:ext uri="{BB962C8B-B14F-4D97-AF65-F5344CB8AC3E}">
+        <p14:creationId xmlns:p14="http://schemas.microsoft.com/office/powerpoint/2010/main" val="1024086991"/>
+      </p:ext>
+    </p:extLst>
+  </p:cSld>
+  <p:clrMapOvr>
+    <a:masterClrMapping/>
+  </p:clrMapOvr>
+</p:notes>
+</file>
+
+<file path=ppt/notesSlides/notesSlide50.xml><?xml version="1.0" encoding="utf-8"?>
+<p:notes xmlns:a="http://schemas.openxmlformats.org/drawingml/2006/main" xmlns:r="http://schemas.openxmlformats.org/officeDocument/2006/relationships" xmlns:p="http://schemas.openxmlformats.org/presentationml/2006/main">
+  <p:cSld>
+    <p:spTree>
+      <p:nvGrpSpPr>
+        <p:cNvPr id="1" name=""/>
+        <p:cNvGrpSpPr/>
+        <p:nvPr/>
+      </p:nvGrpSpPr>
+      <p:grpSpPr>
+        <a:xfrm>
+          <a:off x="0" y="0"/>
+          <a:ext cx="0" cy="0"/>
+          <a:chOff x="0" y="0"/>
+          <a:chExt cx="0" cy="0"/>
+        </a:xfrm>
+      </p:grpSpPr>
+      <p:sp>
+        <p:nvSpPr>
+          <p:cNvPr id="2" name="Slide Image Placeholder 1"/>
+          <p:cNvSpPr>
+            <a:spLocks noGrp="1" noRot="1" noChangeAspect="1"/>
+          </p:cNvSpPr>
+          <p:nvPr>
+            <p:ph type="sldImg"/>
+          </p:nvPr>
+        </p:nvSpPr>
+        <p:spPr/>
+      </p:sp>
+      <p:sp>
+        <p:nvSpPr>
+          <p:cNvPr id="3" name="Notes Placeholder 2"/>
+          <p:cNvSpPr>
+            <a:spLocks noGrp="1"/>
+          </p:cNvSpPr>
+          <p:nvPr>
+            <p:ph type="body" idx="1"/>
+          </p:nvPr>
+        </p:nvSpPr>
+        <p:spPr/>
+        <p:txBody>
+          <a:bodyPr/>
+          <a:lstStyle/>
+          <a:p>
+            <a:r>
+              <a:rPr lang="en-US" dirty="0"/>
+              <a:t>Tipp: ne olvassátok fel, hanem egy-egy kulcsszámot jegyezzetek meg blokkonként (OZAK – Reinhard – 1944. ápr. 4. – 22/43 vonat – 2 000–5 000 – 1976). Összekötő mondat a magyar szálhoz: ugyanabban a hónapban, amikor itt beindult a krematórium (1944 április), Magyarországon megkezdődött a gettósítás.</a:t>
+            </a:r>
+            <a:endParaRPr lang="en-US" dirty="0"/>
+          </a:p>
+        </p:txBody>
+      </p:sp>
+      <p:sp>
+        <p:nvSpPr>
+          <p:cNvPr id="4" name="Slide Number Placeholder 3"/>
+          <p:cNvSpPr>
+            <a:spLocks noGrp="1"/>
+          </p:cNvSpPr>
+          <p:nvPr>
+            <p:ph type="sldNum" sz="quarter" idx="10"/>
+          </p:nvPr>
+        </p:nvSpPr>
+        <p:spPr/>
+        <p:txBody>
+          <a:bodyPr/>
+          <a:lstStyle/>
+          <a:p>
+            <a:fld id="{F7021451-1387-4CA6-816F-3879F97B5CBC}" type="slidenum">
+              <a:rPr lang="en-US"/>
+              <a:t>50</a:t>
+            </a:fld>
+            <a:endParaRPr lang="en-US"/>
+          </a:p>
+        </p:txBody>
+      </p:sp>
+    </p:spTree>
+    <p:extLst>
+      <p:ext uri="{BB962C8B-B14F-4D97-AF65-F5344CB8AC3E}">
+        <p14:creationId xmlns:p14="http://schemas.microsoft.com/office/powerpoint/2010/main" val="1024086991"/>
+      </p:ext>
+    </p:extLst>
+  </p:cSld>
+  <p:clrMapOvr>
+    <a:masterClrMapping/>
+  </p:clrMapOvr>
+</p:notes>
+</file>
+
+<file path=ppt/notesSlides/notesSlide51.xml><?xml version="1.0" encoding="utf-8"?>
+<p:notes xmlns:a="http://schemas.openxmlformats.org/drawingml/2006/main" xmlns:r="http://schemas.openxmlformats.org/officeDocument/2006/relationships" xmlns:p="http://schemas.openxmlformats.org/presentationml/2006/main">
+  <p:cSld>
+    <p:spTree>
+      <p:nvGrpSpPr>
+        <p:cNvPr id="1" name=""/>
+        <p:cNvGrpSpPr/>
+        <p:nvPr/>
+      </p:nvGrpSpPr>
+      <p:grpSpPr>
+        <a:xfrm>
+          <a:off x="0" y="0"/>
+          <a:ext cx="0" cy="0"/>
+          <a:chOff x="0" y="0"/>
+          <a:chExt cx="0" cy="0"/>
+        </a:xfrm>
+      </p:grpSpPr>
+      <p:sp>
+        <p:nvSpPr>
+          <p:cNvPr id="2" name="Slide Image Placeholder 1"/>
+          <p:cNvSpPr>
+            <a:spLocks noGrp="1" noRot="1" noChangeAspect="1"/>
+          </p:cNvSpPr>
+          <p:nvPr>
+            <p:ph type="sldImg"/>
+          </p:nvPr>
+        </p:nvSpPr>
+        <p:spPr/>
+      </p:sp>
+      <p:sp>
+        <p:nvSpPr>
+          <p:cNvPr id="3" name="Notes Placeholder 2"/>
+          <p:cNvSpPr>
+            <a:spLocks noGrp="1"/>
+          </p:cNvSpPr>
+          <p:nvPr>
+            <p:ph type="body" idx="1"/>
+          </p:nvPr>
+        </p:nvSpPr>
+        <p:spPr/>
+        <p:txBody>
+          <a:bodyPr/>
+          <a:lstStyle/>
+          <a:p>
+            <a:r>
+              <a:rPr lang="en-US" dirty="0"/>
+              <a:t/>
+            </a:r>
+            <a:endParaRPr lang="en-US" dirty="0"/>
+          </a:p>
+        </p:txBody>
+      </p:sp>
+      <p:sp>
+        <p:nvSpPr>
+          <p:cNvPr id="4" name="Slide Number Placeholder 3"/>
+          <p:cNvSpPr>
+            <a:spLocks noGrp="1"/>
+          </p:cNvSpPr>
+          <p:nvPr>
+            <p:ph type="sldNum" sz="quarter" idx="10"/>
+          </p:nvPr>
+        </p:nvSpPr>
+        <p:spPr/>
+        <p:txBody>
+          <a:bodyPr/>
+          <a:lstStyle/>
+          <a:p>
+            <a:fld id="{F7021451-1387-4CA6-816F-3879F97B5CBC}" type="slidenum">
+              <a:rPr lang="en-US"/>
+              <a:t>51</a:t>
+            </a:fld>
+            <a:endParaRPr lang="en-US"/>
+          </a:p>
+        </p:txBody>
+      </p:sp>
+    </p:spTree>
+    <p:extLst>
+      <p:ext uri="{BB962C8B-B14F-4D97-AF65-F5344CB8AC3E}">
+        <p14:creationId xmlns:p14="http://schemas.microsoft.com/office/powerpoint/2010/main" val="1024086991"/>
+      </p:ext>
+    </p:extLst>
+  </p:cSld>
+  <p:clrMapOvr>
+    <a:masterClrMapping/>
+  </p:clrMapOvr>
+</p:notes>
+</file>
+
+<file path=ppt/notesSlides/notesSlide52.xml><?xml version="1.0" encoding="utf-8"?>
+<p:notes xmlns:a="http://schemas.openxmlformats.org/drawingml/2006/main" xmlns:r="http://schemas.openxmlformats.org/officeDocument/2006/relationships" xmlns:p="http://schemas.openxmlformats.org/presentationml/2006/main">
+  <p:cSld>
+    <p:spTree>
+      <p:nvGrpSpPr>
+        <p:cNvPr id="1" name=""/>
+        <p:cNvGrpSpPr/>
+        <p:nvPr/>
+      </p:nvGrpSpPr>
+      <p:grpSpPr>
+        <a:xfrm>
+          <a:off x="0" y="0"/>
+          <a:ext cx="0" cy="0"/>
+          <a:chOff x="0" y="0"/>
+          <a:chExt cx="0" cy="0"/>
+        </a:xfrm>
+      </p:grpSpPr>
+      <p:sp>
+        <p:nvSpPr>
+          <p:cNvPr id="2" name="Slide Image Placeholder 1"/>
+          <p:cNvSpPr>
+            <a:spLocks noGrp="1" noRot="1" noChangeAspect="1"/>
+          </p:cNvSpPr>
+          <p:nvPr>
+            <p:ph type="sldImg"/>
+          </p:nvPr>
+        </p:nvSpPr>
+        <p:spPr/>
+      </p:sp>
+      <p:sp>
+        <p:nvSpPr>
+          <p:cNvPr id="3" name="Notes Placeholder 2"/>
+          <p:cNvSpPr>
+            <a:spLocks noGrp="1"/>
+          </p:cNvSpPr>
+          <p:nvPr>
+            <p:ph type="body" idx="1"/>
+          </p:nvPr>
+        </p:nvSpPr>
+        <p:spPr/>
+        <p:txBody>
+          <a:bodyPr/>
+          <a:lstStyle/>
+          <a:p>
+            <a:r>
+              <a:rPr lang="en-US" dirty="0"/>
+              <a:t/>
+            </a:r>
+            <a:endParaRPr lang="en-US" dirty="0"/>
+          </a:p>
+        </p:txBody>
+      </p:sp>
+      <p:sp>
+        <p:nvSpPr>
+          <p:cNvPr id="4" name="Slide Number Placeholder 3"/>
+          <p:cNvSpPr>
+            <a:spLocks noGrp="1"/>
+          </p:cNvSpPr>
+          <p:nvPr>
+            <p:ph type="sldNum" sz="quarter" idx="10"/>
+          </p:nvPr>
+        </p:nvSpPr>
+        <p:spPr/>
+        <p:txBody>
+          <a:bodyPr/>
+          <a:lstStyle/>
+          <a:p>
+            <a:fld id="{F7021451-1387-4CA6-816F-3879F97B5CBC}" type="slidenum">
+              <a:rPr lang="en-US"/>
+              <a:t>52</a:t>
+            </a:fld>
+            <a:endParaRPr lang="en-US"/>
+          </a:p>
+        </p:txBody>
+      </p:sp>
+    </p:spTree>
+    <p:extLst>
+      <p:ext uri="{BB962C8B-B14F-4D97-AF65-F5344CB8AC3E}">
+        <p14:creationId xmlns:p14="http://schemas.microsoft.com/office/powerpoint/2010/main" val="1024086991"/>
+      </p:ext>
+    </p:extLst>
+  </p:cSld>
+  <p:clrMapOvr>
+    <a:masterClrMapping/>
+  </p:clrMapOvr>
+</p:notes>
+</file>
+
+<file path=ppt/notesSlides/notesSlide53.xml><?xml version="1.0" encoding="utf-8"?>
+<p:notes xmlns:a="http://schemas.openxmlformats.org/drawingml/2006/main" xmlns:r="http://schemas.openxmlformats.org/officeDocument/2006/relationships" xmlns:p="http://schemas.openxmlformats.org/presentationml/2006/main">
+  <p:cSld>
+    <p:spTree>
+      <p:nvGrpSpPr>
+        <p:cNvPr id="1" name=""/>
+        <p:cNvGrpSpPr/>
+        <p:nvPr/>
+      </p:nvGrpSpPr>
+      <p:grpSpPr>
+        <a:xfrm>
+          <a:off x="0" y="0"/>
+          <a:ext cx="0" cy="0"/>
+          <a:chOff x="0" y="0"/>
+          <a:chExt cx="0" cy="0"/>
+        </a:xfrm>
+      </p:grpSpPr>
+      <p:sp>
+        <p:nvSpPr>
+          <p:cNvPr id="2" name="Slide Image Placeholder 1"/>
+          <p:cNvSpPr>
+            <a:spLocks noGrp="1" noRot="1" noChangeAspect="1"/>
+          </p:cNvSpPr>
+          <p:nvPr>
+            <p:ph type="sldImg"/>
+          </p:nvPr>
+        </p:nvSpPr>
+        <p:spPr/>
+      </p:sp>
+      <p:sp>
+        <p:nvSpPr>
+          <p:cNvPr id="3" name="Notes Placeholder 2"/>
+          <p:cNvSpPr>
+            <a:spLocks noGrp="1"/>
+          </p:cNvSpPr>
+          <p:nvPr>
+            <p:ph type="body" idx="1"/>
+          </p:nvPr>
+        </p:nvSpPr>
+        <p:spPr/>
+        <p:txBody>
+          <a:bodyPr/>
+          <a:lstStyle/>
+          <a:p>
+            <a:r>
+              <a:rPr lang="en-US" dirty="0"/>
+              <a:t/>
+            </a:r>
+            <a:endParaRPr lang="en-US" dirty="0"/>
+          </a:p>
+        </p:txBody>
+      </p:sp>
+      <p:sp>
+        <p:nvSpPr>
+          <p:cNvPr id="4" name="Slide Number Placeholder 3"/>
+          <p:cNvSpPr>
+            <a:spLocks noGrp="1"/>
+          </p:cNvSpPr>
+          <p:nvPr>
+            <p:ph type="sldNum" sz="quarter" idx="10"/>
+          </p:nvPr>
+        </p:nvSpPr>
+        <p:spPr/>
+        <p:txBody>
+          <a:bodyPr/>
+          <a:lstStyle/>
+          <a:p>
+            <a:fld id="{F7021451-1387-4CA6-816F-3879F97B5CBC}" type="slidenum">
+              <a:rPr lang="en-US"/>
+              <a:t>53</a:t>
             </a:fld>
             <a:endParaRPr lang="en-US"/>
           </a:p>
@@ -7364,7 +8684,7 @@
                   <a:srgbClr val="D1D5DB"/>
                 </a:solidFill>
               </a:rPr>
-              <a:t>Mi történt Olaszországban 1938 és 1945 között, hogyan zajlott a népirtás más európai országokban, és miért ennyire eltérő a mérleg? Kutatási összefoglaló térképekkel, adatokkal és forrásokkal.</a:t>
+              <a:t>Mi történt Olaszországban 1938 és 1945 között, hogyan zajlott a népirtás más európai országokban, és miért ennyire eltérő a mérleg? Kutatási összefoglaló térképekkel, adatokkal és forrásokkal — és felkészülés a trieszti Risiera di San Sabba meglátogatására.</a:t>
             </a:r>
             <a:endParaRPr lang="en-US" sz="2000" dirty="0"/>
           </a:p>
@@ -21801,7 +23121,7 @@
         </p:nvSpPr>
         <p:spPr>
           <a:xfrm>
-            <a:off x="548640" y="1325880"/>
+            <a:off x="548640" y="1188720"/>
             <a:ext cx="685800" cy="685800"/>
           </a:xfrm>
           <a:prstGeom prst="ellipse">
@@ -21826,7 +23146,7 @@
         </p:nvSpPr>
         <p:spPr>
           <a:xfrm>
-            <a:off x="548640" y="1325880"/>
+            <a:off x="548640" y="1188720"/>
             <a:ext cx="685800" cy="685800"/>
           </a:xfrm>
           <a:prstGeom prst="rect">
@@ -21862,7 +23182,7 @@
         </p:nvSpPr>
         <p:spPr>
           <a:xfrm>
-            <a:off x="1463040" y="1307592"/>
+            <a:off x="1463040" y="1170432"/>
             <a:ext cx="9601200" cy="384048"/>
           </a:xfrm>
           <a:prstGeom prst="rect">
@@ -21898,7 +23218,7 @@
         </p:nvSpPr>
         <p:spPr>
           <a:xfrm>
-            <a:off x="1463040" y="1691640"/>
+            <a:off x="1463040" y="1554480"/>
             <a:ext cx="9601200" cy="329184"/>
           </a:xfrm>
           <a:prstGeom prst="rect">
@@ -21934,7 +23254,7 @@
         </p:nvSpPr>
         <p:spPr>
           <a:xfrm>
-            <a:off x="548640" y="2258568"/>
+            <a:off x="548640" y="2011680"/>
             <a:ext cx="685800" cy="685800"/>
           </a:xfrm>
           <a:prstGeom prst="ellipse">
@@ -21959,7 +23279,7 @@
         </p:nvSpPr>
         <p:spPr>
           <a:xfrm>
-            <a:off x="548640" y="2258568"/>
+            <a:off x="548640" y="2011680"/>
             <a:ext cx="685800" cy="685800"/>
           </a:xfrm>
           <a:prstGeom prst="rect">
@@ -21995,7 +23315,7 @@
         </p:nvSpPr>
         <p:spPr>
           <a:xfrm>
-            <a:off x="1463040" y="2240280"/>
+            <a:off x="1463040" y="1993392"/>
             <a:ext cx="9601200" cy="384048"/>
           </a:xfrm>
           <a:prstGeom prst="rect">
@@ -22031,7 +23351,7 @@
         </p:nvSpPr>
         <p:spPr>
           <a:xfrm>
-            <a:off x="1463040" y="2624328"/>
+            <a:off x="1463040" y="2377440"/>
             <a:ext cx="9601200" cy="329184"/>
           </a:xfrm>
           <a:prstGeom prst="rect">
@@ -22067,7 +23387,7 @@
         </p:nvSpPr>
         <p:spPr>
           <a:xfrm>
-            <a:off x="548640" y="3191256"/>
+            <a:off x="548640" y="2834640"/>
             <a:ext cx="685800" cy="685800"/>
           </a:xfrm>
           <a:prstGeom prst="ellipse">
@@ -22092,7 +23412,7 @@
         </p:nvSpPr>
         <p:spPr>
           <a:xfrm>
-            <a:off x="548640" y="3191256"/>
+            <a:off x="548640" y="2834640"/>
             <a:ext cx="685800" cy="685800"/>
           </a:xfrm>
           <a:prstGeom prst="rect">
@@ -22128,7 +23448,7 @@
         </p:nvSpPr>
         <p:spPr>
           <a:xfrm>
-            <a:off x="1463040" y="3172968"/>
+            <a:off x="1463040" y="2816352"/>
             <a:ext cx="9601200" cy="384048"/>
           </a:xfrm>
           <a:prstGeom prst="rect">
@@ -22164,7 +23484,7 @@
         </p:nvSpPr>
         <p:spPr>
           <a:xfrm>
-            <a:off x="1463040" y="3557016"/>
+            <a:off x="1463040" y="3200400"/>
             <a:ext cx="9601200" cy="329184"/>
           </a:xfrm>
           <a:prstGeom prst="rect">
@@ -22200,7 +23520,7 @@
         </p:nvSpPr>
         <p:spPr>
           <a:xfrm>
-            <a:off x="548640" y="4123944"/>
+            <a:off x="548640" y="3657600"/>
             <a:ext cx="685800" cy="685800"/>
           </a:xfrm>
           <a:prstGeom prst="ellipse">
@@ -22225,7 +23545,7 @@
         </p:nvSpPr>
         <p:spPr>
           <a:xfrm>
-            <a:off x="548640" y="4123944"/>
+            <a:off x="548640" y="3657600"/>
             <a:ext cx="685800" cy="685800"/>
           </a:xfrm>
           <a:prstGeom prst="rect">
@@ -22261,7 +23581,7 @@
         </p:nvSpPr>
         <p:spPr>
           <a:xfrm>
-            <a:off x="1463040" y="4105656"/>
+            <a:off x="1463040" y="3639312"/>
             <a:ext cx="9601200" cy="384048"/>
           </a:xfrm>
           <a:prstGeom prst="rect">
@@ -22297,7 +23617,7 @@
         </p:nvSpPr>
         <p:spPr>
           <a:xfrm>
-            <a:off x="1463040" y="4489704"/>
+            <a:off x="1463040" y="4023360"/>
             <a:ext cx="9601200" cy="329184"/>
           </a:xfrm>
           <a:prstGeom prst="rect">
@@ -22333,7 +23653,7 @@
         </p:nvSpPr>
         <p:spPr>
           <a:xfrm>
-            <a:off x="548640" y="5056632"/>
+            <a:off x="548640" y="4480560"/>
             <a:ext cx="685800" cy="685800"/>
           </a:xfrm>
           <a:prstGeom prst="ellipse">
@@ -22358,7 +23678,7 @@
         </p:nvSpPr>
         <p:spPr>
           <a:xfrm>
-            <a:off x="548640" y="5056632"/>
+            <a:off x="548640" y="4480560"/>
             <a:ext cx="685800" cy="685800"/>
           </a:xfrm>
           <a:prstGeom prst="rect">
@@ -22394,7 +23714,7 @@
         </p:nvSpPr>
         <p:spPr>
           <a:xfrm>
-            <a:off x="1463040" y="5038344"/>
+            <a:off x="1463040" y="4462272"/>
             <a:ext cx="9601200" cy="384048"/>
           </a:xfrm>
           <a:prstGeom prst="rect">
@@ -22430,7 +23750,7 @@
         </p:nvSpPr>
         <p:spPr>
           <a:xfrm>
-            <a:off x="1463040" y="5422392"/>
+            <a:off x="1463040" y="4846320"/>
             <a:ext cx="9601200" cy="329184"/>
           </a:xfrm>
           <a:prstGeom prst="rect">
@@ -22453,6 +23773,139 @@
                 </a:solidFill>
               </a:rPr>
               <a:t>Tanulságok, kulcsfogalmak, szakirodalom és online adatbázisok</a:t>
+            </a:r>
+            <a:endParaRPr lang="en-US" sz="1400" dirty="0"/>
+          </a:p>
+        </p:txBody>
+      </p:sp>
+      <p:sp>
+        <p:nvSpPr>
+          <p:cNvPr id="23" name="Szám kör"/>
+          <p:cNvSpPr/>
+          <p:nvPr/>
+        </p:nvSpPr>
+        <p:spPr>
+          <a:xfrm>
+            <a:off x="548640" y="5303520"/>
+            <a:ext cx="685800" cy="685800"/>
+          </a:xfrm>
+          <a:prstGeom prst="ellipse">
+            <a:avLst/>
+          </a:prstGeom>
+          <a:solidFill>
+            <a:schemeClr val="accent1"/>
+          </a:solidFill>
+          <a:ln w="12700">
+            <a:solidFill>
+              <a:schemeClr val="tx2"/>
+            </a:solidFill>
+            <a:prstDash val="solid"/>
+          </a:ln>
+        </p:spPr>
+      </p:sp>
+      <p:sp>
+        <p:nvSpPr>
+          <p:cNvPr id="24" name="Text 22"/>
+          <p:cNvSpPr txBox="1"/>
+          <p:nvPr/>
+        </p:nvSpPr>
+        <p:spPr>
+          <a:xfrm>
+            <a:off x="548640" y="5303520"/>
+            <a:ext cx="685800" cy="685800"/>
+          </a:xfrm>
+          <a:prstGeom prst="rect">
+            <a:avLst/>
+          </a:prstGeom>
+          <a:noFill/>
+          <a:ln/>
+        </p:spPr>
+        <p:txBody>
+          <a:bodyPr wrap="square" lIns="0" tIns="0" rIns="0" bIns="0" rtlCol="0" anchor="ctr"/>
+          <a:lstStyle/>
+          <a:p>
+            <a:pPr algn="ctr" indent="0" marL="0">
+              <a:buNone/>
+            </a:pPr>
+            <a:r>
+              <a:rPr lang="en-US" sz="2200" b="1" dirty="0">
+                <a:solidFill>
+                  <a:schemeClr val="bg1"/>
+                </a:solidFill>
+              </a:rPr>
+              <a:t>6</a:t>
+            </a:r>
+            <a:endParaRPr lang="en-US" sz="2200" dirty="0"/>
+          </a:p>
+        </p:txBody>
+      </p:sp>
+      <p:sp>
+        <p:nvSpPr>
+          <p:cNvPr id="25" name="Text 23"/>
+          <p:cNvSpPr txBox="1"/>
+          <p:nvPr/>
+        </p:nvSpPr>
+        <p:spPr>
+          <a:xfrm>
+            <a:off x="1463040" y="5285232"/>
+            <a:ext cx="9601200" cy="384048"/>
+          </a:xfrm>
+          <a:prstGeom prst="rect">
+            <a:avLst/>
+          </a:prstGeom>
+          <a:noFill/>
+          <a:ln/>
+        </p:spPr>
+        <p:txBody>
+          <a:bodyPr wrap="square" lIns="0" tIns="0" rIns="0" bIns="0" rtlCol="0" anchor="ctr"/>
+          <a:lstStyle/>
+          <a:p>
+            <a:pPr indent="0" marL="0">
+              <a:buNone/>
+            </a:pPr>
+            <a:r>
+              <a:rPr lang="en-US" sz="2000" b="1" dirty="0">
+                <a:solidFill>
+                  <a:schemeClr val="tx1"/>
+                </a:solidFill>
+              </a:rPr>
+              <a:t>Látogatás: Risiera di San Sabba, Trieszt</a:t>
+            </a:r>
+            <a:endParaRPr lang="en-US" sz="2000" dirty="0"/>
+          </a:p>
+        </p:txBody>
+      </p:sp>
+      <p:sp>
+        <p:nvSpPr>
+          <p:cNvPr id="26" name="Text 24"/>
+          <p:cNvSpPr txBox="1"/>
+          <p:nvPr/>
+        </p:nvSpPr>
+        <p:spPr>
+          <a:xfrm>
+            <a:off x="1463040" y="5669280"/>
+            <a:ext cx="9601200" cy="329184"/>
+          </a:xfrm>
+          <a:prstGeom prst="rect">
+            <a:avLst/>
+          </a:prstGeom>
+          <a:noFill/>
+          <a:ln/>
+        </p:spPr>
+        <p:txBody>
+          <a:bodyPr wrap="square" lIns="0" tIns="0" rIns="0" bIns="0" rtlCol="0" anchor="ctr"/>
+          <a:lstStyle/>
+          <a:p>
+            <a:pPr indent="0" marL="0">
+              <a:buNone/>
+            </a:pPr>
+            <a:r>
+              <a:rPr lang="en-US" sz="1400" dirty="0">
+                <a:solidFill>
+                  <a:schemeClr val="accent4"/>
+                </a:solidFill>
+              </a:rPr>
+              <a:t>Történet, tettesek, számok, látnivalók, gyakorlati infók, forgatókönyv a kapu előtti előadáshoz</a:t>
             </a:r>
             <a:endParaRPr lang="en-US" sz="1400" dirty="0"/>
           </a:p>
@@ -29198,8 +30651,8 @@
         </p:nvSpPr>
         <p:spPr>
           <a:xfrm>
-            <a:off x="731520" y="1828800"/>
-            <a:ext cx="10698480" cy="1645920"/>
+            <a:off x="731520" y="2743200"/>
+            <a:ext cx="10515600" cy="1097280"/>
           </a:xfrm>
           <a:prstGeom prst="rect">
             <a:avLst/>
@@ -29215,7 +30668,7 @@
               <a:buNone/>
             </a:pPr>
             <a:r>
-              <a:rPr lang="en-US" sz="4800" b="1" dirty="0">
+              <a:rPr lang="en-US" sz="4400" b="1" dirty="0">
                 <a:solidFill>
                   <a:schemeClr val="bg1"/>
                 </a:solidFill>
@@ -29223,9 +30676,9 @@
                 <a:ea typeface="Cambria" pitchFamily="34" charset="-122"/>
                 <a:cs typeface="Cambria" pitchFamily="34" charset="-120"/>
               </a:rPr>
-              <a:t>„Megtörtént, tehát újra megtörténhet.”</a:t>
-            </a:r>
-            <a:endParaRPr lang="en-US" sz="4800" dirty="0"/>
+              <a:t>6. Látogatás: Risiera di San Sabba, Trieszt</a:t>
+            </a:r>
+            <a:endParaRPr lang="en-US" sz="4400" dirty="0"/>
           </a:p>
         </p:txBody>
       </p:sp>
@@ -29239,8 +30692,8 @@
         </p:nvSpPr>
         <p:spPr>
           <a:xfrm>
-            <a:off x="731520" y="3657600"/>
-            <a:ext cx="10058400" cy="1188720"/>
+            <a:off x="731520" y="3977640"/>
+            <a:ext cx="10058400" cy="1097280"/>
           </a:xfrm>
           <a:prstGeom prst="rect">
             <a:avLst/>
@@ -29258,14 +30711,2735 @@
             <a:r>
               <a:rPr lang="en-US" sz="2000" dirty="0">
                 <a:solidFill>
-                  <a:srgbClr val="D1D5DB"/>
-                </a:solidFill>
-              </a:rPr>
-              <a:t>Primo Levi: A megfojtottak és a megmenekültek (1986) — szabad fordítás</a:t>
+                  <a:schemeClr val="accent3"/>
+                </a:solidFill>
+              </a:rPr>
+              <a:t>Felkészülés a múzeumlátogatásra — amit a kapu előtt el tudtok mondani</a:t>
             </a:r>
             <a:endParaRPr lang="en-US" sz="2000" dirty="0"/>
           </a:p>
         </p:txBody>
+      </p:sp>
+    </p:spTree>
+  </p:cSld>
+  <p:clrMapOvr>
+    <a:masterClrMapping/>
+  </p:clrMapOvr>
+</p:sld>
+</file>
+
+<file path=ppt/slides/slide42.xml><?xml version="1.0" encoding="utf-8"?>
+<p:sld xmlns:a="http://schemas.openxmlformats.org/drawingml/2006/main" xmlns:r="http://schemas.openxmlformats.org/officeDocument/2006/relationships" xmlns:p="http://schemas.openxmlformats.org/presentationml/2006/main">
+  <p:cSld name="Slide 42">
+    <p:spTree>
+      <p:nvGrpSpPr>
+        <p:cNvPr id="1" name=""/>
+        <p:cNvGrpSpPr/>
+        <p:nvPr/>
+      </p:nvGrpSpPr>
+      <p:grpSpPr>
+        <a:xfrm>
+          <a:off x="0" y="0"/>
+          <a:ext cx="0" cy="0"/>
+          <a:chOff x="0" y="0"/>
+          <a:chExt cx="0" cy="0"/>
+        </a:xfrm>
+      </p:grpSpPr>
+      <p:sp>
+        <p:nvSpPr>
+          <p:cNvPr id="2" name="Text 0"/>
+          <p:cNvSpPr/>
+          <p:nvPr>
+            <p:ph idx="100" type="title" hasCustomPrompt="1"/>
+          </p:nvPr>
+        </p:nvSpPr>
+        <p:spPr>
+          <a:xfrm>
+            <a:off x="548640" y="320040"/>
+            <a:ext cx="11064240" cy="731520"/>
+          </a:xfrm>
+          <a:prstGeom prst="rect">
+            <a:avLst/>
+          </a:prstGeom>
+          <a:noFill/>
+          <a:ln/>
+        </p:spPr>
+        <p:txBody>
+          <a:bodyPr wrap="square" lIns="0" tIns="0" rIns="0" bIns="0" rtlCol="0" anchor="ctr"/>
+          <a:lstStyle/>
+          <a:p>
+            <a:pPr algn="l" indent="0" marL="0">
+              <a:buNone/>
+            </a:pPr>
+            <a:r>
+              <a:rPr lang="en-US" sz="3200" b="1" dirty="0">
+                <a:solidFill>
+                  <a:schemeClr val="tx1"/>
+                </a:solidFill>
+                <a:latin typeface="Cambria" pitchFamily="34" charset="0"/>
+                <a:ea typeface="Cambria" pitchFamily="34" charset="-122"/>
+                <a:cs typeface="Cambria" pitchFamily="34" charset="-120"/>
+              </a:rPr>
+              <a:t>A Risiera egy pillantásra</a:t>
+            </a:r>
+            <a:endParaRPr lang="en-US" sz="3200" dirty="0"/>
+          </a:p>
+        </p:txBody>
+      </p:sp>
+      <p:sp>
+        <p:nvSpPr>
+          <p:cNvPr id="3" name="Shape 1"/>
+          <p:cNvSpPr/>
+          <p:nvPr/>
+        </p:nvSpPr>
+        <p:spPr>
+          <a:xfrm>
+            <a:off x="548640" y="1307592"/>
+            <a:ext cx="256032" cy="256032"/>
+          </a:xfrm>
+          <a:prstGeom prst="ellipse">
+            <a:avLst/>
+          </a:prstGeom>
+          <a:solidFill>
+            <a:schemeClr val="tx2"/>
+          </a:solidFill>
+          <a:ln w="12700">
+            <a:solidFill>
+              <a:schemeClr val="tx2"/>
+            </a:solidFill>
+            <a:prstDash val="solid"/>
+          </a:ln>
+        </p:spPr>
+      </p:sp>
+      <p:sp>
+        <p:nvSpPr>
+          <p:cNvPr id="4" name="Shape 2"/>
+          <p:cNvSpPr/>
+          <p:nvPr/>
+        </p:nvSpPr>
+        <p:spPr>
+          <a:xfrm>
+            <a:off x="676656" y="1618488"/>
+            <a:ext cx="0" cy="841248"/>
+          </a:xfrm>
+          <a:prstGeom prst="line">
+            <a:avLst/>
+          </a:prstGeom>
+          <a:noFill/>
+          <a:ln w="19050">
+            <a:solidFill>
+              <a:srgbClr val="D9DCE1"/>
+            </a:solidFill>
+            <a:prstDash val="solid"/>
+          </a:ln>
+        </p:spPr>
+      </p:sp>
+      <p:sp>
+        <p:nvSpPr>
+          <p:cNvPr id="5" name="Text 3"/>
+          <p:cNvSpPr txBox="1"/>
+          <p:nvPr/>
+        </p:nvSpPr>
+        <p:spPr>
+          <a:xfrm>
+            <a:off x="960120" y="1234440"/>
+            <a:ext cx="4937760" cy="384048"/>
+          </a:xfrm>
+          <a:prstGeom prst="rect">
+            <a:avLst/>
+          </a:prstGeom>
+          <a:noFill/>
+          <a:ln/>
+        </p:spPr>
+        <p:txBody>
+          <a:bodyPr wrap="square" lIns="0" tIns="0" rIns="0" bIns="0" rtlCol="0" anchor="ctr"/>
+          <a:lstStyle/>
+          <a:p>
+            <a:pPr indent="0" marL="0">
+              <a:buNone/>
+            </a:pPr>
+            <a:r>
+              <a:rPr lang="en-US" sz="1700" b="1" dirty="0">
+                <a:solidFill>
+                  <a:schemeClr val="tx2"/>
+                </a:solidFill>
+              </a:rPr>
+              <a:t>19. sz. vége</a:t>
+            </a:r>
+            <a:endParaRPr lang="en-US" sz="1700" dirty="0"/>
+          </a:p>
+        </p:txBody>
+      </p:sp>
+      <p:sp>
+        <p:nvSpPr>
+          <p:cNvPr id="6" name="Text 4"/>
+          <p:cNvSpPr txBox="1"/>
+          <p:nvPr/>
+        </p:nvSpPr>
+        <p:spPr>
+          <a:xfrm>
+            <a:off x="960120" y="1618488"/>
+            <a:ext cx="4937760" cy="731520"/>
+          </a:xfrm>
+          <a:prstGeom prst="rect">
+            <a:avLst/>
+          </a:prstGeom>
+          <a:noFill/>
+          <a:ln/>
+        </p:spPr>
+        <p:txBody>
+          <a:bodyPr wrap="square" lIns="0" tIns="0" rIns="0" bIns="0" rtlCol="0" anchor="t"/>
+          <a:lstStyle/>
+          <a:p>
+            <a:pPr indent="0" marL="0">
+              <a:buNone/>
+            </a:pPr>
+            <a:r>
+              <a:rPr lang="en-US" sz="1400" dirty="0">
+                <a:solidFill>
+                  <a:schemeClr val="tx1"/>
+                </a:solidFill>
+              </a:rPr>
+              <a:t>Rizshántoló üzem épül Trieszt San Sabba negyedében („risiera” = rizsmalom).</a:t>
+            </a:r>
+            <a:endParaRPr lang="en-US" sz="1400" dirty="0"/>
+          </a:p>
+        </p:txBody>
+      </p:sp>
+      <p:sp>
+        <p:nvSpPr>
+          <p:cNvPr id="7" name="Shape 5"/>
+          <p:cNvSpPr/>
+          <p:nvPr/>
+        </p:nvSpPr>
+        <p:spPr>
+          <a:xfrm>
+            <a:off x="548640" y="2478024"/>
+            <a:ext cx="256032" cy="256032"/>
+          </a:xfrm>
+          <a:prstGeom prst="ellipse">
+            <a:avLst/>
+          </a:prstGeom>
+          <a:solidFill>
+            <a:schemeClr val="accent1"/>
+          </a:solidFill>
+          <a:ln w="12700">
+            <a:solidFill>
+              <a:schemeClr val="accent1"/>
+            </a:solidFill>
+            <a:prstDash val="solid"/>
+          </a:ln>
+        </p:spPr>
+      </p:sp>
+      <p:sp>
+        <p:nvSpPr>
+          <p:cNvPr id="8" name="Shape 6"/>
+          <p:cNvSpPr/>
+          <p:nvPr/>
+        </p:nvSpPr>
+        <p:spPr>
+          <a:xfrm>
+            <a:off x="676656" y="2788920"/>
+            <a:ext cx="0" cy="841248"/>
+          </a:xfrm>
+          <a:prstGeom prst="line">
+            <a:avLst/>
+          </a:prstGeom>
+          <a:noFill/>
+          <a:ln w="19050">
+            <a:solidFill>
+              <a:srgbClr val="D9DCE1"/>
+            </a:solidFill>
+            <a:prstDash val="solid"/>
+          </a:ln>
+        </p:spPr>
+      </p:sp>
+      <p:sp>
+        <p:nvSpPr>
+          <p:cNvPr id="9" name="Text 7"/>
+          <p:cNvSpPr txBox="1"/>
+          <p:nvPr/>
+        </p:nvSpPr>
+        <p:spPr>
+          <a:xfrm>
+            <a:off x="960120" y="2404872"/>
+            <a:ext cx="4937760" cy="384048"/>
+          </a:xfrm>
+          <a:prstGeom prst="rect">
+            <a:avLst/>
+          </a:prstGeom>
+          <a:noFill/>
+          <a:ln/>
+        </p:spPr>
+        <p:txBody>
+          <a:bodyPr wrap="square" lIns="0" tIns="0" rIns="0" bIns="0" rtlCol="0" anchor="ctr"/>
+          <a:lstStyle/>
+          <a:p>
+            <a:pPr indent="0" marL="0">
+              <a:buNone/>
+            </a:pPr>
+            <a:r>
+              <a:rPr lang="en-US" sz="1700" b="1" dirty="0">
+                <a:solidFill>
+                  <a:schemeClr val="accent1"/>
+                </a:solidFill>
+              </a:rPr>
+              <a:t>1943 ősz</a:t>
+            </a:r>
+            <a:endParaRPr lang="en-US" sz="1700" dirty="0"/>
+          </a:p>
+        </p:txBody>
+      </p:sp>
+      <p:sp>
+        <p:nvSpPr>
+          <p:cNvPr id="10" name="Text 8"/>
+          <p:cNvSpPr txBox="1"/>
+          <p:nvPr/>
+        </p:nvSpPr>
+        <p:spPr>
+          <a:xfrm>
+            <a:off x="960120" y="2788920"/>
+            <a:ext cx="4937760" cy="731520"/>
+          </a:xfrm>
+          <a:prstGeom prst="rect">
+            <a:avLst/>
+          </a:prstGeom>
+          <a:noFill/>
+          <a:ln/>
+        </p:spPr>
+        <p:txBody>
+          <a:bodyPr wrap="square" lIns="0" tIns="0" rIns="0" bIns="0" rtlCol="0" anchor="t"/>
+          <a:lstStyle/>
+          <a:p>
+            <a:pPr indent="0" marL="0">
+              <a:buNone/>
+            </a:pPr>
+            <a:r>
+              <a:rPr lang="en-US" sz="1400" dirty="0">
+                <a:solidFill>
+                  <a:schemeClr val="tx1"/>
+                </a:solidFill>
+              </a:rPr>
+              <a:t>A német megszállás után rendőrségi fogolytábor (Polizeihaftlager) lesz belőle.</a:t>
+            </a:r>
+            <a:endParaRPr lang="en-US" sz="1400" dirty="0"/>
+          </a:p>
+        </p:txBody>
+      </p:sp>
+      <p:sp>
+        <p:nvSpPr>
+          <p:cNvPr id="11" name="Shape 9"/>
+          <p:cNvSpPr/>
+          <p:nvPr/>
+        </p:nvSpPr>
+        <p:spPr>
+          <a:xfrm>
+            <a:off x="548640" y="3648456"/>
+            <a:ext cx="256032" cy="256032"/>
+          </a:xfrm>
+          <a:prstGeom prst="ellipse">
+            <a:avLst/>
+          </a:prstGeom>
+          <a:solidFill>
+            <a:schemeClr val="accent1"/>
+          </a:solidFill>
+          <a:ln w="12700">
+            <a:solidFill>
+              <a:schemeClr val="accent1"/>
+            </a:solidFill>
+            <a:prstDash val="solid"/>
+          </a:ln>
+        </p:spPr>
+      </p:sp>
+      <p:sp>
+        <p:nvSpPr>
+          <p:cNvPr id="12" name="Shape 10"/>
+          <p:cNvSpPr/>
+          <p:nvPr/>
+        </p:nvSpPr>
+        <p:spPr>
+          <a:xfrm>
+            <a:off x="676656" y="3959352"/>
+            <a:ext cx="0" cy="841248"/>
+          </a:xfrm>
+          <a:prstGeom prst="line">
+            <a:avLst/>
+          </a:prstGeom>
+          <a:noFill/>
+          <a:ln w="19050">
+            <a:solidFill>
+              <a:srgbClr val="D9DCE1"/>
+            </a:solidFill>
+            <a:prstDash val="solid"/>
+          </a:ln>
+        </p:spPr>
+      </p:sp>
+      <p:sp>
+        <p:nvSpPr>
+          <p:cNvPr id="13" name="Text 11"/>
+          <p:cNvSpPr txBox="1"/>
+          <p:nvPr/>
+        </p:nvSpPr>
+        <p:spPr>
+          <a:xfrm>
+            <a:off x="960120" y="3575304"/>
+            <a:ext cx="4937760" cy="384048"/>
+          </a:xfrm>
+          <a:prstGeom prst="rect">
+            <a:avLst/>
+          </a:prstGeom>
+          <a:noFill/>
+          <a:ln/>
+        </p:spPr>
+        <p:txBody>
+          <a:bodyPr wrap="square" lIns="0" tIns="0" rIns="0" bIns="0" rtlCol="0" anchor="ctr"/>
+          <a:lstStyle/>
+          <a:p>
+            <a:pPr indent="0" marL="0">
+              <a:buNone/>
+            </a:pPr>
+            <a:r>
+              <a:rPr lang="en-US" sz="1700" b="1" dirty="0">
+                <a:solidFill>
+                  <a:schemeClr val="accent1"/>
+                </a:solidFill>
+              </a:rPr>
+              <a:t>1943. dec. 7.</a:t>
+            </a:r>
+            <a:endParaRPr lang="en-US" sz="1700" dirty="0"/>
+          </a:p>
+        </p:txBody>
+      </p:sp>
+      <p:sp>
+        <p:nvSpPr>
+          <p:cNvPr id="14" name="Text 12"/>
+          <p:cNvSpPr txBox="1"/>
+          <p:nvPr/>
+        </p:nvSpPr>
+        <p:spPr>
+          <a:xfrm>
+            <a:off x="960120" y="3959352"/>
+            <a:ext cx="4937760" cy="731520"/>
+          </a:xfrm>
+          <a:prstGeom prst="rect">
+            <a:avLst/>
+          </a:prstGeom>
+          <a:noFill/>
+          <a:ln/>
+        </p:spPr>
+        <p:txBody>
+          <a:bodyPr wrap="square" lIns="0" tIns="0" rIns="0" bIns="0" rtlCol="0" anchor="t"/>
+          <a:lstStyle/>
+          <a:p>
+            <a:pPr indent="0" marL="0">
+              <a:buNone/>
+            </a:pPr>
+            <a:r>
+              <a:rPr lang="en-US" sz="1400" dirty="0">
+                <a:solidFill>
+                  <a:schemeClr val="tx1"/>
+                </a:solidFill>
+              </a:rPr>
+              <a:t>Az első zsidó deportálóvonat indul Trieszt főpályaudvaráról Auschwitzba.</a:t>
+            </a:r>
+            <a:endParaRPr lang="en-US" sz="1400" dirty="0"/>
+          </a:p>
+        </p:txBody>
+      </p:sp>
+      <p:sp>
+        <p:nvSpPr>
+          <p:cNvPr id="15" name="Shape 13"/>
+          <p:cNvSpPr/>
+          <p:nvPr/>
+        </p:nvSpPr>
+        <p:spPr>
+          <a:xfrm>
+            <a:off x="548640" y="4818888"/>
+            <a:ext cx="256032" cy="256032"/>
+          </a:xfrm>
+          <a:prstGeom prst="ellipse">
+            <a:avLst/>
+          </a:prstGeom>
+          <a:solidFill>
+            <a:schemeClr val="accent1"/>
+          </a:solidFill>
+          <a:ln w="12700">
+            <a:solidFill>
+              <a:schemeClr val="accent1"/>
+            </a:solidFill>
+            <a:prstDash val="solid"/>
+          </a:ln>
+        </p:spPr>
+      </p:sp>
+      <p:sp>
+        <p:nvSpPr>
+          <p:cNvPr id="16" name="Text 14"/>
+          <p:cNvSpPr txBox="1"/>
+          <p:nvPr/>
+        </p:nvSpPr>
+        <p:spPr>
+          <a:xfrm>
+            <a:off x="960120" y="4745736"/>
+            <a:ext cx="4937760" cy="384048"/>
+          </a:xfrm>
+          <a:prstGeom prst="rect">
+            <a:avLst/>
+          </a:prstGeom>
+          <a:noFill/>
+          <a:ln/>
+        </p:spPr>
+        <p:txBody>
+          <a:bodyPr wrap="square" lIns="0" tIns="0" rIns="0" bIns="0" rtlCol="0" anchor="ctr"/>
+          <a:lstStyle/>
+          <a:p>
+            <a:pPr indent="0" marL="0">
+              <a:buNone/>
+            </a:pPr>
+            <a:r>
+              <a:rPr lang="en-US" sz="1700" b="1" dirty="0">
+                <a:solidFill>
+                  <a:schemeClr val="accent1"/>
+                </a:solidFill>
+              </a:rPr>
+              <a:t>1944. ápr. 4.</a:t>
+            </a:r>
+            <a:endParaRPr lang="en-US" sz="1700" dirty="0"/>
+          </a:p>
+        </p:txBody>
+      </p:sp>
+      <p:sp>
+        <p:nvSpPr>
+          <p:cNvPr id="17" name="Text 15"/>
+          <p:cNvSpPr txBox="1"/>
+          <p:nvPr/>
+        </p:nvSpPr>
+        <p:spPr>
+          <a:xfrm>
+            <a:off x="960120" y="5129784"/>
+            <a:ext cx="4937760" cy="731520"/>
+          </a:xfrm>
+          <a:prstGeom prst="rect">
+            <a:avLst/>
+          </a:prstGeom>
+          <a:noFill/>
+          <a:ln/>
+        </p:spPr>
+        <p:txBody>
+          <a:bodyPr wrap="square" lIns="0" tIns="0" rIns="0" bIns="0" rtlCol="0" anchor="t"/>
+          <a:lstStyle/>
+          <a:p>
+            <a:pPr indent="0" marL="0">
+              <a:buNone/>
+            </a:pPr>
+            <a:r>
+              <a:rPr lang="en-US" sz="1400" dirty="0">
+                <a:solidFill>
+                  <a:schemeClr val="tx1"/>
+                </a:solidFill>
+              </a:rPr>
+              <a:t>Próbaüzem a krematóriumban: az Opicinán előző nap agyonlőtt 70 túsz holttestét égetik el.</a:t>
+            </a:r>
+            <a:endParaRPr lang="en-US" sz="1400" dirty="0"/>
+          </a:p>
+        </p:txBody>
+      </p:sp>
+      <p:sp>
+        <p:nvSpPr>
+          <p:cNvPr id="18" name="Shape 16"/>
+          <p:cNvSpPr/>
+          <p:nvPr/>
+        </p:nvSpPr>
+        <p:spPr>
+          <a:xfrm>
+            <a:off x="6217920" y="1307592"/>
+            <a:ext cx="256032" cy="256032"/>
+          </a:xfrm>
+          <a:prstGeom prst="ellipse">
+            <a:avLst/>
+          </a:prstGeom>
+          <a:solidFill>
+            <a:schemeClr val="accent1"/>
+          </a:solidFill>
+          <a:ln w="12700">
+            <a:solidFill>
+              <a:schemeClr val="accent1"/>
+            </a:solidFill>
+            <a:prstDash val="solid"/>
+          </a:ln>
+        </p:spPr>
+      </p:sp>
+      <p:sp>
+        <p:nvSpPr>
+          <p:cNvPr id="19" name="Shape 17"/>
+          <p:cNvSpPr/>
+          <p:nvPr/>
+        </p:nvSpPr>
+        <p:spPr>
+          <a:xfrm>
+            <a:off x="6345936" y="1618488"/>
+            <a:ext cx="0" cy="841248"/>
+          </a:xfrm>
+          <a:prstGeom prst="line">
+            <a:avLst/>
+          </a:prstGeom>
+          <a:noFill/>
+          <a:ln w="19050">
+            <a:solidFill>
+              <a:srgbClr val="D9DCE1"/>
+            </a:solidFill>
+            <a:prstDash val="solid"/>
+          </a:ln>
+        </p:spPr>
+      </p:sp>
+      <p:sp>
+        <p:nvSpPr>
+          <p:cNvPr id="20" name="Text 18"/>
+          <p:cNvSpPr txBox="1"/>
+          <p:nvPr/>
+        </p:nvSpPr>
+        <p:spPr>
+          <a:xfrm>
+            <a:off x="6629400" y="1234440"/>
+            <a:ext cx="4937760" cy="384048"/>
+          </a:xfrm>
+          <a:prstGeom prst="rect">
+            <a:avLst/>
+          </a:prstGeom>
+          <a:noFill/>
+          <a:ln/>
+        </p:spPr>
+        <p:txBody>
+          <a:bodyPr wrap="square" lIns="0" tIns="0" rIns="0" bIns="0" rtlCol="0" anchor="ctr"/>
+          <a:lstStyle/>
+          <a:p>
+            <a:pPr indent="0" marL="0">
+              <a:buNone/>
+            </a:pPr>
+            <a:r>
+              <a:rPr lang="en-US" sz="1700" b="1" dirty="0">
+                <a:solidFill>
+                  <a:schemeClr val="accent1"/>
+                </a:solidFill>
+              </a:rPr>
+              <a:t>1945. ápr. 29–30.</a:t>
+            </a:r>
+            <a:endParaRPr lang="en-US" sz="1700" dirty="0"/>
+          </a:p>
+        </p:txBody>
+      </p:sp>
+      <p:sp>
+        <p:nvSpPr>
+          <p:cNvPr id="21" name="Text 19"/>
+          <p:cNvSpPr txBox="1"/>
+          <p:nvPr/>
+        </p:nvSpPr>
+        <p:spPr>
+          <a:xfrm>
+            <a:off x="6629400" y="1618488"/>
+            <a:ext cx="4937760" cy="731520"/>
+          </a:xfrm>
+          <a:prstGeom prst="rect">
+            <a:avLst/>
+          </a:prstGeom>
+          <a:noFill/>
+          <a:ln/>
+        </p:spPr>
+        <p:txBody>
+          <a:bodyPr wrap="square" lIns="0" tIns="0" rIns="0" bIns="0" rtlCol="0" anchor="t"/>
+          <a:lstStyle/>
+          <a:p>
+            <a:pPr indent="0" marL="0">
+              <a:buNone/>
+            </a:pPr>
+            <a:r>
+              <a:rPr lang="en-US" sz="1400" dirty="0">
+                <a:solidFill>
+                  <a:schemeClr val="tx1"/>
+                </a:solidFill>
+              </a:rPr>
+              <a:t>A menekülő nácik dinamittal felrobbantják a krematóriumot és a kéményt.</a:t>
+            </a:r>
+            <a:endParaRPr lang="en-US" sz="1400" dirty="0"/>
+          </a:p>
+        </p:txBody>
+      </p:sp>
+      <p:sp>
+        <p:nvSpPr>
+          <p:cNvPr id="22" name="Shape 20"/>
+          <p:cNvSpPr/>
+          <p:nvPr/>
+        </p:nvSpPr>
+        <p:spPr>
+          <a:xfrm>
+            <a:off x="6217920" y="2478024"/>
+            <a:ext cx="256032" cy="256032"/>
+          </a:xfrm>
+          <a:prstGeom prst="ellipse">
+            <a:avLst/>
+          </a:prstGeom>
+          <a:solidFill>
+            <a:schemeClr val="tx2"/>
+          </a:solidFill>
+          <a:ln w="12700">
+            <a:solidFill>
+              <a:schemeClr val="tx2"/>
+            </a:solidFill>
+            <a:prstDash val="solid"/>
+          </a:ln>
+        </p:spPr>
+      </p:sp>
+      <p:sp>
+        <p:nvSpPr>
+          <p:cNvPr id="23" name="Shape 21"/>
+          <p:cNvSpPr/>
+          <p:nvPr/>
+        </p:nvSpPr>
+        <p:spPr>
+          <a:xfrm>
+            <a:off x="6345936" y="2788920"/>
+            <a:ext cx="0" cy="841248"/>
+          </a:xfrm>
+          <a:prstGeom prst="line">
+            <a:avLst/>
+          </a:prstGeom>
+          <a:noFill/>
+          <a:ln w="19050">
+            <a:solidFill>
+              <a:srgbClr val="D9DCE1"/>
+            </a:solidFill>
+            <a:prstDash val="solid"/>
+          </a:ln>
+        </p:spPr>
+      </p:sp>
+      <p:sp>
+        <p:nvSpPr>
+          <p:cNvPr id="24" name="Text 22"/>
+          <p:cNvSpPr txBox="1"/>
+          <p:nvPr/>
+        </p:nvSpPr>
+        <p:spPr>
+          <a:xfrm>
+            <a:off x="6629400" y="2404872"/>
+            <a:ext cx="4937760" cy="384048"/>
+          </a:xfrm>
+          <a:prstGeom prst="rect">
+            <a:avLst/>
+          </a:prstGeom>
+          <a:noFill/>
+          <a:ln/>
+        </p:spPr>
+        <p:txBody>
+          <a:bodyPr wrap="square" lIns="0" tIns="0" rIns="0" bIns="0" rtlCol="0" anchor="ctr"/>
+          <a:lstStyle/>
+          <a:p>
+            <a:pPr indent="0" marL="0">
+              <a:buNone/>
+            </a:pPr>
+            <a:r>
+              <a:rPr lang="en-US" sz="1700" b="1" dirty="0">
+                <a:solidFill>
+                  <a:schemeClr val="tx2"/>
+                </a:solidFill>
+              </a:rPr>
+              <a:t>1965</a:t>
+            </a:r>
+            <a:endParaRPr lang="en-US" sz="1700" dirty="0"/>
+          </a:p>
+        </p:txBody>
+      </p:sp>
+      <p:sp>
+        <p:nvSpPr>
+          <p:cNvPr id="25" name="Text 23"/>
+          <p:cNvSpPr txBox="1"/>
+          <p:nvPr/>
+        </p:nvSpPr>
+        <p:spPr>
+          <a:xfrm>
+            <a:off x="6629400" y="2788920"/>
+            <a:ext cx="4937760" cy="731520"/>
+          </a:xfrm>
+          <a:prstGeom prst="rect">
+            <a:avLst/>
+          </a:prstGeom>
+          <a:noFill/>
+          <a:ln/>
+        </p:spPr>
+        <p:txBody>
+          <a:bodyPr wrap="square" lIns="0" tIns="0" rIns="0" bIns="0" rtlCol="0" anchor="t"/>
+          <a:lstStyle/>
+          <a:p>
+            <a:pPr indent="0" marL="0">
+              <a:buNone/>
+            </a:pPr>
+            <a:r>
+              <a:rPr lang="en-US" sz="1400" dirty="0">
+                <a:solidFill>
+                  <a:schemeClr val="tx1"/>
+                </a:solidFill>
+              </a:rPr>
+              <a:t>Köztársasági elnöki rendelettel nemzeti emlékmű.</a:t>
+            </a:r>
+            <a:endParaRPr lang="en-US" sz="1400" dirty="0"/>
+          </a:p>
+        </p:txBody>
+      </p:sp>
+      <p:sp>
+        <p:nvSpPr>
+          <p:cNvPr id="26" name="Shape 24"/>
+          <p:cNvSpPr/>
+          <p:nvPr/>
+        </p:nvSpPr>
+        <p:spPr>
+          <a:xfrm>
+            <a:off x="6217920" y="3648456"/>
+            <a:ext cx="256032" cy="256032"/>
+          </a:xfrm>
+          <a:prstGeom prst="ellipse">
+            <a:avLst/>
+          </a:prstGeom>
+          <a:solidFill>
+            <a:schemeClr val="tx2"/>
+          </a:solidFill>
+          <a:ln w="12700">
+            <a:solidFill>
+              <a:schemeClr val="tx2"/>
+            </a:solidFill>
+            <a:prstDash val="solid"/>
+          </a:ln>
+        </p:spPr>
+      </p:sp>
+      <p:sp>
+        <p:nvSpPr>
+          <p:cNvPr id="27" name="Shape 25"/>
+          <p:cNvSpPr/>
+          <p:nvPr/>
+        </p:nvSpPr>
+        <p:spPr>
+          <a:xfrm>
+            <a:off x="6345936" y="3959352"/>
+            <a:ext cx="0" cy="841248"/>
+          </a:xfrm>
+          <a:prstGeom prst="line">
+            <a:avLst/>
+          </a:prstGeom>
+          <a:noFill/>
+          <a:ln w="19050">
+            <a:solidFill>
+              <a:srgbClr val="D9DCE1"/>
+            </a:solidFill>
+            <a:prstDash val="solid"/>
+          </a:ln>
+        </p:spPr>
+      </p:sp>
+      <p:sp>
+        <p:nvSpPr>
+          <p:cNvPr id="28" name="Text 26"/>
+          <p:cNvSpPr txBox="1"/>
+          <p:nvPr/>
+        </p:nvSpPr>
+        <p:spPr>
+          <a:xfrm>
+            <a:off x="6629400" y="3575304"/>
+            <a:ext cx="4937760" cy="384048"/>
+          </a:xfrm>
+          <a:prstGeom prst="rect">
+            <a:avLst/>
+          </a:prstGeom>
+          <a:noFill/>
+          <a:ln/>
+        </p:spPr>
+        <p:txBody>
+          <a:bodyPr wrap="square" lIns="0" tIns="0" rIns="0" bIns="0" rtlCol="0" anchor="ctr"/>
+          <a:lstStyle/>
+          <a:p>
+            <a:pPr indent="0" marL="0">
+              <a:buNone/>
+            </a:pPr>
+            <a:r>
+              <a:rPr lang="en-US" sz="1700" b="1" dirty="0">
+                <a:solidFill>
+                  <a:schemeClr val="tx2"/>
+                </a:solidFill>
+              </a:rPr>
+              <a:t>1975</a:t>
+            </a:r>
+            <a:endParaRPr lang="en-US" sz="1700" dirty="0"/>
+          </a:p>
+        </p:txBody>
+      </p:sp>
+      <p:sp>
+        <p:nvSpPr>
+          <p:cNvPr id="29" name="Text 27"/>
+          <p:cNvSpPr txBox="1"/>
+          <p:nvPr/>
+        </p:nvSpPr>
+        <p:spPr>
+          <a:xfrm>
+            <a:off x="6629400" y="3959352"/>
+            <a:ext cx="4937760" cy="731520"/>
+          </a:xfrm>
+          <a:prstGeom prst="rect">
+            <a:avLst/>
+          </a:prstGeom>
+          <a:noFill/>
+          <a:ln/>
+        </p:spPr>
+        <p:txBody>
+          <a:bodyPr wrap="square" lIns="0" tIns="0" rIns="0" bIns="0" rtlCol="0" anchor="t"/>
+          <a:lstStyle/>
+          <a:p>
+            <a:pPr indent="0" marL="0">
+              <a:buNone/>
+            </a:pPr>
+            <a:r>
+              <a:rPr lang="en-US" sz="1400" dirty="0">
+                <a:solidFill>
+                  <a:schemeClr val="tx1"/>
+                </a:solidFill>
+              </a:rPr>
+              <a:t>Romano Boico építész tervei szerint városi múzeum nyílik.</a:t>
+            </a:r>
+            <a:endParaRPr lang="en-US" sz="1400" dirty="0"/>
+          </a:p>
+        </p:txBody>
+      </p:sp>
+      <p:sp>
+        <p:nvSpPr>
+          <p:cNvPr id="30" name="Shape 28"/>
+          <p:cNvSpPr/>
+          <p:nvPr/>
+        </p:nvSpPr>
+        <p:spPr>
+          <a:xfrm>
+            <a:off x="6217920" y="4818888"/>
+            <a:ext cx="256032" cy="256032"/>
+          </a:xfrm>
+          <a:prstGeom prst="ellipse">
+            <a:avLst/>
+          </a:prstGeom>
+          <a:solidFill>
+            <a:schemeClr val="tx2"/>
+          </a:solidFill>
+          <a:ln w="12700">
+            <a:solidFill>
+              <a:schemeClr val="tx2"/>
+            </a:solidFill>
+            <a:prstDash val="solid"/>
+          </a:ln>
+        </p:spPr>
+      </p:sp>
+      <p:sp>
+        <p:nvSpPr>
+          <p:cNvPr id="31" name="Text 29"/>
+          <p:cNvSpPr txBox="1"/>
+          <p:nvPr/>
+        </p:nvSpPr>
+        <p:spPr>
+          <a:xfrm>
+            <a:off x="6629400" y="4745736"/>
+            <a:ext cx="4937760" cy="384048"/>
+          </a:xfrm>
+          <a:prstGeom prst="rect">
+            <a:avLst/>
+          </a:prstGeom>
+          <a:noFill/>
+          <a:ln/>
+        </p:spPr>
+        <p:txBody>
+          <a:bodyPr wrap="square" lIns="0" tIns="0" rIns="0" bIns="0" rtlCol="0" anchor="ctr"/>
+          <a:lstStyle/>
+          <a:p>
+            <a:pPr indent="0" marL="0">
+              <a:buNone/>
+            </a:pPr>
+            <a:r>
+              <a:rPr lang="en-US" sz="1700" b="1" dirty="0">
+                <a:solidFill>
+                  <a:schemeClr val="tx2"/>
+                </a:solidFill>
+              </a:rPr>
+              <a:t>2016</a:t>
+            </a:r>
+            <a:endParaRPr lang="en-US" sz="1700" dirty="0"/>
+          </a:p>
+        </p:txBody>
+      </p:sp>
+      <p:sp>
+        <p:nvSpPr>
+          <p:cNvPr id="32" name="Text 30"/>
+          <p:cNvSpPr txBox="1"/>
+          <p:nvPr/>
+        </p:nvSpPr>
+        <p:spPr>
+          <a:xfrm>
+            <a:off x="6629400" y="5129784"/>
+            <a:ext cx="4937760" cy="731520"/>
+          </a:xfrm>
+          <a:prstGeom prst="rect">
+            <a:avLst/>
+          </a:prstGeom>
+          <a:noFill/>
+          <a:ln/>
+        </p:spPr>
+        <p:txBody>
+          <a:bodyPr wrap="square" lIns="0" tIns="0" rIns="0" bIns="0" rtlCol="0" anchor="t"/>
+          <a:lstStyle/>
+          <a:p>
+            <a:pPr indent="0" marL="0">
+              <a:buNone/>
+            </a:pPr>
+            <a:r>
+              <a:rPr lang="en-US" sz="1400" dirty="0">
+                <a:solidFill>
+                  <a:schemeClr val="tx1"/>
+                </a:solidFill>
+              </a:rPr>
+              <a:t>Megújult, multimédiás állandó kiállítás.</a:t>
+            </a:r>
+            <a:endParaRPr lang="en-US" sz="1400" dirty="0"/>
+          </a:p>
+        </p:txBody>
+      </p:sp>
+      <p:sp>
+        <p:nvSpPr>
+          <p:cNvPr id="33" name="Forrás"/>
+          <p:cNvSpPr txBox="1"/>
+          <p:nvPr/>
+        </p:nvSpPr>
+        <p:spPr>
+          <a:xfrm>
+            <a:off x="548640" y="6053328"/>
+            <a:ext cx="11064240" cy="329184"/>
+          </a:xfrm>
+          <a:prstGeom prst="rect">
+            <a:avLst/>
+          </a:prstGeom>
+          <a:noFill/>
+          <a:ln/>
+        </p:spPr>
+        <p:txBody>
+          <a:bodyPr wrap="square" lIns="0" tIns="0" rIns="0" bIns="0" rtlCol="0" anchor="t"/>
+          <a:lstStyle/>
+          <a:p>
+            <a:pPr indent="0" marL="0">
+              <a:buNone/>
+            </a:pPr>
+            <a:r>
+              <a:rPr lang="en-US" sz="1000" i="1" dirty="0">
+                <a:solidFill>
+                  <a:schemeClr val="accent4"/>
+                </a:solidFill>
+              </a:rPr>
+              <a:t>Forrás: risierasansabba.it (hivatalos oldal, angol nyelvű ismertető); ANED: deportati.it; regionestoriafvg.eu.</a:t>
+            </a:r>
+            <a:endParaRPr lang="en-US" sz="1000" dirty="0"/>
+          </a:p>
+        </p:txBody>
+      </p:sp>
+      <p:sp>
+        <p:nvSpPr>
+          <p:cNvPr id="25" name="Slide Number Placeholder 0"/>
+          <p:cNvSpPr>
+            <a:spLocks noGrp="1"/>
+          </p:cNvSpPr>
+          <p:nvPr>
+            <p:ph type="sldNum" sz="quarter" idx="4294967295"/>
+          </p:nvPr>
+        </p:nvSpPr>
+        <p:spPr>
+          <a:xfrm>
+            <a:off x="11064240" y="6446520"/>
+            <a:ext cx="548640" cy="274320"/>
+          </a:xfrm>
+          <a:prstGeom prst="rect">
+            <a:avLst/>
+          </a:prstGeom>
+          <a:extLst>
+            <a:ext uri="{C572A759-6A51-4108-AA02-DFA0A04FC94B}">
+              <ma14:wrappingTextBoxFlag xmlns:ma14="http://schemas.microsoft.com/office/mac/drawingml/2011/main" val="0"/>
+            </a:ext>
+          </a:extLst>
+        </p:spPr>
+        <p:txBody>
+          <a:bodyPr/>
+          <a:lstStyle>
+            <a:lvl1pPr>
+              <a:defRPr sz="1000">
+                <a:solidFill>
+                  <a:schemeClr val="accent4"/>
+                </a:solidFill>
+              </a:defRPr>
+            </a:lvl1pPr>
+          </a:lstStyle>
+          <a:p>
+            <a:pPr algn="r"/>
+            <a:fld id="{F7021451-1387-4CA6-816F-3879F97B5CBC}" type="slidenum">
+              <a:rPr b="0" lang="en-US"/>
+              <a:t>42</a:t>
+            </a:fld>
+            <a:endParaRPr lang="en-US"/>
+          </a:p>
+        </p:txBody>
+      </p:sp>
+    </p:spTree>
+  </p:cSld>
+  <p:clrMapOvr>
+    <a:masterClrMapping/>
+  </p:clrMapOvr>
+</p:sld>
+</file>
+
+<file path=ppt/slides/slide43.xml><?xml version="1.0" encoding="utf-8"?>
+<p:sld xmlns:a="http://schemas.openxmlformats.org/drawingml/2006/main" xmlns:r="http://schemas.openxmlformats.org/officeDocument/2006/relationships" xmlns:p="http://schemas.openxmlformats.org/presentationml/2006/main">
+  <p:cSld name="Slide 43">
+    <p:spTree>
+      <p:nvGrpSpPr>
+        <p:cNvPr id="1" name=""/>
+        <p:cNvGrpSpPr/>
+        <p:nvPr/>
+      </p:nvGrpSpPr>
+      <p:grpSpPr>
+        <a:xfrm>
+          <a:off x="0" y="0"/>
+          <a:ext cx="0" cy="0"/>
+          <a:chOff x="0" y="0"/>
+          <a:chExt cx="0" cy="0"/>
+        </a:xfrm>
+      </p:grpSpPr>
+      <p:sp>
+        <p:nvSpPr>
+          <p:cNvPr id="2" name="Text 0"/>
+          <p:cNvSpPr/>
+          <p:nvPr>
+            <p:ph idx="100" type="title" hasCustomPrompt="1"/>
+          </p:nvPr>
+        </p:nvSpPr>
+        <p:spPr>
+          <a:xfrm>
+            <a:off x="548640" y="320040"/>
+            <a:ext cx="11064240" cy="731520"/>
+          </a:xfrm>
+          <a:prstGeom prst="rect">
+            <a:avLst/>
+          </a:prstGeom>
+          <a:noFill/>
+          <a:ln/>
+        </p:spPr>
+        <p:txBody>
+          <a:bodyPr wrap="square" lIns="0" tIns="0" rIns="0" bIns="0" rtlCol="0" anchor="ctr"/>
+          <a:lstStyle/>
+          <a:p>
+            <a:pPr algn="l" indent="0" marL="0">
+              <a:buNone/>
+            </a:pPr>
+            <a:r>
+              <a:rPr lang="en-US" sz="3200" b="1" dirty="0">
+                <a:solidFill>
+                  <a:schemeClr val="tx1"/>
+                </a:solidFill>
+                <a:latin typeface="Cambria" pitchFamily="34" charset="0"/>
+                <a:ea typeface="Cambria" pitchFamily="34" charset="-122"/>
+                <a:cs typeface="Cambria" pitchFamily="34" charset="-120"/>
+              </a:rPr>
+              <a:t>Mire szolgált a Risiera? — négy funkció</a:t>
+            </a:r>
+            <a:endParaRPr lang="en-US" sz="3200" dirty="0"/>
+          </a:p>
+        </p:txBody>
+      </p:sp>
+      <p:sp>
+        <p:nvSpPr>
+          <p:cNvPr id="3" name="Kártya"/>
+          <p:cNvSpPr/>
+          <p:nvPr/>
+        </p:nvSpPr>
+        <p:spPr>
+          <a:xfrm>
+            <a:off x="548640" y="1234440"/>
+            <a:ext cx="5440680" cy="2194560"/>
+          </a:xfrm>
+          <a:prstGeom prst="roundRect">
+            <a:avLst>
+              <a:gd name="adj" fmla="val 3333"/>
+            </a:avLst>
+          </a:prstGeom>
+          <a:solidFill>
+            <a:schemeClr val="bg2"/>
+          </a:solidFill>
+          <a:ln w="12700">
+            <a:solidFill>
+              <a:schemeClr val="bg2"/>
+            </a:solidFill>
+            <a:prstDash val="solid"/>
+          </a:ln>
+        </p:spPr>
+      </p:sp>
+      <p:sp>
+        <p:nvSpPr>
+          <p:cNvPr id="4" name="Ikon kör"/>
+          <p:cNvSpPr/>
+          <p:nvPr/>
+        </p:nvSpPr>
+        <p:spPr>
+          <a:xfrm>
+            <a:off x="777240" y="1508760"/>
+            <a:ext cx="731520" cy="731520"/>
+          </a:xfrm>
+          <a:prstGeom prst="ellipse">
+            <a:avLst/>
+          </a:prstGeom>
+          <a:solidFill>
+            <a:schemeClr val="tx2"/>
+          </a:solidFill>
+          <a:ln w="12700">
+            <a:solidFill>
+              <a:schemeClr val="tx2"/>
+            </a:solidFill>
+            <a:prstDash val="solid"/>
+          </a:ln>
+        </p:spPr>
+      </p:sp>
+      <p:pic>
+        <p:nvPicPr>
+          <p:cNvPr id="5" name="Image 0" descr="FaUserShield">    </p:cNvPr>
+          <p:cNvPicPr>
+            <a:picLocks noChangeAspect="1"/>
+          </p:cNvPicPr>
+          <p:nvPr/>
+        </p:nvPicPr>
+        <p:blipFill>
+          <a:blip r:embed="rId1"/>
+          <a:stretch>
+            <a:fillRect/>
+          </a:stretch>
+        </p:blipFill>
+        <p:spPr>
+          <a:xfrm>
+            <a:off x="960120" y="1691640"/>
+            <a:ext cx="365760" cy="365760"/>
+          </a:xfrm>
+          <a:prstGeom prst="rect">
+            <a:avLst/>
+          </a:prstGeom>
+        </p:spPr>
+      </p:pic>
+      <p:sp>
+        <p:nvSpPr>
+          <p:cNvPr id="6" name="Text 3"/>
+          <p:cNvSpPr txBox="1"/>
+          <p:nvPr/>
+        </p:nvSpPr>
+        <p:spPr>
+          <a:xfrm>
+            <a:off x="1737360" y="1508760"/>
+            <a:ext cx="4023360" cy="548640"/>
+          </a:xfrm>
+          <a:prstGeom prst="rect">
+            <a:avLst/>
+          </a:prstGeom>
+          <a:noFill/>
+          <a:ln/>
+        </p:spPr>
+        <p:txBody>
+          <a:bodyPr wrap="square" lIns="0" tIns="0" rIns="0" bIns="0" rtlCol="0" anchor="ctr"/>
+          <a:lstStyle/>
+          <a:p>
+            <a:pPr indent="0" marL="0">
+              <a:buNone/>
+            </a:pPr>
+            <a:r>
+              <a:rPr lang="en-US" sz="1900" b="1" dirty="0">
+                <a:solidFill>
+                  <a:schemeClr val="tx1"/>
+                </a:solidFill>
+              </a:rPr>
+              <a:t>Rendőrségi fogolytábor</a:t>
+            </a:r>
+            <a:endParaRPr lang="en-US" sz="1900" dirty="0"/>
+          </a:p>
+        </p:txBody>
+      </p:sp>
+      <p:sp>
+        <p:nvSpPr>
+          <p:cNvPr id="7" name="Text 4"/>
+          <p:cNvSpPr txBox="1"/>
+          <p:nvPr/>
+        </p:nvSpPr>
+        <p:spPr>
+          <a:xfrm>
+            <a:off x="1737360" y="2103120"/>
+            <a:ext cx="4069080" cy="1234440"/>
+          </a:xfrm>
+          <a:prstGeom prst="rect">
+            <a:avLst/>
+          </a:prstGeom>
+          <a:noFill/>
+          <a:ln/>
+        </p:spPr>
+        <p:txBody>
+          <a:bodyPr wrap="square" lIns="0" tIns="0" rIns="0" bIns="0" rtlCol="0" anchor="t"/>
+          <a:lstStyle/>
+          <a:p>
+            <a:pPr indent="0" marL="0">
+              <a:buNone/>
+            </a:pPr>
+            <a:r>
+              <a:rPr lang="en-US" sz="1400" dirty="0">
+                <a:solidFill>
+                  <a:schemeClr val="tx1"/>
+                </a:solidFill>
+              </a:rPr>
+              <a:t>Partizánokat, politikai foglyokat — olaszokat, szlovéneket, horvátokat — tartottak itt fogva, hallgattak ki és kínoztak.</a:t>
+            </a:r>
+            <a:endParaRPr lang="en-US" sz="1400" dirty="0"/>
+          </a:p>
+        </p:txBody>
+      </p:sp>
+      <p:sp>
+        <p:nvSpPr>
+          <p:cNvPr id="8" name="Kártya"/>
+          <p:cNvSpPr/>
+          <p:nvPr/>
+        </p:nvSpPr>
+        <p:spPr>
+          <a:xfrm>
+            <a:off x="6172200" y="1234440"/>
+            <a:ext cx="5440680" cy="2194560"/>
+          </a:xfrm>
+          <a:prstGeom prst="roundRect">
+            <a:avLst>
+              <a:gd name="adj" fmla="val 3333"/>
+            </a:avLst>
+          </a:prstGeom>
+          <a:solidFill>
+            <a:schemeClr val="bg2"/>
+          </a:solidFill>
+          <a:ln w="12700">
+            <a:solidFill>
+              <a:schemeClr val="bg2"/>
+            </a:solidFill>
+            <a:prstDash val="solid"/>
+          </a:ln>
+        </p:spPr>
+      </p:sp>
+      <p:sp>
+        <p:nvSpPr>
+          <p:cNvPr id="9" name="Ikon kör"/>
+          <p:cNvSpPr/>
+          <p:nvPr/>
+        </p:nvSpPr>
+        <p:spPr>
+          <a:xfrm>
+            <a:off x="6400800" y="1508760"/>
+            <a:ext cx="731520" cy="731520"/>
+          </a:xfrm>
+          <a:prstGeom prst="ellipse">
+            <a:avLst/>
+          </a:prstGeom>
+          <a:solidFill>
+            <a:schemeClr val="tx2"/>
+          </a:solidFill>
+          <a:ln w="12700">
+            <a:solidFill>
+              <a:schemeClr val="tx2"/>
+            </a:solidFill>
+            <a:prstDash val="solid"/>
+          </a:ln>
+        </p:spPr>
+      </p:sp>
+      <p:pic>
+        <p:nvPicPr>
+          <p:cNvPr id="10" name="Image 1" descr="FaTrain">    </p:cNvPr>
+          <p:cNvPicPr>
+            <a:picLocks noChangeAspect="1"/>
+          </p:cNvPicPr>
+          <p:nvPr/>
+        </p:nvPicPr>
+        <p:blipFill>
+          <a:blip r:embed="rId2"/>
+          <a:stretch>
+            <a:fillRect/>
+          </a:stretch>
+        </p:blipFill>
+        <p:spPr>
+          <a:xfrm>
+            <a:off x="6583680" y="1691640"/>
+            <a:ext cx="365760" cy="365760"/>
+          </a:xfrm>
+          <a:prstGeom prst="rect">
+            <a:avLst/>
+          </a:prstGeom>
+        </p:spPr>
+      </p:pic>
+      <p:sp>
+        <p:nvSpPr>
+          <p:cNvPr id="11" name="Text 7"/>
+          <p:cNvSpPr txBox="1"/>
+          <p:nvPr/>
+        </p:nvSpPr>
+        <p:spPr>
+          <a:xfrm>
+            <a:off x="7360920" y="1508760"/>
+            <a:ext cx="4023360" cy="548640"/>
+          </a:xfrm>
+          <a:prstGeom prst="rect">
+            <a:avLst/>
+          </a:prstGeom>
+          <a:noFill/>
+          <a:ln/>
+        </p:spPr>
+        <p:txBody>
+          <a:bodyPr wrap="square" lIns="0" tIns="0" rIns="0" bIns="0" rtlCol="0" anchor="ctr"/>
+          <a:lstStyle/>
+          <a:p>
+            <a:pPr indent="0" marL="0">
+              <a:buNone/>
+            </a:pPr>
+            <a:r>
+              <a:rPr lang="en-US" sz="1900" b="1" dirty="0">
+                <a:solidFill>
+                  <a:schemeClr val="tx1"/>
+                </a:solidFill>
+              </a:rPr>
+              <a:t>Gyűjtőtábor a zsidóknak</a:t>
+            </a:r>
+            <a:endParaRPr lang="en-US" sz="1900" dirty="0"/>
+          </a:p>
+        </p:txBody>
+      </p:sp>
+      <p:sp>
+        <p:nvSpPr>
+          <p:cNvPr id="12" name="Text 8"/>
+          <p:cNvSpPr txBox="1"/>
+          <p:nvPr/>
+        </p:nvSpPr>
+        <p:spPr>
+          <a:xfrm>
+            <a:off x="7360920" y="2103120"/>
+            <a:ext cx="4069080" cy="1234440"/>
+          </a:xfrm>
+          <a:prstGeom prst="rect">
+            <a:avLst/>
+          </a:prstGeom>
+          <a:noFill/>
+          <a:ln/>
+        </p:spPr>
+        <p:txBody>
+          <a:bodyPr wrap="square" lIns="0" tIns="0" rIns="0" bIns="0" rtlCol="0" anchor="t"/>
+          <a:lstStyle/>
+          <a:p>
+            <a:pPr indent="0" marL="0">
+              <a:buNone/>
+            </a:pPr>
+            <a:r>
+              <a:rPr lang="en-US" sz="1400" dirty="0">
+                <a:solidFill>
+                  <a:schemeClr val="tx1"/>
+                </a:solidFill>
+              </a:rPr>
+              <a:t>A Tengermellék zsidóit innen indították Auschwitzba és más megsemmisítő táborokba.</a:t>
+            </a:r>
+            <a:endParaRPr lang="en-US" sz="1400" dirty="0"/>
+          </a:p>
+        </p:txBody>
+      </p:sp>
+      <p:sp>
+        <p:nvSpPr>
+          <p:cNvPr id="13" name="Kártya"/>
+          <p:cNvSpPr/>
+          <p:nvPr/>
+        </p:nvSpPr>
+        <p:spPr>
+          <a:xfrm>
+            <a:off x="548640" y="3611880"/>
+            <a:ext cx="5440680" cy="2194560"/>
+          </a:xfrm>
+          <a:prstGeom prst="roundRect">
+            <a:avLst>
+              <a:gd name="adj" fmla="val 3333"/>
+            </a:avLst>
+          </a:prstGeom>
+          <a:solidFill>
+            <a:schemeClr val="bg2"/>
+          </a:solidFill>
+          <a:ln w="12700">
+            <a:solidFill>
+              <a:schemeClr val="bg2"/>
+            </a:solidFill>
+            <a:prstDash val="solid"/>
+          </a:ln>
+        </p:spPr>
+      </p:sp>
+      <p:sp>
+        <p:nvSpPr>
+          <p:cNvPr id="14" name="Ikon kör"/>
+          <p:cNvSpPr/>
+          <p:nvPr/>
+        </p:nvSpPr>
+        <p:spPr>
+          <a:xfrm>
+            <a:off x="777240" y="3886200"/>
+            <a:ext cx="731520" cy="731520"/>
+          </a:xfrm>
+          <a:prstGeom prst="ellipse">
+            <a:avLst/>
+          </a:prstGeom>
+          <a:solidFill>
+            <a:schemeClr val="tx2"/>
+          </a:solidFill>
+          <a:ln w="12700">
+            <a:solidFill>
+              <a:schemeClr val="tx2"/>
+            </a:solidFill>
+            <a:prstDash val="solid"/>
+          </a:ln>
+        </p:spPr>
+      </p:sp>
+      <p:pic>
+        <p:nvPicPr>
+          <p:cNvPr id="15" name="Image 2" descr="FaRoute">    </p:cNvPr>
+          <p:cNvPicPr>
+            <a:picLocks noChangeAspect="1"/>
+          </p:cNvPicPr>
+          <p:nvPr/>
+        </p:nvPicPr>
+        <p:blipFill>
+          <a:blip r:embed="rId3"/>
+          <a:stretch>
+            <a:fillRect/>
+          </a:stretch>
+        </p:blipFill>
+        <p:spPr>
+          <a:xfrm>
+            <a:off x="960120" y="4069080"/>
+            <a:ext cx="365760" cy="365760"/>
+          </a:xfrm>
+          <a:prstGeom prst="rect">
+            <a:avLst/>
+          </a:prstGeom>
+        </p:spPr>
+      </p:pic>
+      <p:sp>
+        <p:nvSpPr>
+          <p:cNvPr id="16" name="Text 11"/>
+          <p:cNvSpPr txBox="1"/>
+          <p:nvPr/>
+        </p:nvSpPr>
+        <p:spPr>
+          <a:xfrm>
+            <a:off x="1737360" y="3886200"/>
+            <a:ext cx="4023360" cy="548640"/>
+          </a:xfrm>
+          <a:prstGeom prst="rect">
+            <a:avLst/>
+          </a:prstGeom>
+          <a:noFill/>
+          <a:ln/>
+        </p:spPr>
+        <p:txBody>
+          <a:bodyPr wrap="square" lIns="0" tIns="0" rIns="0" bIns="0" rtlCol="0" anchor="ctr"/>
+          <a:lstStyle/>
+          <a:p>
+            <a:pPr indent="0" marL="0">
+              <a:buNone/>
+            </a:pPr>
+            <a:r>
+              <a:rPr lang="en-US" sz="1900" b="1" dirty="0">
+                <a:solidFill>
+                  <a:schemeClr val="tx1"/>
+                </a:solidFill>
+              </a:rPr>
+              <a:t>Elosztóhely</a:t>
+            </a:r>
+            <a:endParaRPr lang="en-US" sz="1900" dirty="0"/>
+          </a:p>
+        </p:txBody>
+      </p:sp>
+      <p:sp>
+        <p:nvSpPr>
+          <p:cNvPr id="17" name="Text 12"/>
+          <p:cNvSpPr txBox="1"/>
+          <p:nvPr/>
+        </p:nvSpPr>
+        <p:spPr>
+          <a:xfrm>
+            <a:off x="1737360" y="4480560"/>
+            <a:ext cx="4069080" cy="1234440"/>
+          </a:xfrm>
+          <a:prstGeom prst="rect">
+            <a:avLst/>
+          </a:prstGeom>
+          <a:noFill/>
+          <a:ln/>
+        </p:spPr>
+        <p:txBody>
+          <a:bodyPr wrap="square" lIns="0" tIns="0" rIns="0" bIns="0" rtlCol="0" anchor="t"/>
+          <a:lstStyle/>
+          <a:p>
+            <a:pPr indent="0" marL="0">
+              <a:buNone/>
+            </a:pPr>
+            <a:r>
+              <a:rPr lang="en-US" sz="1400" dirty="0">
+                <a:solidFill>
+                  <a:schemeClr val="tx1"/>
+                </a:solidFill>
+              </a:rPr>
+              <a:t>Itt válogatták a foglyokat németországi koncentrációs táborokba és kényszermunkára.</a:t>
+            </a:r>
+            <a:endParaRPr lang="en-US" sz="1400" dirty="0"/>
+          </a:p>
+        </p:txBody>
+      </p:sp>
+      <p:sp>
+        <p:nvSpPr>
+          <p:cNvPr id="18" name="Kártya"/>
+          <p:cNvSpPr/>
+          <p:nvPr/>
+        </p:nvSpPr>
+        <p:spPr>
+          <a:xfrm>
+            <a:off x="6172200" y="3611880"/>
+            <a:ext cx="5440680" cy="2194560"/>
+          </a:xfrm>
+          <a:prstGeom prst="roundRect">
+            <a:avLst>
+              <a:gd name="adj" fmla="val 3333"/>
+            </a:avLst>
+          </a:prstGeom>
+          <a:solidFill>
+            <a:schemeClr val="bg2"/>
+          </a:solidFill>
+          <a:ln w="12700">
+            <a:solidFill>
+              <a:schemeClr val="bg2"/>
+            </a:solidFill>
+            <a:prstDash val="solid"/>
+          </a:ln>
+        </p:spPr>
+      </p:sp>
+      <p:sp>
+        <p:nvSpPr>
+          <p:cNvPr id="19" name="Ikon kör"/>
+          <p:cNvSpPr/>
+          <p:nvPr/>
+        </p:nvSpPr>
+        <p:spPr>
+          <a:xfrm>
+            <a:off x="6400800" y="3886200"/>
+            <a:ext cx="731520" cy="731520"/>
+          </a:xfrm>
+          <a:prstGeom prst="ellipse">
+            <a:avLst/>
+          </a:prstGeom>
+          <a:solidFill>
+            <a:schemeClr val="accent1"/>
+          </a:solidFill>
+          <a:ln w="12700">
+            <a:solidFill>
+              <a:schemeClr val="accent1"/>
+            </a:solidFill>
+            <a:prstDash val="solid"/>
+          </a:ln>
+        </p:spPr>
+      </p:sp>
+      <p:pic>
+        <p:nvPicPr>
+          <p:cNvPr id="20" name="Image 3" descr="FaExclamationTriangle">    </p:cNvPr>
+          <p:cNvPicPr>
+            <a:picLocks noChangeAspect="1"/>
+          </p:cNvPicPr>
+          <p:nvPr/>
+        </p:nvPicPr>
+        <p:blipFill>
+          <a:blip r:embed="rId4"/>
+          <a:stretch>
+            <a:fillRect/>
+          </a:stretch>
+        </p:blipFill>
+        <p:spPr>
+          <a:xfrm>
+            <a:off x="6583680" y="4069080"/>
+            <a:ext cx="365760" cy="365760"/>
+          </a:xfrm>
+          <a:prstGeom prst="rect">
+            <a:avLst/>
+          </a:prstGeom>
+        </p:spPr>
+      </p:pic>
+      <p:sp>
+        <p:nvSpPr>
+          <p:cNvPr id="21" name="Text 15"/>
+          <p:cNvSpPr txBox="1"/>
+          <p:nvPr/>
+        </p:nvSpPr>
+        <p:spPr>
+          <a:xfrm>
+            <a:off x="7360920" y="3886200"/>
+            <a:ext cx="4023360" cy="548640"/>
+          </a:xfrm>
+          <a:prstGeom prst="rect">
+            <a:avLst/>
+          </a:prstGeom>
+          <a:noFill/>
+          <a:ln/>
+        </p:spPr>
+        <p:txBody>
+          <a:bodyPr wrap="square" lIns="0" tIns="0" rIns="0" bIns="0" rtlCol="0" anchor="ctr"/>
+          <a:lstStyle/>
+          <a:p>
+            <a:pPr indent="0" marL="0">
+              <a:buNone/>
+            </a:pPr>
+            <a:r>
+              <a:rPr lang="en-US" sz="1900" b="1" dirty="0">
+                <a:solidFill>
+                  <a:schemeClr val="tx1"/>
+                </a:solidFill>
+              </a:rPr>
+              <a:t>Kivégzőhely</a:t>
+            </a:r>
+            <a:endParaRPr lang="en-US" sz="1900" dirty="0"/>
+          </a:p>
+        </p:txBody>
+      </p:sp>
+      <p:sp>
+        <p:nvSpPr>
+          <p:cNvPr id="22" name="Text 16"/>
+          <p:cNvSpPr txBox="1"/>
+          <p:nvPr/>
+        </p:nvSpPr>
+        <p:spPr>
+          <a:xfrm>
+            <a:off x="7360920" y="4480560"/>
+            <a:ext cx="4069080" cy="1234440"/>
+          </a:xfrm>
+          <a:prstGeom prst="rect">
+            <a:avLst/>
+          </a:prstGeom>
+          <a:noFill/>
+          <a:ln/>
+        </p:spPr>
+        <p:txBody>
+          <a:bodyPr wrap="square" lIns="0" tIns="0" rIns="0" bIns="0" rtlCol="0" anchor="t"/>
+          <a:lstStyle/>
+          <a:p>
+            <a:pPr indent="0" marL="0">
+              <a:buNone/>
+            </a:pPr>
+            <a:r>
+              <a:rPr lang="en-US" sz="1400" dirty="0">
+                <a:solidFill>
+                  <a:schemeClr val="tx1"/>
+                </a:solidFill>
+              </a:rPr>
+              <a:t>Az egyetlen náci tábor Olaszországban krematóriummal (1944 áprilisától). A foglyokat agyonlőtték, agyonverték vagy felakasztották.</a:t>
+            </a:r>
+            <a:endParaRPr lang="en-US" sz="1400" dirty="0"/>
+          </a:p>
+        </p:txBody>
+      </p:sp>
+      <p:sp>
+        <p:nvSpPr>
+          <p:cNvPr id="23" name="Forrás"/>
+          <p:cNvSpPr txBox="1"/>
+          <p:nvPr/>
+        </p:nvSpPr>
+        <p:spPr>
+          <a:xfrm>
+            <a:off x="548640" y="6053328"/>
+            <a:ext cx="11064240" cy="329184"/>
+          </a:xfrm>
+          <a:prstGeom prst="rect">
+            <a:avLst/>
+          </a:prstGeom>
+          <a:noFill/>
+          <a:ln/>
+        </p:spPr>
+        <p:txBody>
+          <a:bodyPr wrap="square" lIns="0" tIns="0" rIns="0" bIns="0" rtlCol="0" anchor="t"/>
+          <a:lstStyle/>
+          <a:p>
+            <a:pPr indent="0" marL="0">
+              <a:buNone/>
+            </a:pPr>
+            <a:r>
+              <a:rPr lang="en-US" sz="1000" i="1" dirty="0">
+                <a:solidFill>
+                  <a:schemeClr val="accent4"/>
+                </a:solidFill>
+              </a:rPr>
+              <a:t>Forrás: risierasansabba.it; ANED (deportati.it); USHMM. A kivégzési módokról: a túlélők és az 1976-os per tanúvallomásai.</a:t>
+            </a:r>
+            <a:endParaRPr lang="en-US" sz="1000" dirty="0"/>
+          </a:p>
+        </p:txBody>
+      </p:sp>
+      <p:sp>
+        <p:nvSpPr>
+          <p:cNvPr id="25" name="Slide Number Placeholder 0"/>
+          <p:cNvSpPr>
+            <a:spLocks noGrp="1"/>
+          </p:cNvSpPr>
+          <p:nvPr>
+            <p:ph type="sldNum" sz="quarter" idx="4294967295"/>
+          </p:nvPr>
+        </p:nvSpPr>
+        <p:spPr>
+          <a:xfrm>
+            <a:off x="11064240" y="6446520"/>
+            <a:ext cx="548640" cy="274320"/>
+          </a:xfrm>
+          <a:prstGeom prst="rect">
+            <a:avLst/>
+          </a:prstGeom>
+          <a:extLst>
+            <a:ext uri="{C572A759-6A51-4108-AA02-DFA0A04FC94B}">
+              <ma14:wrappingTextBoxFlag xmlns:ma14="http://schemas.microsoft.com/office/mac/drawingml/2011/main" val="0"/>
+            </a:ext>
+          </a:extLst>
+        </p:spPr>
+        <p:txBody>
+          <a:bodyPr/>
+          <a:lstStyle>
+            <a:lvl1pPr>
+              <a:defRPr sz="1000">
+                <a:solidFill>
+                  <a:schemeClr val="accent4"/>
+                </a:solidFill>
+              </a:defRPr>
+            </a:lvl1pPr>
+          </a:lstStyle>
+          <a:p>
+            <a:pPr algn="r"/>
+            <a:fld id="{F7021451-1387-4CA6-816F-3879F97B5CBC}" type="slidenum">
+              <a:rPr b="0" lang="en-US"/>
+              <a:t>43</a:t>
+            </a:fld>
+            <a:endParaRPr lang="en-US"/>
+          </a:p>
+        </p:txBody>
+      </p:sp>
+    </p:spTree>
+  </p:cSld>
+  <p:clrMapOvr>
+    <a:masterClrMapping/>
+  </p:clrMapOvr>
+</p:sld>
+</file>
+
+<file path=ppt/slides/slide44.xml><?xml version="1.0" encoding="utf-8"?>
+<p:sld xmlns:a="http://schemas.openxmlformats.org/drawingml/2006/main" xmlns:r="http://schemas.openxmlformats.org/officeDocument/2006/relationships" xmlns:p="http://schemas.openxmlformats.org/presentationml/2006/main">
+  <p:cSld name="Slide 44">
+    <p:spTree>
+      <p:nvGrpSpPr>
+        <p:cNvPr id="1" name=""/>
+        <p:cNvGrpSpPr/>
+        <p:nvPr/>
+      </p:nvGrpSpPr>
+      <p:grpSpPr>
+        <a:xfrm>
+          <a:off x="0" y="0"/>
+          <a:ext cx="0" cy="0"/>
+          <a:chOff x="0" y="0"/>
+          <a:chExt cx="0" cy="0"/>
+        </a:xfrm>
+      </p:grpSpPr>
+      <p:sp>
+        <p:nvSpPr>
+          <p:cNvPr id="2" name="Text 0"/>
+          <p:cNvSpPr/>
+          <p:nvPr>
+            <p:ph idx="100" type="title" hasCustomPrompt="1"/>
+          </p:nvPr>
+        </p:nvSpPr>
+        <p:spPr>
+          <a:xfrm>
+            <a:off x="548640" y="320040"/>
+            <a:ext cx="11064240" cy="731520"/>
+          </a:xfrm>
+          <a:prstGeom prst="rect">
+            <a:avLst/>
+          </a:prstGeom>
+          <a:noFill/>
+          <a:ln/>
+        </p:spPr>
+        <p:txBody>
+          <a:bodyPr wrap="square" lIns="0" tIns="0" rIns="0" bIns="0" rtlCol="0" anchor="ctr"/>
+          <a:lstStyle/>
+          <a:p>
+            <a:pPr algn="l" indent="0" marL="0">
+              <a:buNone/>
+            </a:pPr>
+            <a:r>
+              <a:rPr lang="en-US" sz="3200" b="1" dirty="0">
+                <a:solidFill>
+                  <a:schemeClr val="tx1"/>
+                </a:solidFill>
+                <a:latin typeface="Cambria" pitchFamily="34" charset="0"/>
+                <a:ea typeface="Cambria" pitchFamily="34" charset="-122"/>
+                <a:cs typeface="Cambria" pitchFamily="34" charset="-120"/>
+              </a:rPr>
+              <a:t>A tettesek: Lublinból Triesztbe</a:t>
+            </a:r>
+            <a:endParaRPr lang="en-US" sz="3200" dirty="0"/>
+          </a:p>
+        </p:txBody>
+      </p:sp>
+      <p:pic>
+        <p:nvPicPr>
+          <p:cNvPr id="3" name="Image 0" descr="Az Adriai Tengermellék műveleti zóna térképe">    </p:cNvPr>
+          <p:cNvPicPr>
+            <a:picLocks noChangeAspect="1"/>
+          </p:cNvPicPr>
+          <p:nvPr/>
+        </p:nvPicPr>
+        <p:blipFill>
+          <a:blip r:embed="rId1"/>
+          <a:stretch>
+            <a:fillRect/>
+          </a:stretch>
+        </p:blipFill>
+        <p:spPr>
+          <a:xfrm>
+            <a:off x="548640" y="1188720"/>
+            <a:ext cx="5760720" cy="4114800"/>
+          </a:xfrm>
+          <a:prstGeom prst="rect">
+            <a:avLst/>
+          </a:prstGeom>
+        </p:spPr>
+      </p:pic>
+      <p:sp>
+        <p:nvSpPr>
+          <p:cNvPr id="4" name="Felsorolás"/>
+          <p:cNvSpPr txBox="1"/>
+          <p:nvPr/>
+        </p:nvSpPr>
+        <p:spPr>
+          <a:xfrm>
+            <a:off x="6583680" y="1234440"/>
+            <a:ext cx="5029200" cy="4754880"/>
+          </a:xfrm>
+          <a:prstGeom prst="rect">
+            <a:avLst/>
+          </a:prstGeom>
+          <a:noFill/>
+          <a:ln/>
+        </p:spPr>
+        <p:txBody>
+          <a:bodyPr wrap="square" lIns="0" tIns="0" rIns="0" bIns="0" rtlCol="0" anchor="t"/>
+          <a:lstStyle/>
+          <a:p>
+            <a:pPr marL="342900" indent="-342900">
+              <a:spcAft>
+                <a:spcPts val="600"/>
+              </a:spcAft>
+              <a:buSzPct val="100000"/>
+              <a:buChar char="•"/>
+            </a:pPr>
+            <a:r>
+              <a:rPr lang="en-US" sz="1400" b="1" dirty="0">
+                <a:solidFill>
+                  <a:schemeClr val="tx1"/>
+                </a:solidFill>
+              </a:rPr>
+              <a:t>1943. szept.: </a:t>
+            </a:r>
+            <a:pPr indent="0" marL="0">
+              <a:spcAft>
+                <a:spcPts val="600"/>
+              </a:spcAft>
+              <a:buNone/>
+            </a:pPr>
+            <a:r>
+              <a:rPr lang="en-US" sz="1400" dirty="0">
+                <a:solidFill>
+                  <a:schemeClr val="tx1"/>
+                </a:solidFill>
+              </a:rPr>
+              <a:t>a németek létrehozzák az Adriai Tengermellék Műveleti Zónát (OZAK) — gyakorlatilag német közigazgatás alatt, a salòi bábállamtól függetlenül.</a:t>
+            </a:r>
+            <a:endParaRPr lang="en-US" sz="1400" dirty="0"/>
+          </a:p>
+          <a:p>
+            <a:pPr marL="342900" indent="-342900">
+              <a:spcAft>
+                <a:spcPts val="600"/>
+              </a:spcAft>
+              <a:buSzPct val="100000"/>
+              <a:buChar char="•"/>
+            </a:pPr>
+            <a:r>
+              <a:rPr lang="en-US" sz="1400" b="1" dirty="0">
+                <a:solidFill>
+                  <a:schemeClr val="tx1"/>
+                </a:solidFill>
+              </a:rPr>
+              <a:t>Odilo Globocnik </a:t>
+            </a:r>
+            <a:pPr indent="0" marL="0">
+              <a:spcAft>
+                <a:spcPts val="600"/>
+              </a:spcAft>
+              <a:buNone/>
+            </a:pPr>
+            <a:r>
+              <a:rPr lang="en-US" sz="1400" dirty="0">
+                <a:solidFill>
+                  <a:schemeClr val="tx1"/>
+                </a:solidFill>
+              </a:rPr>
+              <a:t>— Triesztben született SS-tábornok, korábban a lengyelországi Reinhard-akció (Bełżec, Sobibór, Treblinka) vezetője — lesz a térség SS- és rendőrségi parancsnoka.</a:t>
+            </a:r>
+            <a:endParaRPr lang="en-US" sz="1400" dirty="0"/>
+          </a:p>
+          <a:p>
+            <a:pPr marL="342900" indent="-342900">
+              <a:spcAft>
+                <a:spcPts val="600"/>
+              </a:spcAft>
+              <a:buSzPct val="100000"/>
+              <a:buChar char="•"/>
+            </a:pPr>
+            <a:r>
+              <a:rPr lang="en-US" sz="1400" b="1" dirty="0">
+                <a:solidFill>
+                  <a:schemeClr val="tx1"/>
+                </a:solidFill>
+              </a:rPr>
+              <a:t>Einsatzkommando Reinhard (R1): </a:t>
+            </a:r>
+            <a:pPr indent="0" marL="0">
+              <a:spcAft>
+                <a:spcPts val="600"/>
+              </a:spcAft>
+              <a:buNone/>
+            </a:pPr>
+            <a:r>
+              <a:rPr lang="en-US" sz="1400" dirty="0">
+                <a:solidFill>
+                  <a:schemeClr val="tx1"/>
+                </a:solidFill>
+              </a:rPr>
+              <a:t>kb. 92 fő, akik a lengyel megsemmisítő táborokban „tapasztalatot” szereztek. Parancsnokuk Christian Wirth, akit 1944. máj. 26-án Erpelle mellett partizánok öltek meg; utódja Dietrich Allers.</a:t>
+            </a:r>
+            <a:endParaRPr lang="en-US" sz="1400" dirty="0"/>
+          </a:p>
+        </p:txBody>
+      </p:sp>
+      <p:sp>
+        <p:nvSpPr>
+          <p:cNvPr id="5" name="Text 2"/>
+          <p:cNvSpPr txBox="1"/>
+          <p:nvPr/>
+        </p:nvSpPr>
+        <p:spPr>
+          <a:xfrm>
+            <a:off x="548640" y="5394960"/>
+            <a:ext cx="5760720" cy="594360"/>
+          </a:xfrm>
+          <a:prstGeom prst="rect">
+            <a:avLst/>
+          </a:prstGeom>
+          <a:noFill/>
+          <a:ln/>
+        </p:spPr>
+        <p:txBody>
+          <a:bodyPr wrap="square" lIns="0" tIns="0" rIns="0" bIns="0" rtlCol="0" anchor="t"/>
+          <a:lstStyle/>
+          <a:p>
+            <a:pPr indent="0" marL="0">
+              <a:buNone/>
+            </a:pPr>
+            <a:r>
+              <a:rPr lang="en-US" sz="1400" b="1" i="1" dirty="0">
+                <a:solidFill>
+                  <a:schemeClr val="accent1"/>
+                </a:solidFill>
+              </a:rPr>
+              <a:t>Kulcsgondolat: a Risiera a „végső megoldás” lengyelországi gépezetének kihelyezett darabja volt Olaszország földjén.</a:t>
+            </a:r>
+            <a:endParaRPr lang="en-US" sz="1400" dirty="0"/>
+          </a:p>
+        </p:txBody>
+      </p:sp>
+      <p:sp>
+        <p:nvSpPr>
+          <p:cNvPr id="6" name="Forrás"/>
+          <p:cNvSpPr txBox="1"/>
+          <p:nvPr/>
+        </p:nvSpPr>
+        <p:spPr>
+          <a:xfrm>
+            <a:off x="548640" y="6053328"/>
+            <a:ext cx="11064240" cy="329184"/>
+          </a:xfrm>
+          <a:prstGeom prst="rect">
+            <a:avLst/>
+          </a:prstGeom>
+          <a:noFill/>
+          <a:ln/>
+        </p:spPr>
+        <p:txBody>
+          <a:bodyPr wrap="square" lIns="0" tIns="0" rIns="0" bIns="0" rtlCol="0" anchor="t"/>
+          <a:lstStyle/>
+          <a:p>
+            <a:pPr indent="0" marL="0">
+              <a:buNone/>
+            </a:pPr>
+            <a:r>
+              <a:rPr lang="en-US" sz="1000" i="1" dirty="0">
+                <a:solidFill>
+                  <a:schemeClr val="accent4"/>
+                </a:solidFill>
+              </a:rPr>
+              <a:t>Forrás: Wikipedia: Operational Zone of the Adriatic Littoral; it.wikipedia: Sonderabteilung Einsatz R; ns-taeter-italien.org; risierasansabba.it.</a:t>
+            </a:r>
+            <a:endParaRPr lang="en-US" sz="1000" dirty="0"/>
+          </a:p>
+        </p:txBody>
+      </p:sp>
+      <p:sp>
+        <p:nvSpPr>
+          <p:cNvPr id="25" name="Slide Number Placeholder 0"/>
+          <p:cNvSpPr>
+            <a:spLocks noGrp="1"/>
+          </p:cNvSpPr>
+          <p:nvPr>
+            <p:ph type="sldNum" sz="quarter" idx="4294967295"/>
+          </p:nvPr>
+        </p:nvSpPr>
+        <p:spPr>
+          <a:xfrm>
+            <a:off x="11064240" y="6446520"/>
+            <a:ext cx="548640" cy="274320"/>
+          </a:xfrm>
+          <a:prstGeom prst="rect">
+            <a:avLst/>
+          </a:prstGeom>
+          <a:extLst>
+            <a:ext uri="{C572A759-6A51-4108-AA02-DFA0A04FC94B}">
+              <ma14:wrappingTextBoxFlag xmlns:ma14="http://schemas.microsoft.com/office/mac/drawingml/2011/main" val="0"/>
+            </a:ext>
+          </a:extLst>
+        </p:spPr>
+        <p:txBody>
+          <a:bodyPr/>
+          <a:lstStyle>
+            <a:lvl1pPr>
+              <a:defRPr sz="1000">
+                <a:solidFill>
+                  <a:schemeClr val="accent4"/>
+                </a:solidFill>
+              </a:defRPr>
+            </a:lvl1pPr>
+          </a:lstStyle>
+          <a:p>
+            <a:pPr algn="r"/>
+            <a:fld id="{F7021451-1387-4CA6-816F-3879F97B5CBC}" type="slidenum">
+              <a:rPr b="0" lang="en-US"/>
+              <a:t>44</a:t>
+            </a:fld>
+            <a:endParaRPr lang="en-US"/>
+          </a:p>
+        </p:txBody>
+      </p:sp>
+    </p:spTree>
+  </p:cSld>
+  <p:clrMapOvr>
+    <a:masterClrMapping/>
+  </p:clrMapOvr>
+</p:sld>
+</file>
+
+<file path=ppt/slides/slide45.xml><?xml version="1.0" encoding="utf-8"?>
+<p:sld xmlns:a="http://schemas.openxmlformats.org/drawingml/2006/main" xmlns:r="http://schemas.openxmlformats.org/officeDocument/2006/relationships" xmlns:p="http://schemas.openxmlformats.org/presentationml/2006/main">
+  <p:cSld name="Slide 45">
+    <p:spTree>
+      <p:nvGrpSpPr>
+        <p:cNvPr id="1" name=""/>
+        <p:cNvGrpSpPr/>
+        <p:nvPr/>
+      </p:nvGrpSpPr>
+      <p:grpSpPr>
+        <a:xfrm>
+          <a:off x="0" y="0"/>
+          <a:ext cx="0" cy="0"/>
+          <a:chOff x="0" y="0"/>
+          <a:chExt cx="0" cy="0"/>
+        </a:xfrm>
+      </p:grpSpPr>
+      <p:sp>
+        <p:nvSpPr>
+          <p:cNvPr id="2" name="Text 0"/>
+          <p:cNvSpPr/>
+          <p:nvPr>
+            <p:ph idx="100" type="title" hasCustomPrompt="1"/>
+          </p:nvPr>
+        </p:nvSpPr>
+        <p:spPr>
+          <a:xfrm>
+            <a:off x="548640" y="320040"/>
+            <a:ext cx="11064240" cy="731520"/>
+          </a:xfrm>
+          <a:prstGeom prst="rect">
+            <a:avLst/>
+          </a:prstGeom>
+          <a:noFill/>
+          <a:ln/>
+        </p:spPr>
+        <p:txBody>
+          <a:bodyPr wrap="square" lIns="0" tIns="0" rIns="0" bIns="0" rtlCol="0" anchor="ctr"/>
+          <a:lstStyle/>
+          <a:p>
+            <a:pPr algn="l" indent="0" marL="0">
+              <a:buNone/>
+            </a:pPr>
+            <a:r>
+              <a:rPr lang="en-US" sz="3200" b="1" dirty="0">
+                <a:solidFill>
+                  <a:schemeClr val="tx1"/>
+                </a:solidFill>
+                <a:latin typeface="Cambria" pitchFamily="34" charset="0"/>
+                <a:ea typeface="Cambria" pitchFamily="34" charset="-122"/>
+                <a:cs typeface="Cambria" pitchFamily="34" charset="-120"/>
+              </a:rPr>
+              <a:t>Számok — óvatosan kezelve</a:t>
+            </a:r>
+            <a:endParaRPr lang="en-US" sz="3200" dirty="0"/>
+          </a:p>
+        </p:txBody>
+      </p:sp>
+      <p:graphicFrame>
+        <p:nvGraphicFramePr>
+          <p:cNvPr id="3" name="Chart 0" descr=""/>
+          <p:cNvGraphicFramePr/>
+          <p:nvPr/>
+        </p:nvGraphicFramePr>
+        <p:xfrm>
+          <a:off x="548640" y="1188720"/>
+          <a:ext cx="4937760" cy="3657600"/>
+        </p:xfrm>
+        <a:graphic xmlns:a="http://schemas.openxmlformats.org/drawingml/2006/main">
+          <a:graphicData uri="http://schemas.openxmlformats.org/drawingml/2006/chart">
+            <c:chart xmlns:c="http://schemas.openxmlformats.org/drawingml/2006/chart" r:id="rId1"/>
+          </a:graphicData>
+        </a:graphic>
+      </p:graphicFrame>
+      <p:sp>
+        <p:nvSpPr>
+          <p:cNvPr id="4" name="Text 1"/>
+          <p:cNvSpPr txBox="1"/>
+          <p:nvPr/>
+        </p:nvSpPr>
+        <p:spPr>
+          <a:xfrm>
+            <a:off x="548640" y="4983480"/>
+            <a:ext cx="4937760" cy="822960"/>
+          </a:xfrm>
+          <a:prstGeom prst="rect">
+            <a:avLst/>
+          </a:prstGeom>
+          <a:noFill/>
+          <a:ln/>
+        </p:spPr>
+        <p:txBody>
+          <a:bodyPr wrap="square" lIns="0" tIns="0" rIns="0" bIns="0" rtlCol="0" anchor="t"/>
+          <a:lstStyle/>
+          <a:p>
+            <a:pPr indent="0" marL="0">
+              <a:buNone/>
+            </a:pPr>
+            <a:r>
+              <a:rPr lang="en-US" sz="1300" i="1" dirty="0">
+                <a:solidFill>
+                  <a:schemeClr val="accent4"/>
+                </a:solidFill>
+              </a:rPr>
+              <a:t>A vonatok egy része a Risierából, más része a Coroneo-börtönből gyűjtötte össze a deportáltakat.</a:t>
+            </a:r>
+            <a:endParaRPr lang="en-US" sz="1300" dirty="0"/>
+          </a:p>
+        </p:txBody>
+      </p:sp>
+      <p:sp>
+        <p:nvSpPr>
+          <p:cNvPr id="5" name="Kártya"/>
+          <p:cNvSpPr/>
+          <p:nvPr/>
+        </p:nvSpPr>
+        <p:spPr>
+          <a:xfrm>
+            <a:off x="5852160" y="1188720"/>
+            <a:ext cx="5760720" cy="1463040"/>
+          </a:xfrm>
+          <a:prstGeom prst="roundRect">
+            <a:avLst>
+              <a:gd name="adj" fmla="val 5000"/>
+            </a:avLst>
+          </a:prstGeom>
+          <a:solidFill>
+            <a:schemeClr val="bg2"/>
+          </a:solidFill>
+          <a:ln w="12700">
+            <a:solidFill>
+              <a:schemeClr val="bg2"/>
+            </a:solidFill>
+            <a:prstDash val="solid"/>
+          </a:ln>
+        </p:spPr>
+      </p:sp>
+      <p:sp>
+        <p:nvSpPr>
+          <p:cNvPr id="6" name="Szám"/>
+          <p:cNvSpPr txBox="1"/>
+          <p:nvPr/>
+        </p:nvSpPr>
+        <p:spPr>
+          <a:xfrm>
+            <a:off x="6080760" y="1188720"/>
+            <a:ext cx="5303520" cy="868680"/>
+          </a:xfrm>
+          <a:prstGeom prst="rect">
+            <a:avLst/>
+          </a:prstGeom>
+          <a:noFill/>
+          <a:ln/>
+        </p:spPr>
+        <p:txBody>
+          <a:bodyPr wrap="square" lIns="0" tIns="0" rIns="0" bIns="0" rtlCol="0" anchor="b"/>
+          <a:lstStyle/>
+          <a:p>
+            <a:pPr indent="0" marL="0">
+              <a:buNone/>
+            </a:pPr>
+            <a:r>
+              <a:rPr lang="en-US" sz="3200" b="1" dirty="0">
+                <a:solidFill>
+                  <a:schemeClr val="accent1"/>
+                </a:solidFill>
+                <a:latin typeface="Cambria" pitchFamily="34" charset="0"/>
+                <a:ea typeface="Cambria" pitchFamily="34" charset="-122"/>
+                <a:cs typeface="Cambria" pitchFamily="34" charset="-120"/>
+              </a:rPr>
+              <a:t>≥ 2 000</a:t>
+            </a:r>
+            <a:endParaRPr lang="en-US" sz="3200" dirty="0"/>
+          </a:p>
+        </p:txBody>
+      </p:sp>
+      <p:sp>
+        <p:nvSpPr>
+          <p:cNvPr id="7" name="Szám címke"/>
+          <p:cNvSpPr txBox="1"/>
+          <p:nvPr/>
+        </p:nvSpPr>
+        <p:spPr>
+          <a:xfrm>
+            <a:off x="6080760" y="2103120"/>
+            <a:ext cx="5303520" cy="822960"/>
+          </a:xfrm>
+          <a:prstGeom prst="rect">
+            <a:avLst/>
+          </a:prstGeom>
+          <a:noFill/>
+          <a:ln/>
+        </p:spPr>
+        <p:txBody>
+          <a:bodyPr wrap="square" lIns="0" tIns="0" rIns="0" bIns="0" rtlCol="0" anchor="t"/>
+          <a:lstStyle/>
+          <a:p>
+            <a:pPr indent="0" marL="0">
+              <a:buNone/>
+            </a:pPr>
+            <a:r>
+              <a:rPr lang="en-US" sz="1400" dirty="0">
+                <a:solidFill>
+                  <a:schemeClr val="tx1"/>
+                </a:solidFill>
+              </a:rPr>
+              <a:t>áldozat — az 1976-os trieszti esküdtszéki ítélet szerint; történészek 3–5 000 főre becsülik</a:t>
+            </a:r>
+            <a:endParaRPr lang="en-US" sz="1400" dirty="0"/>
+          </a:p>
+        </p:txBody>
+      </p:sp>
+      <p:sp>
+        <p:nvSpPr>
+          <p:cNvPr id="8" name="Kártya"/>
+          <p:cNvSpPr/>
+          <p:nvPr/>
+        </p:nvSpPr>
+        <p:spPr>
+          <a:xfrm>
+            <a:off x="5852160" y="2788920"/>
+            <a:ext cx="5760720" cy="1463040"/>
+          </a:xfrm>
+          <a:prstGeom prst="roundRect">
+            <a:avLst>
+              <a:gd name="adj" fmla="val 5000"/>
+            </a:avLst>
+          </a:prstGeom>
+          <a:solidFill>
+            <a:schemeClr val="bg2"/>
+          </a:solidFill>
+          <a:ln w="12700">
+            <a:solidFill>
+              <a:schemeClr val="bg2"/>
+            </a:solidFill>
+            <a:prstDash val="solid"/>
+          </a:ln>
+        </p:spPr>
+      </p:sp>
+      <p:sp>
+        <p:nvSpPr>
+          <p:cNvPr id="9" name="Szám"/>
+          <p:cNvSpPr txBox="1"/>
+          <p:nvPr/>
+        </p:nvSpPr>
+        <p:spPr>
+          <a:xfrm>
+            <a:off x="6080760" y="2788920"/>
+            <a:ext cx="5303520" cy="868680"/>
+          </a:xfrm>
+          <a:prstGeom prst="rect">
+            <a:avLst/>
+          </a:prstGeom>
+          <a:noFill/>
+          <a:ln/>
+        </p:spPr>
+        <p:txBody>
+          <a:bodyPr wrap="square" lIns="0" tIns="0" rIns="0" bIns="0" rtlCol="0" anchor="b"/>
+          <a:lstStyle/>
+          <a:p>
+            <a:pPr indent="0" marL="0">
+              <a:buNone/>
+            </a:pPr>
+            <a:r>
+              <a:rPr lang="en-US" sz="3200" b="1" dirty="0">
+                <a:solidFill>
+                  <a:schemeClr val="accent1"/>
+                </a:solidFill>
+                <a:latin typeface="Cambria" pitchFamily="34" charset="0"/>
+                <a:ea typeface="Cambria" pitchFamily="34" charset="-122"/>
+                <a:cs typeface="Cambria" pitchFamily="34" charset="-120"/>
+              </a:rPr>
+              <a:t>700+</a:t>
+            </a:r>
+            <a:endParaRPr lang="en-US" sz="3200" dirty="0"/>
+          </a:p>
+        </p:txBody>
+      </p:sp>
+      <p:sp>
+        <p:nvSpPr>
+          <p:cNvPr id="10" name="Szám címke"/>
+          <p:cNvSpPr txBox="1"/>
+          <p:nvPr/>
+        </p:nvSpPr>
+        <p:spPr>
+          <a:xfrm>
+            <a:off x="6080760" y="3703320"/>
+            <a:ext cx="5303520" cy="822960"/>
+          </a:xfrm>
+          <a:prstGeom prst="rect">
+            <a:avLst/>
+          </a:prstGeom>
+          <a:noFill/>
+          <a:ln/>
+        </p:spPr>
+        <p:txBody>
+          <a:bodyPr wrap="square" lIns="0" tIns="0" rIns="0" bIns="0" rtlCol="0" anchor="t"/>
+          <a:lstStyle/>
+          <a:p>
+            <a:pPr indent="0" marL="0">
+              <a:buNone/>
+            </a:pPr>
+            <a:r>
+              <a:rPr lang="en-US" sz="1400" dirty="0">
+                <a:solidFill>
+                  <a:schemeClr val="tx1"/>
+                </a:solidFill>
+              </a:rPr>
+              <a:t>trieszti zsidót deportáltak; csak kb. 20 tért vissza (a múzeum adata — más források 754 / 837 főt említenek)</a:t>
+            </a:r>
+            <a:endParaRPr lang="en-US" sz="1400" dirty="0"/>
+          </a:p>
+        </p:txBody>
+      </p:sp>
+      <p:sp>
+        <p:nvSpPr>
+          <p:cNvPr id="11" name="Kártya"/>
+          <p:cNvSpPr/>
+          <p:nvPr/>
+        </p:nvSpPr>
+        <p:spPr>
+          <a:xfrm>
+            <a:off x="5852160" y="4389120"/>
+            <a:ext cx="5760720" cy="1463040"/>
+          </a:xfrm>
+          <a:prstGeom prst="roundRect">
+            <a:avLst>
+              <a:gd name="adj" fmla="val 5000"/>
+            </a:avLst>
+          </a:prstGeom>
+          <a:solidFill>
+            <a:schemeClr val="bg2"/>
+          </a:solidFill>
+          <a:ln w="12700">
+            <a:solidFill>
+              <a:schemeClr val="bg2"/>
+            </a:solidFill>
+            <a:prstDash val="solid"/>
+          </a:ln>
+        </p:spPr>
+      </p:sp>
+      <p:sp>
+        <p:nvSpPr>
+          <p:cNvPr id="12" name="Szám"/>
+          <p:cNvSpPr txBox="1"/>
+          <p:nvPr/>
+        </p:nvSpPr>
+        <p:spPr>
+          <a:xfrm>
+            <a:off x="6080760" y="4389120"/>
+            <a:ext cx="5303520" cy="868680"/>
+          </a:xfrm>
+          <a:prstGeom prst="rect">
+            <a:avLst/>
+          </a:prstGeom>
+          <a:noFill/>
+          <a:ln/>
+        </p:spPr>
+        <p:txBody>
+          <a:bodyPr wrap="square" lIns="0" tIns="0" rIns="0" bIns="0" rtlCol="0" anchor="b"/>
+          <a:lstStyle/>
+          <a:p>
+            <a:pPr indent="0" marL="0">
+              <a:buNone/>
+            </a:pPr>
+            <a:r>
+              <a:rPr lang="en-US" sz="3200" b="1" dirty="0">
+                <a:solidFill>
+                  <a:schemeClr val="accent1"/>
+                </a:solidFill>
+                <a:latin typeface="Cambria" pitchFamily="34" charset="0"/>
+                <a:ea typeface="Cambria" pitchFamily="34" charset="-122"/>
+                <a:cs typeface="Cambria" pitchFamily="34" charset="-120"/>
+              </a:rPr>
+              <a:t>~8 200</a:t>
+            </a:r>
+            <a:endParaRPr lang="en-US" sz="3200" dirty="0"/>
+          </a:p>
+        </p:txBody>
+      </p:sp>
+      <p:sp>
+        <p:nvSpPr>
+          <p:cNvPr id="13" name="Szám címke"/>
+          <p:cNvSpPr txBox="1"/>
+          <p:nvPr/>
+        </p:nvSpPr>
+        <p:spPr>
+          <a:xfrm>
+            <a:off x="6080760" y="5303520"/>
+            <a:ext cx="5303520" cy="822960"/>
+          </a:xfrm>
+          <a:prstGeom prst="rect">
+            <a:avLst/>
+          </a:prstGeom>
+          <a:noFill/>
+          <a:ln/>
+        </p:spPr>
+        <p:txBody>
+          <a:bodyPr wrap="square" lIns="0" tIns="0" rIns="0" bIns="0" rtlCol="0" anchor="t"/>
+          <a:lstStyle/>
+          <a:p>
+            <a:pPr indent="0" marL="0">
+              <a:buNone/>
+            </a:pPr>
+            <a:r>
+              <a:rPr lang="en-US" sz="1400" dirty="0">
+                <a:solidFill>
+                  <a:schemeClr val="tx1"/>
+                </a:solidFill>
+              </a:rPr>
+              <a:t>deportált az egész Tengermellékről — a teljes olaszországi deportálás kb. ötöde (Coslovich)</a:t>
+            </a:r>
+            <a:endParaRPr lang="en-US" sz="1400" dirty="0"/>
+          </a:p>
+        </p:txBody>
+      </p:sp>
+      <p:sp>
+        <p:nvSpPr>
+          <p:cNvPr id="14" name="Forrás"/>
+          <p:cNvSpPr txBox="1"/>
+          <p:nvPr/>
+        </p:nvSpPr>
+        <p:spPr>
+          <a:xfrm>
+            <a:off x="548640" y="6053328"/>
+            <a:ext cx="11064240" cy="329184"/>
+          </a:xfrm>
+          <a:prstGeom prst="rect">
+            <a:avLst/>
+          </a:prstGeom>
+          <a:noFill/>
+          <a:ln/>
+        </p:spPr>
+        <p:txBody>
+          <a:bodyPr wrap="square" lIns="0" tIns="0" rIns="0" bIns="0" rtlCol="0" anchor="t"/>
+          <a:lstStyle/>
+          <a:p>
+            <a:pPr indent="0" marL="0">
+              <a:buNone/>
+            </a:pPr>
+            <a:r>
+              <a:rPr lang="en-US" sz="1000" i="1" dirty="0">
+                <a:solidFill>
+                  <a:schemeClr val="accent4"/>
+                </a:solidFill>
+              </a:rPr>
+              <a:t>Forrás: risierasansabba.it; ANPI; atrieste.eu (Coslovich nyomán); Picciotto (2002). A számok forrásonként eltérnek — a látogatáson érdemes rákérdezni.</a:t>
+            </a:r>
+            <a:endParaRPr lang="en-US" sz="1000" dirty="0"/>
+          </a:p>
+        </p:txBody>
+      </p:sp>
+      <p:sp>
+        <p:nvSpPr>
+          <p:cNvPr id="25" name="Slide Number Placeholder 0"/>
+          <p:cNvSpPr>
+            <a:spLocks noGrp="1"/>
+          </p:cNvSpPr>
+          <p:nvPr>
+            <p:ph type="sldNum" sz="quarter" idx="4294967295"/>
+          </p:nvPr>
+        </p:nvSpPr>
+        <p:spPr>
+          <a:xfrm>
+            <a:off x="11064240" y="6446520"/>
+            <a:ext cx="548640" cy="274320"/>
+          </a:xfrm>
+          <a:prstGeom prst="rect">
+            <a:avLst/>
+          </a:prstGeom>
+          <a:extLst>
+            <a:ext uri="{C572A759-6A51-4108-AA02-DFA0A04FC94B}">
+              <ma14:wrappingTextBoxFlag xmlns:ma14="http://schemas.microsoft.com/office/mac/drawingml/2011/main" val="0"/>
+            </a:ext>
+          </a:extLst>
+        </p:spPr>
+        <p:txBody>
+          <a:bodyPr/>
+          <a:lstStyle>
+            <a:lvl1pPr>
+              <a:defRPr sz="1000">
+                <a:solidFill>
+                  <a:schemeClr val="accent4"/>
+                </a:solidFill>
+              </a:defRPr>
+            </a:lvl1pPr>
+          </a:lstStyle>
+          <a:p>
+            <a:pPr algn="r"/>
+            <a:fld id="{F7021451-1387-4CA6-816F-3879F97B5CBC}" type="slidenum">
+              <a:rPr b="0" lang="en-US"/>
+              <a:t>45</a:t>
+            </a:fld>
+            <a:endParaRPr lang="en-US"/>
+          </a:p>
+        </p:txBody>
+      </p:sp>
+    </p:spTree>
+  </p:cSld>
+  <p:clrMapOvr>
+    <a:masterClrMapping/>
+  </p:clrMapOvr>
+</p:sld>
+</file>
+
+<file path=ppt/slides/slide46.xml><?xml version="1.0" encoding="utf-8"?>
+<p:sld xmlns:a="http://schemas.openxmlformats.org/drawingml/2006/main" xmlns:r="http://schemas.openxmlformats.org/officeDocument/2006/relationships" xmlns:p="http://schemas.openxmlformats.org/presentationml/2006/main">
+  <p:cSld name="Slide 46">
+    <p:spTree>
+      <p:nvGrpSpPr>
+        <p:cNvPr id="1" name=""/>
+        <p:cNvGrpSpPr/>
+        <p:nvPr/>
+      </p:nvGrpSpPr>
+      <p:grpSpPr>
+        <a:xfrm>
+          <a:off x="0" y="0"/>
+          <a:ext cx="0" cy="0"/>
+          <a:chOff x="0" y="0"/>
+          <a:chExt cx="0" cy="0"/>
+        </a:xfrm>
+      </p:grpSpPr>
+      <p:sp>
+        <p:nvSpPr>
+          <p:cNvPr id="2" name="Text 0"/>
+          <p:cNvSpPr/>
+          <p:nvPr>
+            <p:ph idx="100" type="title" hasCustomPrompt="1"/>
+          </p:nvPr>
+        </p:nvSpPr>
+        <p:spPr>
+          <a:xfrm>
+            <a:off x="548640" y="320040"/>
+            <a:ext cx="11064240" cy="731520"/>
+          </a:xfrm>
+          <a:prstGeom prst="rect">
+            <a:avLst/>
+          </a:prstGeom>
+          <a:noFill/>
+          <a:ln/>
+        </p:spPr>
+        <p:txBody>
+          <a:bodyPr wrap="square" lIns="0" tIns="0" rIns="0" bIns="0" rtlCol="0" anchor="ctr"/>
+          <a:lstStyle/>
+          <a:p>
+            <a:pPr algn="l" indent="0" marL="0">
+              <a:buNone/>
+            </a:pPr>
+            <a:r>
+              <a:rPr lang="en-US" sz="3200" b="1" dirty="0">
+                <a:solidFill>
+                  <a:schemeClr val="tx1"/>
+                </a:solidFill>
+                <a:latin typeface="Cambria" pitchFamily="34" charset="0"/>
+                <a:ea typeface="Cambria" pitchFamily="34" charset="-122"/>
+                <a:cs typeface="Cambria" pitchFamily="34" charset="-120"/>
+              </a:rPr>
+              <a:t>Mit fogtok látni? — a látogatás állomásai</a:t>
+            </a:r>
+            <a:endParaRPr lang="en-US" sz="3200" dirty="0"/>
+          </a:p>
+        </p:txBody>
+      </p:sp>
+      <p:sp>
+        <p:nvSpPr>
+          <p:cNvPr id="3" name="Shape 1"/>
+          <p:cNvSpPr/>
+          <p:nvPr/>
+        </p:nvSpPr>
+        <p:spPr>
+          <a:xfrm>
+            <a:off x="548640" y="1280160"/>
+            <a:ext cx="594360" cy="594360"/>
+          </a:xfrm>
+          <a:prstGeom prst="ellipse">
+            <a:avLst/>
+          </a:prstGeom>
+          <a:solidFill>
+            <a:schemeClr val="tx2"/>
+          </a:solidFill>
+          <a:ln w="12700">
+            <a:solidFill>
+              <a:schemeClr val="tx2"/>
+            </a:solidFill>
+            <a:prstDash val="solid"/>
+          </a:ln>
+        </p:spPr>
       </p:sp>
       <p:sp>
         <p:nvSpPr>
@@ -29275,8 +33449,8 @@
         </p:nvSpPr>
         <p:spPr>
           <a:xfrm>
-            <a:off x="731520" y="5760720"/>
-            <a:ext cx="10058400" cy="457200"/>
+            <a:off x="548640" y="1280160"/>
+            <a:ext cx="594360" cy="594360"/>
           </a:xfrm>
           <a:prstGeom prst="rect">
             <a:avLst/>
@@ -29288,18 +33462,3385 @@
           <a:bodyPr wrap="square" lIns="0" tIns="0" rIns="0" bIns="0" rtlCol="0" anchor="ctr"/>
           <a:lstStyle/>
           <a:p>
+            <a:pPr algn="ctr" indent="0" marL="0">
+              <a:buNone/>
+            </a:pPr>
+            <a:r>
+              <a:rPr lang="en-US" sz="2000" b="1" dirty="0">
+                <a:solidFill>
+                  <a:schemeClr val="bg1"/>
+                </a:solidFill>
+              </a:rPr>
+              <a:t>1</a:t>
+            </a:r>
+            <a:endParaRPr lang="en-US" sz="2000" dirty="0"/>
+          </a:p>
+        </p:txBody>
+      </p:sp>
+      <p:sp>
+        <p:nvSpPr>
+          <p:cNvPr id="5" name="Text 3"/>
+          <p:cNvSpPr txBox="1"/>
+          <p:nvPr/>
+        </p:nvSpPr>
+        <p:spPr>
+          <a:xfrm>
+            <a:off x="1325880" y="1234440"/>
+            <a:ext cx="4663440" cy="384048"/>
+          </a:xfrm>
+          <a:prstGeom prst="rect">
+            <a:avLst/>
+          </a:prstGeom>
+          <a:noFill/>
+          <a:ln/>
+        </p:spPr>
+        <p:txBody>
+          <a:bodyPr wrap="square" lIns="0" tIns="0" rIns="0" bIns="0" rtlCol="0" anchor="ctr"/>
+          <a:lstStyle/>
+          <a:p>
             <a:pPr indent="0" marL="0">
               <a:buNone/>
             </a:pPr>
             <a:r>
-              <a:rPr lang="en-US" sz="1600" i="1" dirty="0">
+              <a:rPr lang="en-US" sz="1600" b="1" dirty="0">
+                <a:solidFill>
+                  <a:schemeClr val="tx1"/>
+                </a:solidFill>
+              </a:rPr>
+              <a:t>A bejárat</a:t>
+            </a:r>
+            <a:endParaRPr lang="en-US" sz="1600" dirty="0"/>
+          </a:p>
+        </p:txBody>
+      </p:sp>
+      <p:sp>
+        <p:nvSpPr>
+          <p:cNvPr id="6" name="Text 4"/>
+          <p:cNvSpPr txBox="1"/>
+          <p:nvPr/>
+        </p:nvSpPr>
+        <p:spPr>
+          <a:xfrm>
+            <a:off x="1325880" y="1618488"/>
+            <a:ext cx="4663440" cy="1143000"/>
+          </a:xfrm>
+          <a:prstGeom prst="rect">
+            <a:avLst/>
+          </a:prstGeom>
+          <a:noFill/>
+          <a:ln/>
+        </p:spPr>
+        <p:txBody>
+          <a:bodyPr wrap="square" lIns="0" tIns="0" rIns="0" bIns="0" rtlCol="0" anchor="t"/>
+          <a:lstStyle/>
+          <a:p>
+            <a:pPr indent="0" marL="0">
+              <a:buNone/>
+            </a:pPr>
+            <a:r>
+              <a:rPr lang="en-US" sz="1300" dirty="0">
+                <a:solidFill>
+                  <a:schemeClr val="tx1"/>
+                </a:solidFill>
+              </a:rPr>
+              <a:t>Két kb. 11 méter magas betonfal közötti szűk, nyomasztó folyosó — Romano Boico építész szándékosan ide, az eredeti kapu helyére tervezte.</a:t>
+            </a:r>
+            <a:endParaRPr lang="en-US" sz="1300" dirty="0"/>
+          </a:p>
+        </p:txBody>
+      </p:sp>
+      <p:sp>
+        <p:nvSpPr>
+          <p:cNvPr id="7" name="Shape 5"/>
+          <p:cNvSpPr/>
+          <p:nvPr/>
+        </p:nvSpPr>
+        <p:spPr>
+          <a:xfrm>
+            <a:off x="6172200" y="1280160"/>
+            <a:ext cx="594360" cy="594360"/>
+          </a:xfrm>
+          <a:prstGeom prst="ellipse">
+            <a:avLst/>
+          </a:prstGeom>
+          <a:solidFill>
+            <a:schemeClr val="tx2"/>
+          </a:solidFill>
+          <a:ln w="12700">
+            <a:solidFill>
+              <a:schemeClr val="tx2"/>
+            </a:solidFill>
+            <a:prstDash val="solid"/>
+          </a:ln>
+        </p:spPr>
+      </p:sp>
+      <p:sp>
+        <p:nvSpPr>
+          <p:cNvPr id="8" name="Text 6"/>
+          <p:cNvSpPr txBox="1"/>
+          <p:nvPr/>
+        </p:nvSpPr>
+        <p:spPr>
+          <a:xfrm>
+            <a:off x="6172200" y="1280160"/>
+            <a:ext cx="594360" cy="594360"/>
+          </a:xfrm>
+          <a:prstGeom prst="rect">
+            <a:avLst/>
+          </a:prstGeom>
+          <a:noFill/>
+          <a:ln/>
+        </p:spPr>
+        <p:txBody>
+          <a:bodyPr wrap="square" lIns="0" tIns="0" rIns="0" bIns="0" rtlCol="0" anchor="ctr"/>
+          <a:lstStyle/>
+          <a:p>
+            <a:pPr algn="ctr" indent="0" marL="0">
+              <a:buNone/>
+            </a:pPr>
+            <a:r>
+              <a:rPr lang="en-US" sz="2000" b="1" dirty="0">
+                <a:solidFill>
+                  <a:schemeClr val="bg1"/>
+                </a:solidFill>
+              </a:rPr>
+              <a:t>2</a:t>
+            </a:r>
+            <a:endParaRPr lang="en-US" sz="2000" dirty="0"/>
+          </a:p>
+        </p:txBody>
+      </p:sp>
+      <p:sp>
+        <p:nvSpPr>
+          <p:cNvPr id="9" name="Text 7"/>
+          <p:cNvSpPr txBox="1"/>
+          <p:nvPr/>
+        </p:nvSpPr>
+        <p:spPr>
+          <a:xfrm>
+            <a:off x="6949440" y="1234440"/>
+            <a:ext cx="4663440" cy="384048"/>
+          </a:xfrm>
+          <a:prstGeom prst="rect">
+            <a:avLst/>
+          </a:prstGeom>
+          <a:noFill/>
+          <a:ln/>
+        </p:spPr>
+        <p:txBody>
+          <a:bodyPr wrap="square" lIns="0" tIns="0" rIns="0" bIns="0" rtlCol="0" anchor="ctr"/>
+          <a:lstStyle/>
+          <a:p>
+            <a:pPr indent="0" marL="0">
+              <a:buNone/>
+            </a:pPr>
+            <a:r>
+              <a:rPr lang="en-US" sz="1600" b="1" dirty="0">
+                <a:solidFill>
+                  <a:schemeClr val="tx1"/>
+                </a:solidFill>
+              </a:rPr>
+              <a:t>Az udvar</a:t>
+            </a:r>
+            <a:endParaRPr lang="en-US" sz="1600" dirty="0"/>
+          </a:p>
+        </p:txBody>
+      </p:sp>
+      <p:sp>
+        <p:nvSpPr>
+          <p:cNvPr id="10" name="Text 8"/>
+          <p:cNvSpPr txBox="1"/>
+          <p:nvPr/>
+        </p:nvSpPr>
+        <p:spPr>
+          <a:xfrm>
+            <a:off x="6949440" y="1618488"/>
+            <a:ext cx="4663440" cy="1143000"/>
+          </a:xfrm>
+          <a:prstGeom prst="rect">
+            <a:avLst/>
+          </a:prstGeom>
+          <a:noFill/>
+          <a:ln/>
+        </p:spPr>
+        <p:txBody>
+          <a:bodyPr wrap="square" lIns="0" tIns="0" rIns="0" bIns="0" rtlCol="0" anchor="t"/>
+          <a:lstStyle/>
+          <a:p>
+            <a:pPr indent="0" marL="0">
+              <a:buNone/>
+            </a:pPr>
+            <a:r>
+              <a:rPr lang="en-US" sz="1300" dirty="0">
+                <a:solidFill>
+                  <a:schemeClr val="tx1"/>
+                </a:solidFill>
+              </a:rPr>
+              <a:t>Boico szavaival „szabad ég alatti, felekezetek feletti bazilika”: itt tartják a megemlékezéseket (pl. jan. 27., ápr. 25.).</a:t>
+            </a:r>
+            <a:endParaRPr lang="en-US" sz="1300" dirty="0"/>
+          </a:p>
+        </p:txBody>
+      </p:sp>
+      <p:sp>
+        <p:nvSpPr>
+          <p:cNvPr id="11" name="Shape 9"/>
+          <p:cNvSpPr/>
+          <p:nvPr/>
+        </p:nvSpPr>
+        <p:spPr>
+          <a:xfrm>
+            <a:off x="548640" y="2880360"/>
+            <a:ext cx="594360" cy="594360"/>
+          </a:xfrm>
+          <a:prstGeom prst="ellipse">
+            <a:avLst/>
+          </a:prstGeom>
+          <a:solidFill>
+            <a:schemeClr val="accent1"/>
+          </a:solidFill>
+          <a:ln w="12700">
+            <a:solidFill>
+              <a:schemeClr val="tx2"/>
+            </a:solidFill>
+            <a:prstDash val="solid"/>
+          </a:ln>
+        </p:spPr>
+      </p:sp>
+      <p:sp>
+        <p:nvSpPr>
+          <p:cNvPr id="12" name="Text 10"/>
+          <p:cNvSpPr txBox="1"/>
+          <p:nvPr/>
+        </p:nvSpPr>
+        <p:spPr>
+          <a:xfrm>
+            <a:off x="548640" y="2880360"/>
+            <a:ext cx="594360" cy="594360"/>
+          </a:xfrm>
+          <a:prstGeom prst="rect">
+            <a:avLst/>
+          </a:prstGeom>
+          <a:noFill/>
+          <a:ln/>
+        </p:spPr>
+        <p:txBody>
+          <a:bodyPr wrap="square" lIns="0" tIns="0" rIns="0" bIns="0" rtlCol="0" anchor="ctr"/>
+          <a:lstStyle/>
+          <a:p>
+            <a:pPr algn="ctr" indent="0" marL="0">
+              <a:buNone/>
+            </a:pPr>
+            <a:r>
+              <a:rPr lang="en-US" sz="2000" b="1" dirty="0">
+                <a:solidFill>
+                  <a:schemeClr val="bg1"/>
+                </a:solidFill>
+              </a:rPr>
+              <a:t>3</a:t>
+            </a:r>
+            <a:endParaRPr lang="en-US" sz="2000" dirty="0"/>
+          </a:p>
+        </p:txBody>
+      </p:sp>
+      <p:sp>
+        <p:nvSpPr>
+          <p:cNvPr id="13" name="Text 11"/>
+          <p:cNvSpPr txBox="1"/>
+          <p:nvPr/>
+        </p:nvSpPr>
+        <p:spPr>
+          <a:xfrm>
+            <a:off x="1325880" y="2834640"/>
+            <a:ext cx="4663440" cy="384048"/>
+          </a:xfrm>
+          <a:prstGeom prst="rect">
+            <a:avLst/>
+          </a:prstGeom>
+          <a:noFill/>
+          <a:ln/>
+        </p:spPr>
+        <p:txBody>
+          <a:bodyPr wrap="square" lIns="0" tIns="0" rIns="0" bIns="0" rtlCol="0" anchor="ctr"/>
+          <a:lstStyle/>
+          <a:p>
+            <a:pPr indent="0" marL="0">
+              <a:buNone/>
+            </a:pPr>
+            <a:r>
+              <a:rPr lang="en-US" sz="1600" b="1" dirty="0">
+                <a:solidFill>
+                  <a:schemeClr val="tx1"/>
+                </a:solidFill>
+              </a:rPr>
+              <a:t>A krematórium nyoma</a:t>
+            </a:r>
+            <a:endParaRPr lang="en-US" sz="1600" dirty="0"/>
+          </a:p>
+        </p:txBody>
+      </p:sp>
+      <p:sp>
+        <p:nvSpPr>
+          <p:cNvPr id="14" name="Text 12"/>
+          <p:cNvSpPr txBox="1"/>
+          <p:nvPr/>
+        </p:nvSpPr>
+        <p:spPr>
+          <a:xfrm>
+            <a:off x="1325880" y="3218688"/>
+            <a:ext cx="4663440" cy="1143000"/>
+          </a:xfrm>
+          <a:prstGeom prst="rect">
+            <a:avLst/>
+          </a:prstGeom>
+          <a:noFill/>
+          <a:ln/>
+        </p:spPr>
+        <p:txBody>
+          <a:bodyPr wrap="square" lIns="0" tIns="0" rIns="0" bIns="0" rtlCol="0" anchor="t"/>
+          <a:lstStyle/>
+          <a:p>
+            <a:pPr indent="0" marL="0">
+              <a:buNone/>
+            </a:pPr>
+            <a:r>
+              <a:rPr lang="en-US" sz="1300" dirty="0">
+                <a:solidFill>
+                  <a:schemeClr val="tx1"/>
+                </a:solidFill>
+              </a:rPr>
+              <a:t>Fémlapokkal jelölt „lenyomat” a földön, és magas acél emlékmű, amely a felrobbantott kéményt idézi.</a:t>
+            </a:r>
+            <a:endParaRPr lang="en-US" sz="1300" dirty="0"/>
+          </a:p>
+        </p:txBody>
+      </p:sp>
+      <p:sp>
+        <p:nvSpPr>
+          <p:cNvPr id="15" name="Shape 13"/>
+          <p:cNvSpPr/>
+          <p:nvPr/>
+        </p:nvSpPr>
+        <p:spPr>
+          <a:xfrm>
+            <a:off x="6172200" y="2880360"/>
+            <a:ext cx="594360" cy="594360"/>
+          </a:xfrm>
+          <a:prstGeom prst="ellipse">
+            <a:avLst/>
+          </a:prstGeom>
+          <a:solidFill>
+            <a:schemeClr val="tx2"/>
+          </a:solidFill>
+          <a:ln w="12700">
+            <a:solidFill>
+              <a:schemeClr val="tx2"/>
+            </a:solidFill>
+            <a:prstDash val="solid"/>
+          </a:ln>
+        </p:spPr>
+      </p:sp>
+      <p:sp>
+        <p:nvSpPr>
+          <p:cNvPr id="16" name="Text 14"/>
+          <p:cNvSpPr txBox="1"/>
+          <p:nvPr/>
+        </p:nvSpPr>
+        <p:spPr>
+          <a:xfrm>
+            <a:off x="6172200" y="2880360"/>
+            <a:ext cx="594360" cy="594360"/>
+          </a:xfrm>
+          <a:prstGeom prst="rect">
+            <a:avLst/>
+          </a:prstGeom>
+          <a:noFill/>
+          <a:ln/>
+        </p:spPr>
+        <p:txBody>
+          <a:bodyPr wrap="square" lIns="0" tIns="0" rIns="0" bIns="0" rtlCol="0" anchor="ctr"/>
+          <a:lstStyle/>
+          <a:p>
+            <a:pPr algn="ctr" indent="0" marL="0">
+              <a:buNone/>
+            </a:pPr>
+            <a:r>
+              <a:rPr lang="en-US" sz="2000" b="1" dirty="0">
+                <a:solidFill>
+                  <a:schemeClr val="bg1"/>
+                </a:solidFill>
+              </a:rPr>
+              <a:t>4</a:t>
+            </a:r>
+            <a:endParaRPr lang="en-US" sz="2000" dirty="0"/>
+          </a:p>
+        </p:txBody>
+      </p:sp>
+      <p:sp>
+        <p:nvSpPr>
+          <p:cNvPr id="17" name="Text 15"/>
+          <p:cNvSpPr txBox="1"/>
+          <p:nvPr/>
+        </p:nvSpPr>
+        <p:spPr>
+          <a:xfrm>
+            <a:off x="6949440" y="2834640"/>
+            <a:ext cx="4663440" cy="384048"/>
+          </a:xfrm>
+          <a:prstGeom prst="rect">
+            <a:avLst/>
+          </a:prstGeom>
+          <a:noFill/>
+          <a:ln/>
+        </p:spPr>
+        <p:txBody>
+          <a:bodyPr wrap="square" lIns="0" tIns="0" rIns="0" bIns="0" rtlCol="0" anchor="ctr"/>
+          <a:lstStyle/>
+          <a:p>
+            <a:pPr indent="0" marL="0">
+              <a:buNone/>
+            </a:pPr>
+            <a:r>
+              <a:rPr lang="en-US" sz="1600" b="1" dirty="0">
+                <a:solidFill>
+                  <a:schemeClr val="tx1"/>
+                </a:solidFill>
+              </a:rPr>
+              <a:t>A halálcella</a:t>
+            </a:r>
+            <a:endParaRPr lang="en-US" sz="1600" dirty="0"/>
+          </a:p>
+        </p:txBody>
+      </p:sp>
+      <p:sp>
+        <p:nvSpPr>
+          <p:cNvPr id="18" name="Text 16"/>
+          <p:cNvSpPr txBox="1"/>
+          <p:nvPr/>
+        </p:nvSpPr>
+        <p:spPr>
+          <a:xfrm>
+            <a:off x="6949440" y="3218688"/>
+            <a:ext cx="4663440" cy="1143000"/>
+          </a:xfrm>
+          <a:prstGeom prst="rect">
+            <a:avLst/>
+          </a:prstGeom>
+          <a:noFill/>
+          <a:ln/>
+        </p:spPr>
+        <p:txBody>
+          <a:bodyPr wrap="square" lIns="0" tIns="0" rIns="0" bIns="0" rtlCol="0" anchor="t"/>
+          <a:lstStyle/>
+          <a:p>
+            <a:pPr indent="0" marL="0">
+              <a:buNone/>
+            </a:pPr>
+            <a:r>
+              <a:rPr lang="en-US" sz="1300" dirty="0">
+                <a:solidFill>
+                  <a:schemeClr val="tx1"/>
+                </a:solidFill>
+              </a:rPr>
+              <a:t>Ide zárták a kivégzésre váró foglyokat — eredeti állapotában maradt meg.</a:t>
+            </a:r>
+            <a:endParaRPr lang="en-US" sz="1300" dirty="0"/>
+          </a:p>
+        </p:txBody>
+      </p:sp>
+      <p:sp>
+        <p:nvSpPr>
+          <p:cNvPr id="19" name="Shape 17"/>
+          <p:cNvSpPr/>
+          <p:nvPr/>
+        </p:nvSpPr>
+        <p:spPr>
+          <a:xfrm>
+            <a:off x="548640" y="4480560"/>
+            <a:ext cx="594360" cy="594360"/>
+          </a:xfrm>
+          <a:prstGeom prst="ellipse">
+            <a:avLst/>
+          </a:prstGeom>
+          <a:solidFill>
+            <a:schemeClr val="tx2"/>
+          </a:solidFill>
+          <a:ln w="12700">
+            <a:solidFill>
+              <a:schemeClr val="tx2"/>
+            </a:solidFill>
+            <a:prstDash val="solid"/>
+          </a:ln>
+        </p:spPr>
+      </p:sp>
+      <p:sp>
+        <p:nvSpPr>
+          <p:cNvPr id="20" name="Text 18"/>
+          <p:cNvSpPr txBox="1"/>
+          <p:nvPr/>
+        </p:nvSpPr>
+        <p:spPr>
+          <a:xfrm>
+            <a:off x="548640" y="4480560"/>
+            <a:ext cx="594360" cy="594360"/>
+          </a:xfrm>
+          <a:prstGeom prst="rect">
+            <a:avLst/>
+          </a:prstGeom>
+          <a:noFill/>
+          <a:ln/>
+        </p:spPr>
+        <p:txBody>
+          <a:bodyPr wrap="square" lIns="0" tIns="0" rIns="0" bIns="0" rtlCol="0" anchor="ctr"/>
+          <a:lstStyle/>
+          <a:p>
+            <a:pPr algn="ctr" indent="0" marL="0">
+              <a:buNone/>
+            </a:pPr>
+            <a:r>
+              <a:rPr lang="en-US" sz="2000" b="1" dirty="0">
+                <a:solidFill>
+                  <a:schemeClr val="bg1"/>
+                </a:solidFill>
+              </a:rPr>
+              <a:t>5</a:t>
+            </a:r>
+            <a:endParaRPr lang="en-US" sz="2000" dirty="0"/>
+          </a:p>
+        </p:txBody>
+      </p:sp>
+      <p:sp>
+        <p:nvSpPr>
+          <p:cNvPr id="21" name="Text 19"/>
+          <p:cNvSpPr txBox="1"/>
+          <p:nvPr/>
+        </p:nvSpPr>
+        <p:spPr>
+          <a:xfrm>
+            <a:off x="1325880" y="4434840"/>
+            <a:ext cx="4663440" cy="384048"/>
+          </a:xfrm>
+          <a:prstGeom prst="rect">
+            <a:avLst/>
+          </a:prstGeom>
+          <a:noFill/>
+          <a:ln/>
+        </p:spPr>
+        <p:txBody>
+          <a:bodyPr wrap="square" lIns="0" tIns="0" rIns="0" bIns="0" rtlCol="0" anchor="ctr"/>
+          <a:lstStyle/>
+          <a:p>
+            <a:pPr indent="0" marL="0">
+              <a:buNone/>
+            </a:pPr>
+            <a:r>
+              <a:rPr lang="en-US" sz="1600" b="1" dirty="0">
+                <a:solidFill>
+                  <a:schemeClr val="tx1"/>
+                </a:solidFill>
+              </a:rPr>
+              <a:t>A 17 cella</a:t>
+            </a:r>
+            <a:endParaRPr lang="en-US" sz="1600" dirty="0"/>
+          </a:p>
+        </p:txBody>
+      </p:sp>
+      <p:sp>
+        <p:nvSpPr>
+          <p:cNvPr id="22" name="Text 20"/>
+          <p:cNvSpPr txBox="1"/>
+          <p:nvPr/>
+        </p:nvSpPr>
+        <p:spPr>
+          <a:xfrm>
+            <a:off x="1325880" y="4818888"/>
+            <a:ext cx="4663440" cy="1143000"/>
+          </a:xfrm>
+          <a:prstGeom prst="rect">
+            <a:avLst/>
+          </a:prstGeom>
+          <a:noFill/>
+          <a:ln/>
+        </p:spPr>
+        <p:txBody>
+          <a:bodyPr wrap="square" lIns="0" tIns="0" rIns="0" bIns="0" rtlCol="0" anchor="t"/>
+          <a:lstStyle/>
+          <a:p>
+            <a:pPr indent="0" marL="0">
+              <a:buNone/>
+            </a:pPr>
+            <a:r>
+              <a:rPr lang="en-US" sz="1300" dirty="0">
+                <a:solidFill>
+                  <a:schemeClr val="tx1"/>
+                </a:solidFill>
+              </a:rPr>
+              <a:t>Apró cellák, mégis akár hat embert zsúfoltak egybe. A falakon a foglyok feliratainak nyomai.</a:t>
+            </a:r>
+            <a:endParaRPr lang="en-US" sz="1300" dirty="0"/>
+          </a:p>
+        </p:txBody>
+      </p:sp>
+      <p:sp>
+        <p:nvSpPr>
+          <p:cNvPr id="23" name="Shape 21"/>
+          <p:cNvSpPr/>
+          <p:nvPr/>
+        </p:nvSpPr>
+        <p:spPr>
+          <a:xfrm>
+            <a:off x="6172200" y="4480560"/>
+            <a:ext cx="594360" cy="594360"/>
+          </a:xfrm>
+          <a:prstGeom prst="ellipse">
+            <a:avLst/>
+          </a:prstGeom>
+          <a:solidFill>
+            <a:schemeClr val="tx2"/>
+          </a:solidFill>
+          <a:ln w="12700">
+            <a:solidFill>
+              <a:schemeClr val="tx2"/>
+            </a:solidFill>
+            <a:prstDash val="solid"/>
+          </a:ln>
+        </p:spPr>
+      </p:sp>
+      <p:sp>
+        <p:nvSpPr>
+          <p:cNvPr id="24" name="Text 22"/>
+          <p:cNvSpPr txBox="1"/>
+          <p:nvPr/>
+        </p:nvSpPr>
+        <p:spPr>
+          <a:xfrm>
+            <a:off x="6172200" y="4480560"/>
+            <a:ext cx="594360" cy="594360"/>
+          </a:xfrm>
+          <a:prstGeom prst="rect">
+            <a:avLst/>
+          </a:prstGeom>
+          <a:noFill/>
+          <a:ln/>
+        </p:spPr>
+        <p:txBody>
+          <a:bodyPr wrap="square" lIns="0" tIns="0" rIns="0" bIns="0" rtlCol="0" anchor="ctr"/>
+          <a:lstStyle/>
+          <a:p>
+            <a:pPr algn="ctr" indent="0" marL="0">
+              <a:buNone/>
+            </a:pPr>
+            <a:r>
+              <a:rPr lang="en-US" sz="2000" b="1" dirty="0">
+                <a:solidFill>
+                  <a:schemeClr val="bg1"/>
+                </a:solidFill>
+              </a:rPr>
+              <a:t>6</a:t>
+            </a:r>
+            <a:endParaRPr lang="en-US" sz="2000" dirty="0"/>
+          </a:p>
+        </p:txBody>
+      </p:sp>
+      <p:sp>
+        <p:nvSpPr>
+          <p:cNvPr id="25" name="Text 23"/>
+          <p:cNvSpPr txBox="1"/>
+          <p:nvPr/>
+        </p:nvSpPr>
+        <p:spPr>
+          <a:xfrm>
+            <a:off x="6949440" y="4434840"/>
+            <a:ext cx="4663440" cy="384048"/>
+          </a:xfrm>
+          <a:prstGeom prst="rect">
+            <a:avLst/>
+          </a:prstGeom>
+          <a:noFill/>
+          <a:ln/>
+        </p:spPr>
+        <p:txBody>
+          <a:bodyPr wrap="square" lIns="0" tIns="0" rIns="0" bIns="0" rtlCol="0" anchor="ctr"/>
+          <a:lstStyle/>
+          <a:p>
+            <a:pPr indent="0" marL="0">
+              <a:buNone/>
+            </a:pPr>
+            <a:r>
+              <a:rPr lang="en-US" sz="1600" b="1" dirty="0">
+                <a:solidFill>
+                  <a:schemeClr val="tx1"/>
+                </a:solidFill>
+              </a:rPr>
+              <a:t>A Keresztek terme és a múzeum</a:t>
+            </a:r>
+            <a:endParaRPr lang="en-US" sz="1600" dirty="0"/>
+          </a:p>
+        </p:txBody>
+      </p:sp>
+      <p:sp>
+        <p:nvSpPr>
+          <p:cNvPr id="26" name="Text 24"/>
+          <p:cNvSpPr txBox="1"/>
+          <p:nvPr/>
+        </p:nvSpPr>
+        <p:spPr>
+          <a:xfrm>
+            <a:off x="6949440" y="4818888"/>
+            <a:ext cx="4663440" cy="1143000"/>
+          </a:xfrm>
+          <a:prstGeom prst="rect">
+            <a:avLst/>
+          </a:prstGeom>
+          <a:noFill/>
+          <a:ln/>
+        </p:spPr>
+        <p:txBody>
+          <a:bodyPr wrap="square" lIns="0" tIns="0" rIns="0" bIns="0" rtlCol="0" anchor="t"/>
+          <a:lstStyle/>
+          <a:p>
+            <a:pPr indent="0" marL="0">
+              <a:buNone/>
+            </a:pPr>
+            <a:r>
+              <a:rPr lang="en-US" sz="1300" dirty="0">
+                <a:solidFill>
+                  <a:schemeClr val="tx1"/>
+                </a:solidFill>
+              </a:rPr>
+              <a:t>A fa tartóoszlopokról elnevezett csarnok: trieszti zsidóktól elrabolt tárgyak. A földszinti kiállítás (2016): fotók, dokumentumok, túlélők tárgyai, videók.</a:t>
+            </a:r>
+            <a:endParaRPr lang="en-US" sz="1300" dirty="0"/>
+          </a:p>
+        </p:txBody>
+      </p:sp>
+      <p:sp>
+        <p:nvSpPr>
+          <p:cNvPr id="27" name="Forrás"/>
+          <p:cNvSpPr txBox="1"/>
+          <p:nvPr/>
+        </p:nvSpPr>
+        <p:spPr>
+          <a:xfrm>
+            <a:off x="548640" y="6053328"/>
+            <a:ext cx="11064240" cy="329184"/>
+          </a:xfrm>
+          <a:prstGeom prst="rect">
+            <a:avLst/>
+          </a:prstGeom>
+          <a:noFill/>
+          <a:ln/>
+        </p:spPr>
+        <p:txBody>
+          <a:bodyPr wrap="square" lIns="0" tIns="0" rIns="0" bIns="0" rtlCol="0" anchor="t"/>
+          <a:lstStyle/>
+          <a:p>
+            <a:pPr indent="0" marL="0">
+              <a:buNone/>
+            </a:pPr>
+            <a:r>
+              <a:rPr lang="en-US" sz="1000" i="1" dirty="0">
+                <a:solidFill>
+                  <a:schemeClr val="accent4"/>
+                </a:solidFill>
+              </a:rPr>
+              <a:t>Forrás: risierasansabba.it; turismofvg.it; Boico tervleírása. A felső emeletek nem látogathatók; a bejárás sorrendje helyben eltérhet.</a:t>
+            </a:r>
+            <a:endParaRPr lang="en-US" sz="1000" dirty="0"/>
+          </a:p>
+        </p:txBody>
+      </p:sp>
+      <p:sp>
+        <p:nvSpPr>
+          <p:cNvPr id="25" name="Slide Number Placeholder 0"/>
+          <p:cNvSpPr>
+            <a:spLocks noGrp="1"/>
+          </p:cNvSpPr>
+          <p:nvPr>
+            <p:ph type="sldNum" sz="quarter" idx="4294967295"/>
+          </p:nvPr>
+        </p:nvSpPr>
+        <p:spPr>
+          <a:xfrm>
+            <a:off x="11064240" y="6446520"/>
+            <a:ext cx="548640" cy="274320"/>
+          </a:xfrm>
+          <a:prstGeom prst="rect">
+            <a:avLst/>
+          </a:prstGeom>
+          <a:extLst>
+            <a:ext uri="{C572A759-6A51-4108-AA02-DFA0A04FC94B}">
+              <ma14:wrappingTextBoxFlag xmlns:ma14="http://schemas.microsoft.com/office/mac/drawingml/2011/main" val="0"/>
+            </a:ext>
+          </a:extLst>
+        </p:spPr>
+        <p:txBody>
+          <a:bodyPr/>
+          <a:lstStyle>
+            <a:lvl1pPr>
+              <a:defRPr sz="1000">
+                <a:solidFill>
+                  <a:schemeClr val="accent4"/>
+                </a:solidFill>
+              </a:defRPr>
+            </a:lvl1pPr>
+          </a:lstStyle>
+          <a:p>
+            <a:pPr algn="r"/>
+            <a:fld id="{F7021451-1387-4CA6-816F-3879F97B5CBC}" type="slidenum">
+              <a:rPr b="0" lang="en-US"/>
+              <a:t>46</a:t>
+            </a:fld>
+            <a:endParaRPr lang="en-US"/>
+          </a:p>
+        </p:txBody>
+      </p:sp>
+    </p:spTree>
+  </p:cSld>
+  <p:clrMapOvr>
+    <a:masterClrMapping/>
+  </p:clrMapOvr>
+</p:sld>
+</file>
+
+<file path=ppt/slides/slide47.xml><?xml version="1.0" encoding="utf-8"?>
+<p:sld xmlns:a="http://schemas.openxmlformats.org/drawingml/2006/main" xmlns:r="http://schemas.openxmlformats.org/officeDocument/2006/relationships" xmlns:p="http://schemas.openxmlformats.org/presentationml/2006/main">
+  <p:cSld name="Slide 47">
+    <p:spTree>
+      <p:nvGrpSpPr>
+        <p:cNvPr id="1" name=""/>
+        <p:cNvGrpSpPr/>
+        <p:nvPr/>
+      </p:nvGrpSpPr>
+      <p:grpSpPr>
+        <a:xfrm>
+          <a:off x="0" y="0"/>
+          <a:ext cx="0" cy="0"/>
+          <a:chOff x="0" y="0"/>
+          <a:chExt cx="0" cy="0"/>
+        </a:xfrm>
+      </p:grpSpPr>
+      <p:sp>
+        <p:nvSpPr>
+          <p:cNvPr id="2" name="Text 0"/>
+          <p:cNvSpPr/>
+          <p:nvPr>
+            <p:ph idx="100" type="title" hasCustomPrompt="1"/>
+          </p:nvPr>
+        </p:nvSpPr>
+        <p:spPr>
+          <a:xfrm>
+            <a:off x="548640" y="320040"/>
+            <a:ext cx="11064240" cy="731520"/>
+          </a:xfrm>
+          <a:prstGeom prst="rect">
+            <a:avLst/>
+          </a:prstGeom>
+          <a:noFill/>
+          <a:ln/>
+        </p:spPr>
+        <p:txBody>
+          <a:bodyPr wrap="square" lIns="0" tIns="0" rIns="0" bIns="0" rtlCol="0" anchor="ctr"/>
+          <a:lstStyle/>
+          <a:p>
+            <a:pPr algn="l" indent="0" marL="0">
+              <a:buNone/>
+            </a:pPr>
+            <a:r>
+              <a:rPr lang="en-US" sz="3200" b="1" dirty="0">
+                <a:solidFill>
+                  <a:schemeClr val="tx1"/>
+                </a:solidFill>
+                <a:latin typeface="Cambria" pitchFamily="34" charset="0"/>
+                <a:ea typeface="Cambria" pitchFamily="34" charset="-122"/>
+                <a:cs typeface="Cambria" pitchFamily="34" charset="-120"/>
+              </a:rPr>
+              <a:t>1976: a Risiera-per — késői igazságszolgáltatás</a:t>
+            </a:r>
+            <a:endParaRPr lang="en-US" sz="3200" dirty="0"/>
+          </a:p>
+        </p:txBody>
+      </p:sp>
+      <p:sp>
+        <p:nvSpPr>
+          <p:cNvPr id="3" name="Kártya"/>
+          <p:cNvSpPr/>
+          <p:nvPr/>
+        </p:nvSpPr>
+        <p:spPr>
+          <a:xfrm>
+            <a:off x="548640" y="1234440"/>
+            <a:ext cx="3520440" cy="1874520"/>
+          </a:xfrm>
+          <a:prstGeom prst="roundRect">
+            <a:avLst>
+              <a:gd name="adj" fmla="val 3902"/>
+            </a:avLst>
+          </a:prstGeom>
+          <a:solidFill>
+            <a:schemeClr val="bg2"/>
+          </a:solidFill>
+          <a:ln w="12700">
+            <a:solidFill>
+              <a:schemeClr val="bg2"/>
+            </a:solidFill>
+            <a:prstDash val="solid"/>
+          </a:ln>
+        </p:spPr>
+      </p:sp>
+      <p:sp>
+        <p:nvSpPr>
+          <p:cNvPr id="4" name="Szám"/>
+          <p:cNvSpPr txBox="1"/>
+          <p:nvPr/>
+        </p:nvSpPr>
+        <p:spPr>
+          <a:xfrm>
+            <a:off x="777240" y="1280160"/>
+            <a:ext cx="3108960" cy="868680"/>
+          </a:xfrm>
+          <a:prstGeom prst="rect">
+            <a:avLst/>
+          </a:prstGeom>
+          <a:noFill/>
+          <a:ln/>
+        </p:spPr>
+        <p:txBody>
+          <a:bodyPr wrap="square" lIns="0" tIns="0" rIns="0" bIns="0" rtlCol="0" anchor="b"/>
+          <a:lstStyle/>
+          <a:p>
+            <a:pPr indent="0" marL="0">
+              <a:buNone/>
+            </a:pPr>
+            <a:r>
+              <a:rPr lang="en-US" sz="4400" b="1" dirty="0">
+                <a:solidFill>
+                  <a:schemeClr val="accent1"/>
+                </a:solidFill>
+                <a:latin typeface="Cambria" pitchFamily="34" charset="0"/>
+                <a:ea typeface="Cambria" pitchFamily="34" charset="-122"/>
+                <a:cs typeface="Cambria" pitchFamily="34" charset="-120"/>
+              </a:rPr>
+              <a:t>1976</a:t>
+            </a:r>
+            <a:endParaRPr lang="en-US" sz="4400" dirty="0"/>
+          </a:p>
+        </p:txBody>
+      </p:sp>
+      <p:sp>
+        <p:nvSpPr>
+          <p:cNvPr id="5" name="Szám címke"/>
+          <p:cNvSpPr txBox="1"/>
+          <p:nvPr/>
+        </p:nvSpPr>
+        <p:spPr>
+          <a:xfrm>
+            <a:off x="777240" y="2194560"/>
+            <a:ext cx="3108960" cy="822960"/>
+          </a:xfrm>
+          <a:prstGeom prst="rect">
+            <a:avLst/>
+          </a:prstGeom>
+          <a:noFill/>
+          <a:ln/>
+        </p:spPr>
+        <p:txBody>
+          <a:bodyPr wrap="square" lIns="0" tIns="0" rIns="0" bIns="0" rtlCol="0" anchor="t"/>
+          <a:lstStyle/>
+          <a:p>
+            <a:pPr indent="0" marL="0">
+              <a:buNone/>
+            </a:pPr>
+            <a:r>
+              <a:rPr lang="en-US" sz="1400" dirty="0">
+                <a:solidFill>
+                  <a:schemeClr val="tx1"/>
+                </a:solidFill>
+              </a:rPr>
+              <a:t>febr. 16. – ápr. 29.: per a trieszti esküdtszéki bíróság előtt — 31 évvel a háború után</a:t>
+            </a:r>
+            <a:endParaRPr lang="en-US" sz="1400" dirty="0"/>
+          </a:p>
+        </p:txBody>
+      </p:sp>
+      <p:sp>
+        <p:nvSpPr>
+          <p:cNvPr id="6" name="Kártya"/>
+          <p:cNvSpPr/>
+          <p:nvPr/>
+        </p:nvSpPr>
+        <p:spPr>
+          <a:xfrm>
+            <a:off x="4343400" y="1234440"/>
+            <a:ext cx="3520440" cy="1874520"/>
+          </a:xfrm>
+          <a:prstGeom prst="roundRect">
+            <a:avLst>
+              <a:gd name="adj" fmla="val 3902"/>
+            </a:avLst>
+          </a:prstGeom>
+          <a:solidFill>
+            <a:schemeClr val="bg2"/>
+          </a:solidFill>
+          <a:ln w="12700">
+            <a:solidFill>
+              <a:schemeClr val="bg2"/>
+            </a:solidFill>
+            <a:prstDash val="solid"/>
+          </a:ln>
+        </p:spPr>
+      </p:sp>
+      <p:sp>
+        <p:nvSpPr>
+          <p:cNvPr id="7" name="Szám"/>
+          <p:cNvSpPr txBox="1"/>
+          <p:nvPr/>
+        </p:nvSpPr>
+        <p:spPr>
+          <a:xfrm>
+            <a:off x="4572000" y="1280160"/>
+            <a:ext cx="3108960" cy="868680"/>
+          </a:xfrm>
+          <a:prstGeom prst="rect">
+            <a:avLst/>
+          </a:prstGeom>
+          <a:noFill/>
+          <a:ln/>
+        </p:spPr>
+        <p:txBody>
+          <a:bodyPr wrap="square" lIns="0" tIns="0" rIns="0" bIns="0" rtlCol="0" anchor="b"/>
+          <a:lstStyle/>
+          <a:p>
+            <a:pPr indent="0" marL="0">
+              <a:buNone/>
+            </a:pPr>
+            <a:r>
+              <a:rPr lang="en-US" sz="4400" b="1" dirty="0">
+                <a:solidFill>
+                  <a:schemeClr val="accent1"/>
+                </a:solidFill>
+                <a:latin typeface="Cambria" pitchFamily="34" charset="0"/>
+                <a:ea typeface="Cambria" pitchFamily="34" charset="-122"/>
+                <a:cs typeface="Cambria" pitchFamily="34" charset="-120"/>
+              </a:rPr>
+              <a:t>2</a:t>
+            </a:r>
+            <a:endParaRPr lang="en-US" sz="4400" dirty="0"/>
+          </a:p>
+        </p:txBody>
+      </p:sp>
+      <p:sp>
+        <p:nvSpPr>
+          <p:cNvPr id="8" name="Szám címke"/>
+          <p:cNvSpPr txBox="1"/>
+          <p:nvPr/>
+        </p:nvSpPr>
+        <p:spPr>
+          <a:xfrm>
+            <a:off x="4572000" y="2194560"/>
+            <a:ext cx="3108960" cy="822960"/>
+          </a:xfrm>
+          <a:prstGeom prst="rect">
+            <a:avLst/>
+          </a:prstGeom>
+          <a:noFill/>
+          <a:ln/>
+        </p:spPr>
+        <p:txBody>
+          <a:bodyPr wrap="square" lIns="0" tIns="0" rIns="0" bIns="0" rtlCol="0" anchor="t"/>
+          <a:lstStyle/>
+          <a:p>
+            <a:pPr indent="0" marL="0">
+              <a:buNone/>
+            </a:pPr>
+            <a:r>
+              <a:rPr lang="en-US" sz="1400" dirty="0">
+                <a:solidFill>
+                  <a:schemeClr val="tx1"/>
+                </a:solidFill>
+              </a:rPr>
+              <a:t>vádlott: Josef Oberhauser és Dietrich Allers (Allers a per alatt meghalt)</a:t>
+            </a:r>
+            <a:endParaRPr lang="en-US" sz="1400" dirty="0"/>
+          </a:p>
+        </p:txBody>
+      </p:sp>
+      <p:sp>
+        <p:nvSpPr>
+          <p:cNvPr id="9" name="Kártya"/>
+          <p:cNvSpPr/>
+          <p:nvPr/>
+        </p:nvSpPr>
+        <p:spPr>
+          <a:xfrm>
+            <a:off x="8138160" y="1234440"/>
+            <a:ext cx="3520440" cy="1874520"/>
+          </a:xfrm>
+          <a:prstGeom prst="roundRect">
+            <a:avLst>
+              <a:gd name="adj" fmla="val 3902"/>
+            </a:avLst>
+          </a:prstGeom>
+          <a:solidFill>
+            <a:schemeClr val="bg2"/>
+          </a:solidFill>
+          <a:ln w="12700">
+            <a:solidFill>
+              <a:schemeClr val="bg2"/>
+            </a:solidFill>
+            <a:prstDash val="solid"/>
+          </a:ln>
+        </p:spPr>
+      </p:sp>
+      <p:sp>
+        <p:nvSpPr>
+          <p:cNvPr id="10" name="Szám"/>
+          <p:cNvSpPr txBox="1"/>
+          <p:nvPr/>
+        </p:nvSpPr>
+        <p:spPr>
+          <a:xfrm>
+            <a:off x="8366760" y="1280160"/>
+            <a:ext cx="3108960" cy="868680"/>
+          </a:xfrm>
+          <a:prstGeom prst="rect">
+            <a:avLst/>
+          </a:prstGeom>
+          <a:noFill/>
+          <a:ln/>
+        </p:spPr>
+        <p:txBody>
+          <a:bodyPr wrap="square" lIns="0" tIns="0" rIns="0" bIns="0" rtlCol="0" anchor="b"/>
+          <a:lstStyle/>
+          <a:p>
+            <a:pPr indent="0" marL="0">
+              <a:buNone/>
+            </a:pPr>
+            <a:r>
+              <a:rPr lang="en-US" sz="4400" b="1" dirty="0">
+                <a:solidFill>
+                  <a:schemeClr val="accent1"/>
+                </a:solidFill>
+                <a:latin typeface="Cambria" pitchFamily="34" charset="0"/>
+                <a:ea typeface="Cambria" pitchFamily="34" charset="-122"/>
+                <a:cs typeface="Cambria" pitchFamily="34" charset="-120"/>
+              </a:rPr>
+              <a:t>0</a:t>
+            </a:r>
+            <a:endParaRPr lang="en-US" sz="4400" dirty="0"/>
+          </a:p>
+        </p:txBody>
+      </p:sp>
+      <p:sp>
+        <p:nvSpPr>
+          <p:cNvPr id="11" name="Szám címke"/>
+          <p:cNvSpPr txBox="1"/>
+          <p:nvPr/>
+        </p:nvSpPr>
+        <p:spPr>
+          <a:xfrm>
+            <a:off x="8366760" y="2194560"/>
+            <a:ext cx="3108960" cy="822960"/>
+          </a:xfrm>
+          <a:prstGeom prst="rect">
+            <a:avLst/>
+          </a:prstGeom>
+          <a:noFill/>
+          <a:ln/>
+        </p:spPr>
+        <p:txBody>
+          <a:bodyPr wrap="square" lIns="0" tIns="0" rIns="0" bIns="0" rtlCol="0" anchor="t"/>
+          <a:lstStyle/>
+          <a:p>
+            <a:pPr indent="0" marL="0">
+              <a:buNone/>
+            </a:pPr>
+            <a:r>
+              <a:rPr lang="en-US" sz="1400" dirty="0">
+                <a:solidFill>
+                  <a:schemeClr val="tx1"/>
+                </a:solidFill>
+              </a:rPr>
+              <a:t>nap börtön: Oberhausert távollétében életfogytiglanra ítélték, de az NSZK nem adta ki</a:t>
+            </a:r>
+            <a:endParaRPr lang="en-US" sz="1400" dirty="0"/>
+          </a:p>
+        </p:txBody>
+      </p:sp>
+      <p:sp>
+        <p:nvSpPr>
+          <p:cNvPr id="12" name="Felsorolás"/>
+          <p:cNvSpPr txBox="1"/>
+          <p:nvPr/>
+        </p:nvSpPr>
+        <p:spPr>
+          <a:xfrm>
+            <a:off x="548640" y="3429000"/>
+            <a:ext cx="11064240" cy="2514600"/>
+          </a:xfrm>
+          <a:prstGeom prst="rect">
+            <a:avLst/>
+          </a:prstGeom>
+          <a:noFill/>
+          <a:ln/>
+        </p:spPr>
+        <p:txBody>
+          <a:bodyPr wrap="square" lIns="0" tIns="0" rIns="0" bIns="0" rtlCol="0" anchor="t"/>
+          <a:lstStyle/>
+          <a:p>
+            <a:pPr marL="342900" indent="-342900">
+              <a:spcAft>
+                <a:spcPts val="600"/>
+              </a:spcAft>
+              <a:buSzPct val="100000"/>
+              <a:buChar char="•"/>
+            </a:pPr>
+            <a:r>
+              <a:rPr lang="en-US" sz="1500" b="1" dirty="0">
+                <a:solidFill>
+                  <a:schemeClr val="tx1"/>
+                </a:solidFill>
+              </a:rPr>
+              <a:t>Miért ilyen későn? </a:t>
+            </a:r>
+            <a:pPr indent="0" marL="0">
+              <a:spcAft>
+                <a:spcPts val="600"/>
+              </a:spcAft>
+              <a:buNone/>
+            </a:pPr>
+            <a:r>
+              <a:rPr lang="en-US" sz="1500" dirty="0">
+                <a:solidFill>
+                  <a:schemeClr val="tx1"/>
+                </a:solidFill>
+              </a:rPr>
+              <a:t>A hidegháború, a jugoszláv–olasz határvita és a „jó olasz” narratíva miatt a Risiera évtizedekig peremtéma maradt.</a:t>
+            </a:r>
+            <a:endParaRPr lang="en-US" sz="1500" dirty="0"/>
+          </a:p>
+          <a:p>
+            <a:pPr marL="342900" indent="-342900">
+              <a:spcAft>
+                <a:spcPts val="600"/>
+              </a:spcAft>
+              <a:buSzPct val="100000"/>
+              <a:buChar char="•"/>
+            </a:pPr>
+            <a:r>
+              <a:rPr lang="en-US" sz="1500" b="1" dirty="0">
+                <a:solidFill>
+                  <a:schemeClr val="tx1"/>
+                </a:solidFill>
+              </a:rPr>
+              <a:t>A per jelentősége: </a:t>
+            </a:r>
+            <a:pPr indent="0" marL="0">
+              <a:spcAft>
+                <a:spcPts val="600"/>
+              </a:spcAft>
+              <a:buNone/>
+            </a:pPr>
+            <a:r>
+              <a:rPr lang="en-US" sz="1500" dirty="0">
+                <a:solidFill>
+                  <a:schemeClr val="tx1"/>
+                </a:solidFill>
+              </a:rPr>
+              <a:t>a túlélők — szlovének, horvátok, olaszok, zsidók — tanúvallomásai nyilvánossá tették a tábor történetét.</a:t>
+            </a:r>
+            <a:endParaRPr lang="en-US" sz="1500" dirty="0"/>
+          </a:p>
+          <a:p>
+            <a:pPr marL="342900" indent="-342900">
+              <a:spcAft>
+                <a:spcPts val="600"/>
+              </a:spcAft>
+              <a:buSzPct val="100000"/>
+              <a:buChar char="•"/>
+            </a:pPr>
+            <a:r>
+              <a:rPr lang="en-US" sz="1500" b="1" dirty="0">
+                <a:solidFill>
+                  <a:schemeClr val="tx1"/>
+                </a:solidFill>
+              </a:rPr>
+              <a:t>2026: </a:t>
+            </a:r>
+            <a:pPr indent="0" marL="0">
+              <a:spcAft>
+                <a:spcPts val="600"/>
+              </a:spcAft>
+              <a:buNone/>
+            </a:pPr>
+            <a:r>
+              <a:rPr lang="en-US" sz="1500" dirty="0">
+                <a:solidFill>
+                  <a:schemeClr val="tx1"/>
+                </a:solidFill>
+              </a:rPr>
+              <a:t>a per 50. évfordulóján emléktáblát avattak a trieszti bíróság épületében.</a:t>
+            </a:r>
+            <a:endParaRPr lang="en-US" sz="1500" dirty="0"/>
+          </a:p>
+        </p:txBody>
+      </p:sp>
+      <p:sp>
+        <p:nvSpPr>
+          <p:cNvPr id="13" name="Forrás"/>
+          <p:cNvSpPr txBox="1"/>
+          <p:nvPr/>
+        </p:nvSpPr>
+        <p:spPr>
+          <a:xfrm>
+            <a:off x="548640" y="6053328"/>
+            <a:ext cx="11064240" cy="329184"/>
+          </a:xfrm>
+          <a:prstGeom prst="rect">
+            <a:avLst/>
+          </a:prstGeom>
+          <a:noFill/>
+          <a:ln/>
+        </p:spPr>
+        <p:txBody>
+          <a:bodyPr wrap="square" lIns="0" tIns="0" rIns="0" bIns="0" rtlCol="0" anchor="t"/>
+          <a:lstStyle/>
+          <a:p>
+            <a:pPr indent="0" marL="0">
+              <a:buNone/>
+            </a:pPr>
+            <a:r>
+              <a:rPr lang="en-US" sz="1000" i="1" dirty="0">
+                <a:solidFill>
+                  <a:schemeClr val="accent4"/>
+                </a:solidFill>
+              </a:rPr>
+              <a:t>Forrás: risierasansabba.it (San Sabba Rice Mill – National Monument and Museum); ANED: „Il processo della Risiera” kiállítás; ildolomiti.it (2026).</a:t>
+            </a:r>
+            <a:endParaRPr lang="en-US" sz="1000" dirty="0"/>
+          </a:p>
+        </p:txBody>
+      </p:sp>
+      <p:sp>
+        <p:nvSpPr>
+          <p:cNvPr id="25" name="Slide Number Placeholder 0"/>
+          <p:cNvSpPr>
+            <a:spLocks noGrp="1"/>
+          </p:cNvSpPr>
+          <p:nvPr>
+            <p:ph type="sldNum" sz="quarter" idx="4294967295"/>
+          </p:nvPr>
+        </p:nvSpPr>
+        <p:spPr>
+          <a:xfrm>
+            <a:off x="11064240" y="6446520"/>
+            <a:ext cx="548640" cy="274320"/>
+          </a:xfrm>
+          <a:prstGeom prst="rect">
+            <a:avLst/>
+          </a:prstGeom>
+          <a:extLst>
+            <a:ext uri="{C572A759-6A51-4108-AA02-DFA0A04FC94B}">
+              <ma14:wrappingTextBoxFlag xmlns:ma14="http://schemas.microsoft.com/office/mac/drawingml/2011/main" val="0"/>
+            </a:ext>
+          </a:extLst>
+        </p:spPr>
+        <p:txBody>
+          <a:bodyPr/>
+          <a:lstStyle>
+            <a:lvl1pPr>
+              <a:defRPr sz="1000">
+                <a:solidFill>
+                  <a:schemeClr val="accent4"/>
+                </a:solidFill>
+              </a:defRPr>
+            </a:lvl1pPr>
+          </a:lstStyle>
+          <a:p>
+            <a:pPr algn="r"/>
+            <a:fld id="{F7021451-1387-4CA6-816F-3879F97B5CBC}" type="slidenum">
+              <a:rPr b="0" lang="en-US"/>
+              <a:t>47</a:t>
+            </a:fld>
+            <a:endParaRPr lang="en-US"/>
+          </a:p>
+        </p:txBody>
+      </p:sp>
+    </p:spTree>
+  </p:cSld>
+  <p:clrMapOvr>
+    <a:masterClrMapping/>
+  </p:clrMapOvr>
+</p:sld>
+</file>
+
+<file path=ppt/slides/slide48.xml><?xml version="1.0" encoding="utf-8"?>
+<p:sld xmlns:a="http://schemas.openxmlformats.org/drawingml/2006/main" xmlns:r="http://schemas.openxmlformats.org/officeDocument/2006/relationships" xmlns:p="http://schemas.openxmlformats.org/presentationml/2006/main">
+  <p:cSld name="Slide 48">
+    <p:spTree>
+      <p:nvGrpSpPr>
+        <p:cNvPr id="1" name=""/>
+        <p:cNvGrpSpPr/>
+        <p:nvPr/>
+      </p:nvGrpSpPr>
+      <p:grpSpPr>
+        <a:xfrm>
+          <a:off x="0" y="0"/>
+          <a:ext cx="0" cy="0"/>
+          <a:chOff x="0" y="0"/>
+          <a:chExt cx="0" cy="0"/>
+        </a:xfrm>
+      </p:grpSpPr>
+      <p:sp>
+        <p:nvSpPr>
+          <p:cNvPr id="2" name="Text 0"/>
+          <p:cNvSpPr/>
+          <p:nvPr>
+            <p:ph idx="100" type="title" hasCustomPrompt="1"/>
+          </p:nvPr>
+        </p:nvSpPr>
+        <p:spPr>
+          <a:xfrm>
+            <a:off x="548640" y="320040"/>
+            <a:ext cx="11064240" cy="731520"/>
+          </a:xfrm>
+          <a:prstGeom prst="rect">
+            <a:avLst/>
+          </a:prstGeom>
+          <a:noFill/>
+          <a:ln/>
+        </p:spPr>
+        <p:txBody>
+          <a:bodyPr wrap="square" lIns="0" tIns="0" rIns="0" bIns="0" rtlCol="0" anchor="ctr"/>
+          <a:lstStyle/>
+          <a:p>
+            <a:pPr algn="l" indent="0" marL="0">
+              <a:buNone/>
+            </a:pPr>
+            <a:r>
+              <a:rPr lang="en-US" sz="3200" b="1" dirty="0">
+                <a:solidFill>
+                  <a:schemeClr val="tx1"/>
+                </a:solidFill>
+                <a:latin typeface="Cambria" pitchFamily="34" charset="0"/>
+                <a:ea typeface="Cambria" pitchFamily="34" charset="-122"/>
+                <a:cs typeface="Cambria" pitchFamily="34" charset="-120"/>
+              </a:rPr>
+              <a:t>Trieszt: itt jelentették be a fajtörvényeket</a:t>
+            </a:r>
+            <a:endParaRPr lang="en-US" sz="3200" dirty="0"/>
+          </a:p>
+        </p:txBody>
+      </p:sp>
+      <p:sp>
+        <p:nvSpPr>
+          <p:cNvPr id="3" name="Kártya"/>
+          <p:cNvSpPr/>
+          <p:nvPr/>
+        </p:nvSpPr>
+        <p:spPr>
+          <a:xfrm>
+            <a:off x="548640" y="1234440"/>
+            <a:ext cx="5394960" cy="4663440"/>
+          </a:xfrm>
+          <a:prstGeom prst="roundRect">
+            <a:avLst>
+              <a:gd name="adj" fmla="val 1569"/>
+            </a:avLst>
+          </a:prstGeom>
+          <a:solidFill>
+            <a:schemeClr val="tx1"/>
+          </a:solidFill>
+          <a:ln w="12700">
+            <a:solidFill>
+              <a:schemeClr val="tx1"/>
+            </a:solidFill>
+            <a:prstDash val="solid"/>
+          </a:ln>
+        </p:spPr>
+      </p:sp>
+      <p:sp>
+        <p:nvSpPr>
+          <p:cNvPr id="4" name="Ikon kör"/>
+          <p:cNvSpPr/>
+          <p:nvPr/>
+        </p:nvSpPr>
+        <p:spPr>
+          <a:xfrm>
+            <a:off x="822960" y="1508760"/>
+            <a:ext cx="777240" cy="777240"/>
+          </a:xfrm>
+          <a:prstGeom prst="ellipse">
+            <a:avLst/>
+          </a:prstGeom>
+          <a:solidFill>
+            <a:schemeClr val="accent1"/>
+          </a:solidFill>
+          <a:ln w="12700">
+            <a:solidFill>
+              <a:schemeClr val="accent1"/>
+            </a:solidFill>
+            <a:prstDash val="solid"/>
+          </a:ln>
+        </p:spPr>
+      </p:sp>
+      <p:pic>
+        <p:nvPicPr>
+          <p:cNvPr id="5" name="Image 0" descr="FaLandmark">    </p:cNvPr>
+          <p:cNvPicPr>
+            <a:picLocks noChangeAspect="1"/>
+          </p:cNvPicPr>
+          <p:nvPr/>
+        </p:nvPicPr>
+        <p:blipFill>
+          <a:blip r:embed="rId1"/>
+          <a:stretch>
+            <a:fillRect/>
+          </a:stretch>
+        </p:blipFill>
+        <p:spPr>
+          <a:xfrm>
+            <a:off x="1017270" y="1703070"/>
+            <a:ext cx="388620" cy="388620"/>
+          </a:xfrm>
+          <a:prstGeom prst="rect">
+            <a:avLst/>
+          </a:prstGeom>
+        </p:spPr>
+      </p:pic>
+      <p:sp>
+        <p:nvSpPr>
+          <p:cNvPr id="6" name="Text 3"/>
+          <p:cNvSpPr txBox="1"/>
+          <p:nvPr/>
+        </p:nvSpPr>
+        <p:spPr>
+          <a:xfrm>
+            <a:off x="822960" y="2423160"/>
+            <a:ext cx="4846320" cy="502920"/>
+          </a:xfrm>
+          <a:prstGeom prst="rect">
+            <a:avLst/>
+          </a:prstGeom>
+          <a:noFill/>
+          <a:ln/>
+        </p:spPr>
+        <p:txBody>
+          <a:bodyPr wrap="square" lIns="0" tIns="0" rIns="0" bIns="0" rtlCol="0" anchor="ctr"/>
+          <a:lstStyle/>
+          <a:p>
+            <a:pPr indent="0" marL="0">
+              <a:buNone/>
+            </a:pPr>
+            <a:r>
+              <a:rPr lang="en-US" sz="2200" b="1" dirty="0">
                 <a:solidFill>
                   <a:schemeClr val="accent3"/>
                 </a:solidFill>
-              </a:rPr>
-              <a:t>Emlékezni azért, hogy megértsük — és megértsük, hogy felismerjük.</a:t>
-            </a:r>
-            <a:endParaRPr lang="en-US" sz="1600" dirty="0"/>
+                <a:latin typeface="Cambria" pitchFamily="34" charset="0"/>
+                <a:ea typeface="Cambria" pitchFamily="34" charset="-122"/>
+                <a:cs typeface="Cambria" pitchFamily="34" charset="-120"/>
+              </a:rPr>
+              <a:t>1938. szeptember 18.</a:t>
+            </a:r>
+            <a:endParaRPr lang="en-US" sz="2200" dirty="0"/>
+          </a:p>
+        </p:txBody>
+      </p:sp>
+      <p:sp>
+        <p:nvSpPr>
+          <p:cNvPr id="7" name="Text 4"/>
+          <p:cNvSpPr txBox="1"/>
+          <p:nvPr/>
+        </p:nvSpPr>
+        <p:spPr>
+          <a:xfrm>
+            <a:off x="822960" y="2971800"/>
+            <a:ext cx="4846320" cy="2834640"/>
+          </a:xfrm>
+          <a:prstGeom prst="rect">
+            <a:avLst/>
+          </a:prstGeom>
+          <a:noFill/>
+          <a:ln/>
+        </p:spPr>
+        <p:txBody>
+          <a:bodyPr wrap="square" lIns="0" tIns="0" rIns="0" bIns="0" rtlCol="0" anchor="t"/>
+          <a:lstStyle/>
+          <a:p>
+            <a:pPr indent="0" marL="0">
+              <a:buNone/>
+            </a:pPr>
+            <a:r>
+              <a:rPr lang="en-US" sz="1400" dirty="0">
+                <a:solidFill>
+                  <a:srgbClr val="E5E7EB"/>
+                </a:solidFill>
+              </a:rPr>
+              <a:t>Mussolini a trieszti Piazza Unità d’Italián, több tízezres tömeg előtt jelentette be a fajtörvényeket. Ironikus és tragikus helyszín: Trieszt zsidó közössége az ország egyik legnagyobb és legnagyobb hatású közössége volt (Italo Svevo, Umberto Saba, a Generali biztosító alapítói).</a:t>
+            </a:r>
+            <a:endParaRPr lang="en-US" sz="1400" dirty="0"/>
+          </a:p>
+        </p:txBody>
+      </p:sp>
+      <p:sp>
+        <p:nvSpPr>
+          <p:cNvPr id="8" name="Text 5"/>
+          <p:cNvSpPr txBox="1"/>
+          <p:nvPr/>
+        </p:nvSpPr>
+        <p:spPr>
+          <a:xfrm>
+            <a:off x="6263640" y="1234440"/>
+            <a:ext cx="5349240" cy="411480"/>
+          </a:xfrm>
+          <a:prstGeom prst="rect">
+            <a:avLst/>
+          </a:prstGeom>
+          <a:noFill/>
+          <a:ln/>
+        </p:spPr>
+        <p:txBody>
+          <a:bodyPr wrap="square" lIns="0" tIns="0" rIns="0" bIns="0" rtlCol="0" anchor="ctr"/>
+          <a:lstStyle/>
+          <a:p>
+            <a:pPr indent="0" marL="0">
+              <a:buNone/>
+            </a:pPr>
+            <a:r>
+              <a:rPr lang="en-US" sz="1800" b="1" dirty="0">
+                <a:solidFill>
+                  <a:schemeClr val="tx1"/>
+                </a:solidFill>
+              </a:rPr>
+              <a:t>Ha marad időtök — további helyszínek</a:t>
+            </a:r>
+            <a:endParaRPr lang="en-US" sz="1800" dirty="0"/>
+          </a:p>
+        </p:txBody>
+      </p:sp>
+      <p:sp>
+        <p:nvSpPr>
+          <p:cNvPr id="9" name="Ikon kör"/>
+          <p:cNvSpPr/>
+          <p:nvPr/>
+        </p:nvSpPr>
+        <p:spPr>
+          <a:xfrm>
+            <a:off x="6263640" y="1828800"/>
+            <a:ext cx="594360" cy="594360"/>
+          </a:xfrm>
+          <a:prstGeom prst="ellipse">
+            <a:avLst/>
+          </a:prstGeom>
+          <a:solidFill>
+            <a:schemeClr val="tx2"/>
+          </a:solidFill>
+          <a:ln w="12700">
+            <a:solidFill>
+              <a:schemeClr val="tx2"/>
+            </a:solidFill>
+            <a:prstDash val="solid"/>
+          </a:ln>
+        </p:spPr>
+      </p:sp>
+      <p:pic>
+        <p:nvPicPr>
+          <p:cNvPr id="10" name="Image 1" descr="FaChurch">    </p:cNvPr>
+          <p:cNvPicPr>
+            <a:picLocks noChangeAspect="1"/>
+          </p:cNvPicPr>
+          <p:nvPr/>
+        </p:nvPicPr>
+        <p:blipFill>
+          <a:blip r:embed="rId2"/>
+          <a:stretch>
+            <a:fillRect/>
+          </a:stretch>
+        </p:blipFill>
+        <p:spPr>
+          <a:xfrm>
+            <a:off x="6412230" y="1977390"/>
+            <a:ext cx="297180" cy="297180"/>
+          </a:xfrm>
+          <a:prstGeom prst="rect">
+            <a:avLst/>
+          </a:prstGeom>
+        </p:spPr>
+      </p:pic>
+      <p:sp>
+        <p:nvSpPr>
+          <p:cNvPr id="11" name="Text 7"/>
+          <p:cNvSpPr txBox="1"/>
+          <p:nvPr/>
+        </p:nvSpPr>
+        <p:spPr>
+          <a:xfrm>
+            <a:off x="7040880" y="1783080"/>
+            <a:ext cx="4572000" cy="384048"/>
+          </a:xfrm>
+          <a:prstGeom prst="rect">
+            <a:avLst/>
+          </a:prstGeom>
+          <a:noFill/>
+          <a:ln/>
+        </p:spPr>
+        <p:txBody>
+          <a:bodyPr wrap="square" lIns="0" tIns="0" rIns="0" bIns="0" rtlCol="0" anchor="ctr"/>
+          <a:lstStyle/>
+          <a:p>
+            <a:pPr indent="0" marL="0">
+              <a:buNone/>
+            </a:pPr>
+            <a:r>
+              <a:rPr lang="en-US" sz="1500" b="1" dirty="0">
+                <a:solidFill>
+                  <a:schemeClr val="tx1"/>
+                </a:solidFill>
+              </a:rPr>
+              <a:t>Zsinagóga (Via San Francesco 19)</a:t>
+            </a:r>
+            <a:endParaRPr lang="en-US" sz="1500" dirty="0"/>
+          </a:p>
+        </p:txBody>
+      </p:sp>
+      <p:sp>
+        <p:nvSpPr>
+          <p:cNvPr id="12" name="Text 8"/>
+          <p:cNvSpPr txBox="1"/>
+          <p:nvPr/>
+        </p:nvSpPr>
+        <p:spPr>
+          <a:xfrm>
+            <a:off x="7040880" y="2167128"/>
+            <a:ext cx="4572000" cy="868680"/>
+          </a:xfrm>
+          <a:prstGeom prst="rect">
+            <a:avLst/>
+          </a:prstGeom>
+          <a:noFill/>
+          <a:ln/>
+        </p:spPr>
+        <p:txBody>
+          <a:bodyPr wrap="square" lIns="0" tIns="0" rIns="0" bIns="0" rtlCol="0" anchor="t"/>
+          <a:lstStyle/>
+          <a:p>
+            <a:pPr indent="0" marL="0">
+              <a:buNone/>
+            </a:pPr>
+            <a:r>
+              <a:rPr lang="en-US" sz="1300" dirty="0">
+                <a:solidFill>
+                  <a:schemeClr val="tx1"/>
+                </a:solidFill>
+              </a:rPr>
+              <a:t>1912-ben épült, Európa egyik legnagyobb zsinagógája; csak vezetett túrával látogatható.</a:t>
+            </a:r>
+            <a:endParaRPr lang="en-US" sz="1300" dirty="0"/>
+          </a:p>
+        </p:txBody>
+      </p:sp>
+      <p:sp>
+        <p:nvSpPr>
+          <p:cNvPr id="13" name="Ikon kör"/>
+          <p:cNvSpPr/>
+          <p:nvPr/>
+        </p:nvSpPr>
+        <p:spPr>
+          <a:xfrm>
+            <a:off x="6263640" y="3200400"/>
+            <a:ext cx="594360" cy="594360"/>
+          </a:xfrm>
+          <a:prstGeom prst="ellipse">
+            <a:avLst/>
+          </a:prstGeom>
+          <a:solidFill>
+            <a:schemeClr val="tx2"/>
+          </a:solidFill>
+          <a:ln w="12700">
+            <a:solidFill>
+              <a:schemeClr val="tx2"/>
+            </a:solidFill>
+            <a:prstDash val="solid"/>
+          </a:ln>
+        </p:spPr>
+      </p:sp>
+      <p:pic>
+        <p:nvPicPr>
+          <p:cNvPr id="14" name="Image 2" descr="FaBook">    </p:cNvPr>
+          <p:cNvPicPr>
+            <a:picLocks noChangeAspect="1"/>
+          </p:cNvPicPr>
+          <p:nvPr/>
+        </p:nvPicPr>
+        <p:blipFill>
+          <a:blip r:embed="rId3"/>
+          <a:stretch>
+            <a:fillRect/>
+          </a:stretch>
+        </p:blipFill>
+        <p:spPr>
+          <a:xfrm>
+            <a:off x="6412230" y="3348990"/>
+            <a:ext cx="297180" cy="297180"/>
+          </a:xfrm>
+          <a:prstGeom prst="rect">
+            <a:avLst/>
+          </a:prstGeom>
+        </p:spPr>
+      </p:pic>
+      <p:sp>
+        <p:nvSpPr>
+          <p:cNvPr id="15" name="Text 10"/>
+          <p:cNvSpPr txBox="1"/>
+          <p:nvPr/>
+        </p:nvSpPr>
+        <p:spPr>
+          <a:xfrm>
+            <a:off x="7040880" y="3154680"/>
+            <a:ext cx="4572000" cy="384048"/>
+          </a:xfrm>
+          <a:prstGeom prst="rect">
+            <a:avLst/>
+          </a:prstGeom>
+          <a:noFill/>
+          <a:ln/>
+        </p:spPr>
+        <p:txBody>
+          <a:bodyPr wrap="square" lIns="0" tIns="0" rIns="0" bIns="0" rtlCol="0" anchor="ctr"/>
+          <a:lstStyle/>
+          <a:p>
+            <a:pPr indent="0" marL="0">
+              <a:buNone/>
+            </a:pPr>
+            <a:r>
+              <a:rPr lang="en-US" sz="1500" b="1" dirty="0">
+                <a:solidFill>
+                  <a:schemeClr val="tx1"/>
+                </a:solidFill>
+              </a:rPr>
+              <a:t>Carlo e Vera Wagner Zsidó Múzeum (Via del Monte 5)</a:t>
+            </a:r>
+            <a:endParaRPr lang="en-US" sz="1500" dirty="0"/>
+          </a:p>
+        </p:txBody>
+      </p:sp>
+      <p:sp>
+        <p:nvSpPr>
+          <p:cNvPr id="16" name="Text 11"/>
+          <p:cNvSpPr txBox="1"/>
+          <p:nvPr/>
+        </p:nvSpPr>
+        <p:spPr>
+          <a:xfrm>
+            <a:off x="7040880" y="3538728"/>
+            <a:ext cx="4572000" cy="868680"/>
+          </a:xfrm>
+          <a:prstGeom prst="rect">
+            <a:avLst/>
+          </a:prstGeom>
+          <a:noFill/>
+          <a:ln/>
+        </p:spPr>
+        <p:txBody>
+          <a:bodyPr wrap="square" lIns="0" tIns="0" rIns="0" bIns="0" rtlCol="0" anchor="t"/>
+          <a:lstStyle/>
+          <a:p>
+            <a:pPr indent="0" marL="0">
+              <a:buNone/>
+            </a:pPr>
+            <a:r>
+              <a:rPr lang="en-US" sz="1300" dirty="0">
+                <a:solidFill>
+                  <a:schemeClr val="tx1"/>
+                </a:solidFill>
+              </a:rPr>
+              <a:t>Emlékterem a trieszti deportáltaknak; nyitva hétköznap, jellemzően délelőtt (ellenőrizd!).</a:t>
+            </a:r>
+            <a:endParaRPr lang="en-US" sz="1300" dirty="0"/>
+          </a:p>
+        </p:txBody>
+      </p:sp>
+      <p:sp>
+        <p:nvSpPr>
+          <p:cNvPr id="17" name="Ikon kör"/>
+          <p:cNvSpPr/>
+          <p:nvPr/>
+        </p:nvSpPr>
+        <p:spPr>
+          <a:xfrm>
+            <a:off x="6263640" y="4572000"/>
+            <a:ext cx="594360" cy="594360"/>
+          </a:xfrm>
+          <a:prstGeom prst="ellipse">
+            <a:avLst/>
+          </a:prstGeom>
+          <a:solidFill>
+            <a:schemeClr val="tx2"/>
+          </a:solidFill>
+          <a:ln w="12700">
+            <a:solidFill>
+              <a:schemeClr val="tx2"/>
+            </a:solidFill>
+            <a:prstDash val="solid"/>
+          </a:ln>
+        </p:spPr>
+      </p:sp>
+      <p:pic>
+        <p:nvPicPr>
+          <p:cNvPr id="18" name="Image 3" descr="FaMapMarkedAlt">    </p:cNvPr>
+          <p:cNvPicPr>
+            <a:picLocks noChangeAspect="1"/>
+          </p:cNvPicPr>
+          <p:nvPr/>
+        </p:nvPicPr>
+        <p:blipFill>
+          <a:blip r:embed="rId4"/>
+          <a:stretch>
+            <a:fillRect/>
+          </a:stretch>
+        </p:blipFill>
+        <p:spPr>
+          <a:xfrm>
+            <a:off x="6412230" y="4720590"/>
+            <a:ext cx="297180" cy="297180"/>
+          </a:xfrm>
+          <a:prstGeom prst="rect">
+            <a:avLst/>
+          </a:prstGeom>
+        </p:spPr>
+      </p:pic>
+      <p:sp>
+        <p:nvSpPr>
+          <p:cNvPr id="19" name="Text 13"/>
+          <p:cNvSpPr txBox="1"/>
+          <p:nvPr/>
+        </p:nvSpPr>
+        <p:spPr>
+          <a:xfrm>
+            <a:off x="7040880" y="4526280"/>
+            <a:ext cx="4572000" cy="384048"/>
+          </a:xfrm>
+          <a:prstGeom prst="rect">
+            <a:avLst/>
+          </a:prstGeom>
+          <a:noFill/>
+          <a:ln/>
+        </p:spPr>
+        <p:txBody>
+          <a:bodyPr wrap="square" lIns="0" tIns="0" rIns="0" bIns="0" rtlCol="0" anchor="ctr"/>
+          <a:lstStyle/>
+          <a:p>
+            <a:pPr indent="0" marL="0">
+              <a:buNone/>
+            </a:pPr>
+            <a:r>
+              <a:rPr lang="en-US" sz="1500" b="1" dirty="0">
+                <a:solidFill>
+                  <a:schemeClr val="tx1"/>
+                </a:solidFill>
+              </a:rPr>
+              <a:t>Piazza Unità d’Italia</a:t>
+            </a:r>
+            <a:endParaRPr lang="en-US" sz="1500" dirty="0"/>
+          </a:p>
+        </p:txBody>
+      </p:sp>
+      <p:sp>
+        <p:nvSpPr>
+          <p:cNvPr id="20" name="Text 14"/>
+          <p:cNvSpPr txBox="1"/>
+          <p:nvPr/>
+        </p:nvSpPr>
+        <p:spPr>
+          <a:xfrm>
+            <a:off x="7040880" y="4910328"/>
+            <a:ext cx="4572000" cy="868680"/>
+          </a:xfrm>
+          <a:prstGeom prst="rect">
+            <a:avLst/>
+          </a:prstGeom>
+          <a:noFill/>
+          <a:ln/>
+        </p:spPr>
+        <p:txBody>
+          <a:bodyPr wrap="square" lIns="0" tIns="0" rIns="0" bIns="0" rtlCol="0" anchor="t"/>
+          <a:lstStyle/>
+          <a:p>
+            <a:pPr indent="0" marL="0">
+              <a:buNone/>
+            </a:pPr>
+            <a:r>
+              <a:rPr lang="en-US" sz="1300" dirty="0">
+                <a:solidFill>
+                  <a:schemeClr val="tx1"/>
+                </a:solidFill>
+              </a:rPr>
+              <a:t>A bejelentés helyszíne — jó végpontja egy közös sétának.</a:t>
+            </a:r>
+            <a:endParaRPr lang="en-US" sz="1300" dirty="0"/>
+          </a:p>
+        </p:txBody>
+      </p:sp>
+      <p:sp>
+        <p:nvSpPr>
+          <p:cNvPr id="21" name="Forrás"/>
+          <p:cNvSpPr txBox="1"/>
+          <p:nvPr/>
+        </p:nvSpPr>
+        <p:spPr>
+          <a:xfrm>
+            <a:off x="548640" y="6053328"/>
+            <a:ext cx="11064240" cy="329184"/>
+          </a:xfrm>
+          <a:prstGeom prst="rect">
+            <a:avLst/>
+          </a:prstGeom>
+          <a:noFill/>
+          <a:ln/>
+        </p:spPr>
+        <p:txBody>
+          <a:bodyPr wrap="square" lIns="0" tIns="0" rIns="0" bIns="0" rtlCol="0" anchor="t"/>
+          <a:lstStyle/>
+          <a:p>
+            <a:pPr indent="0" marL="0">
+              <a:buNone/>
+            </a:pPr>
+            <a:r>
+              <a:rPr lang="en-US" sz="1000" i="1" dirty="0">
+                <a:solidFill>
+                  <a:schemeClr val="accent4"/>
+                </a:solidFill>
+              </a:rPr>
+              <a:t>Forrás: Università di Trieste: „Basta, qui siamo finiti!” 1938: le leggi razziste a Trieste; triestebraica.it; turismofvg.it.</a:t>
+            </a:r>
+            <a:endParaRPr lang="en-US" sz="1000" dirty="0"/>
+          </a:p>
+        </p:txBody>
+      </p:sp>
+      <p:sp>
+        <p:nvSpPr>
+          <p:cNvPr id="25" name="Slide Number Placeholder 0"/>
+          <p:cNvSpPr>
+            <a:spLocks noGrp="1"/>
+          </p:cNvSpPr>
+          <p:nvPr>
+            <p:ph type="sldNum" sz="quarter" idx="4294967295"/>
+          </p:nvPr>
+        </p:nvSpPr>
+        <p:spPr>
+          <a:xfrm>
+            <a:off x="11064240" y="6446520"/>
+            <a:ext cx="548640" cy="274320"/>
+          </a:xfrm>
+          <a:prstGeom prst="rect">
+            <a:avLst/>
+          </a:prstGeom>
+          <a:extLst>
+            <a:ext uri="{C572A759-6A51-4108-AA02-DFA0A04FC94B}">
+              <ma14:wrappingTextBoxFlag xmlns:ma14="http://schemas.microsoft.com/office/mac/drawingml/2011/main" val="0"/>
+            </a:ext>
+          </a:extLst>
+        </p:spPr>
+        <p:txBody>
+          <a:bodyPr/>
+          <a:lstStyle>
+            <a:lvl1pPr>
+              <a:defRPr sz="1000">
+                <a:solidFill>
+                  <a:schemeClr val="accent4"/>
+                </a:solidFill>
+              </a:defRPr>
+            </a:lvl1pPr>
+          </a:lstStyle>
+          <a:p>
+            <a:pPr algn="r"/>
+            <a:fld id="{F7021451-1387-4CA6-816F-3879F97B5CBC}" type="slidenum">
+              <a:rPr b="0" lang="en-US"/>
+              <a:t>48</a:t>
+            </a:fld>
+            <a:endParaRPr lang="en-US"/>
+          </a:p>
+        </p:txBody>
+      </p:sp>
+    </p:spTree>
+  </p:cSld>
+  <p:clrMapOvr>
+    <a:masterClrMapping/>
+  </p:clrMapOvr>
+</p:sld>
+</file>
+
+<file path=ppt/slides/slide49.xml><?xml version="1.0" encoding="utf-8"?>
+<p:sld xmlns:a="http://schemas.openxmlformats.org/drawingml/2006/main" xmlns:r="http://schemas.openxmlformats.org/officeDocument/2006/relationships" xmlns:p="http://schemas.openxmlformats.org/presentationml/2006/main">
+  <p:cSld name="Slide 49">
+    <p:spTree>
+      <p:nvGrpSpPr>
+        <p:cNvPr id="1" name=""/>
+        <p:cNvGrpSpPr/>
+        <p:nvPr/>
+      </p:nvGrpSpPr>
+      <p:grpSpPr>
+        <a:xfrm>
+          <a:off x="0" y="0"/>
+          <a:ext cx="0" cy="0"/>
+          <a:chOff x="0" y="0"/>
+          <a:chExt cx="0" cy="0"/>
+        </a:xfrm>
+      </p:grpSpPr>
+      <p:sp>
+        <p:nvSpPr>
+          <p:cNvPr id="2" name="Text 0"/>
+          <p:cNvSpPr/>
+          <p:nvPr>
+            <p:ph idx="100" type="title" hasCustomPrompt="1"/>
+          </p:nvPr>
+        </p:nvSpPr>
+        <p:spPr>
+          <a:xfrm>
+            <a:off x="548640" y="320040"/>
+            <a:ext cx="11064240" cy="731520"/>
+          </a:xfrm>
+          <a:prstGeom prst="rect">
+            <a:avLst/>
+          </a:prstGeom>
+          <a:noFill/>
+          <a:ln/>
+        </p:spPr>
+        <p:txBody>
+          <a:bodyPr wrap="square" lIns="0" tIns="0" rIns="0" bIns="0" rtlCol="0" anchor="ctr"/>
+          <a:lstStyle/>
+          <a:p>
+            <a:pPr algn="l" indent="0" marL="0">
+              <a:buNone/>
+            </a:pPr>
+            <a:r>
+              <a:rPr lang="en-US" sz="3200" b="1" dirty="0">
+                <a:solidFill>
+                  <a:schemeClr val="tx1"/>
+                </a:solidFill>
+                <a:latin typeface="Cambria" pitchFamily="34" charset="0"/>
+                <a:ea typeface="Cambria" pitchFamily="34" charset="-122"/>
+                <a:cs typeface="Cambria" pitchFamily="34" charset="-120"/>
+              </a:rPr>
+              <a:t>Gyakorlati információk (2026. október)</a:t>
+            </a:r>
+            <a:endParaRPr lang="en-US" sz="3200" dirty="0"/>
+          </a:p>
+        </p:txBody>
+      </p:sp>
+      <p:graphicFrame>
+        <p:nvGraphicFramePr>
+          <p:cNvPr id="50" name="Table 0"/>
+          <p:cNvGraphicFramePr>
+            <a:graphicFrameLocks noGrp="1"/>
+          </p:cNvGraphicFramePr>
+          <p:nvPr>
+            <p:extLst>
+              <p:ext uri="{D42A27DB-BD31-4B8C-83A1-F6EECF244321}">
+                <p14:modId xmlns:p14="http://schemas.microsoft.com/office/powerpoint/2010/main" val="1579011935"/>
+              </p:ext>
+            </p:extLst>
+          </p:nvPr>
+        </p:nvGraphicFramePr>
+        <p:xfrm>
+          <a:off x="548640" y="1188720"/>
+          <a:ext cx="11064240" cy="914400"/>
+        </p:xfrm>
+        <a:graphic>
+          <a:graphicData uri="http://schemas.openxmlformats.org/drawingml/2006/table">
+            <a:tbl>
+              <a:tblPr/>
+              <a:tblGrid>
+                <a:gridCol w="2651760"/>
+                <a:gridCol w="8412480"/>
+              </a:tblGrid>
+              <a:tr h="475488">
+                <a:tc>
+                  <a:txBody>
+                    <a:bodyPr/>
+                    <a:lstStyle/>
+                    <a:p>
+                      <a:pPr indent="0" marL="0">
+                        <a:buNone/>
+                      </a:pPr>
+                      <a:r>
+                        <a:rPr lang="en-US" sz="1300" b="1" dirty="0">
+                          <a:solidFill>
+                            <a:srgbClr val="FFFFFF"/>
+                          </a:solidFill>
+                        </a:rPr>
+                        <a:t>Mit?</a:t>
+                      </a:r>
+                      <a:endParaRPr lang="en-US" sz="1300" dirty="0"/>
+                    </a:p>
+                  </a:txBody>
+                  <a:tcPr marL="91440" marR="91440" marT="27432" marB="27432" anchor="ctr">
+                    <a:lnL w="9525" cap="flat" cmpd="sng" algn="ctr">
+                      <a:solidFill>
+                        <a:srgbClr val="E5E7EB"/>
+                      </a:solidFill>
+                      <a:prstDash val="solid"/>
+                      <a:round/>
+                      <a:headEnd type="none" w="med" len="med"/>
+                      <a:tailEnd type="none" w="med" len="med"/>
+                    </a:lnL>
+                    <a:lnR w="9525" cap="flat" cmpd="sng" algn="ctr">
+                      <a:solidFill>
+                        <a:srgbClr val="E5E7EB"/>
+                      </a:solidFill>
+                      <a:prstDash val="solid"/>
+                      <a:round/>
+                      <a:headEnd type="none" w="med" len="med"/>
+                      <a:tailEnd type="none" w="med" len="med"/>
+                    </a:lnR>
+                    <a:lnT w="9525" cap="flat" cmpd="sng" algn="ctr">
+                      <a:solidFill>
+                        <a:srgbClr val="E5E7EB"/>
+                      </a:solidFill>
+                      <a:prstDash val="solid"/>
+                      <a:round/>
+                      <a:headEnd type="none" w="med" len="med"/>
+                      <a:tailEnd type="none" w="med" len="med"/>
+                    </a:lnT>
+                    <a:lnB w="9525" cap="flat" cmpd="sng" algn="ctr">
+                      <a:solidFill>
+                        <a:srgbClr val="E5E7EB"/>
+                      </a:solidFill>
+                      <a:prstDash val="solid"/>
+                      <a:round/>
+                      <a:headEnd type="none" w="med" len="med"/>
+                      <a:tailEnd type="none" w="med" len="med"/>
+                    </a:lnB>
+                    <a:solidFill>
+                      <a:srgbClr val="1C1C24"/>
+                    </a:solidFill>
+                  </a:tcPr>
+                </a:tc>
+                <a:tc>
+                  <a:txBody>
+                    <a:bodyPr/>
+                    <a:lstStyle/>
+                    <a:p>
+                      <a:pPr indent="0" marL="0">
+                        <a:buNone/>
+                      </a:pPr>
+                      <a:r>
+                        <a:rPr lang="en-US" sz="1300" b="1" dirty="0">
+                          <a:solidFill>
+                            <a:srgbClr val="FFFFFF"/>
+                          </a:solidFill>
+                        </a:rPr>
+                        <a:t>Részletek</a:t>
+                      </a:r>
+                      <a:endParaRPr lang="en-US" sz="1300" dirty="0"/>
+                    </a:p>
+                  </a:txBody>
+                  <a:tcPr marL="91440" marR="91440" marT="27432" marB="27432" anchor="ctr">
+                    <a:lnL w="9525" cap="flat" cmpd="sng" algn="ctr">
+                      <a:solidFill>
+                        <a:srgbClr val="E5E7EB"/>
+                      </a:solidFill>
+                      <a:prstDash val="solid"/>
+                      <a:round/>
+                      <a:headEnd type="none" w="med" len="med"/>
+                      <a:tailEnd type="none" w="med" len="med"/>
+                    </a:lnL>
+                    <a:lnR w="9525" cap="flat" cmpd="sng" algn="ctr">
+                      <a:solidFill>
+                        <a:srgbClr val="E5E7EB"/>
+                      </a:solidFill>
+                      <a:prstDash val="solid"/>
+                      <a:round/>
+                      <a:headEnd type="none" w="med" len="med"/>
+                      <a:tailEnd type="none" w="med" len="med"/>
+                    </a:lnR>
+                    <a:lnT w="9525" cap="flat" cmpd="sng" algn="ctr">
+                      <a:solidFill>
+                        <a:srgbClr val="E5E7EB"/>
+                      </a:solidFill>
+                      <a:prstDash val="solid"/>
+                      <a:round/>
+                      <a:headEnd type="none" w="med" len="med"/>
+                      <a:tailEnd type="none" w="med" len="med"/>
+                    </a:lnT>
+                    <a:lnB w="9525" cap="flat" cmpd="sng" algn="ctr">
+                      <a:solidFill>
+                        <a:srgbClr val="E5E7EB"/>
+                      </a:solidFill>
+                      <a:prstDash val="solid"/>
+                      <a:round/>
+                      <a:headEnd type="none" w="med" len="med"/>
+                      <a:tailEnd type="none" w="med" len="med"/>
+                    </a:lnB>
+                    <a:solidFill>
+                      <a:srgbClr val="1C1C24"/>
+                    </a:solidFill>
+                  </a:tcPr>
+                </a:tc>
+              </a:tr>
+              <a:tr h="475488">
+                <a:tc>
+                  <a:txBody>
+                    <a:bodyPr/>
+                    <a:lstStyle/>
+                    <a:p>
+                      <a:pPr indent="0" marL="0">
+                        <a:buNone/>
+                      </a:pPr>
+                      <a:r>
+                        <a:rPr lang="en-US" sz="1300" b="1" dirty="0">
+                          <a:solidFill>
+                            <a:srgbClr val="1C1C24"/>
+                          </a:solidFill>
+                        </a:rPr>
+                        <a:t>Hivatalos név, cím</a:t>
+                      </a:r>
+                      <a:endParaRPr lang="en-US" sz="1300" dirty="0"/>
+                    </a:p>
+                  </a:txBody>
+                  <a:tcPr marL="91440" marR="91440" marT="27432" marB="27432" anchor="ctr">
+                    <a:lnL w="9525" cap="flat" cmpd="sng" algn="ctr">
+                      <a:solidFill>
+                        <a:srgbClr val="E5E7EB"/>
+                      </a:solidFill>
+                      <a:prstDash val="solid"/>
+                      <a:round/>
+                      <a:headEnd type="none" w="med" len="med"/>
+                      <a:tailEnd type="none" w="med" len="med"/>
+                    </a:lnL>
+                    <a:lnR w="9525" cap="flat" cmpd="sng" algn="ctr">
+                      <a:solidFill>
+                        <a:srgbClr val="E5E7EB"/>
+                      </a:solidFill>
+                      <a:prstDash val="solid"/>
+                      <a:round/>
+                      <a:headEnd type="none" w="med" len="med"/>
+                      <a:tailEnd type="none" w="med" len="med"/>
+                    </a:lnR>
+                    <a:lnT w="9525" cap="flat" cmpd="sng" algn="ctr">
+                      <a:solidFill>
+                        <a:srgbClr val="E5E7EB"/>
+                      </a:solidFill>
+                      <a:prstDash val="solid"/>
+                      <a:round/>
+                      <a:headEnd type="none" w="med" len="med"/>
+                      <a:tailEnd type="none" w="med" len="med"/>
+                    </a:lnT>
+                    <a:lnB w="9525" cap="flat" cmpd="sng" algn="ctr">
+                      <a:solidFill>
+                        <a:srgbClr val="E5E7EB"/>
+                      </a:solidFill>
+                      <a:prstDash val="solid"/>
+                      <a:round/>
+                      <a:headEnd type="none" w="med" len="med"/>
+                      <a:tailEnd type="none" w="med" len="med"/>
+                    </a:lnB>
+                  </a:tcPr>
+                </a:tc>
+                <a:tc>
+                  <a:txBody>
+                    <a:bodyPr/>
+                    <a:lstStyle/>
+                    <a:p>
+                      <a:pPr indent="0" marL="0">
+                        <a:buNone/>
+                      </a:pPr>
+                      <a:r>
+                        <a:rPr lang="en-US" sz="1300" dirty="0">
+                          <a:solidFill>
+                            <a:srgbClr val="1C1C24"/>
+                          </a:solidFill>
+                        </a:rPr>
+                        <a:t>Civico Museo della Risiera di San Sabba – Monumento Nazionale, Via Giovanni Palatucci 5, Trieszt</a:t>
+                      </a:r>
+                      <a:endParaRPr lang="en-US" sz="1300" dirty="0"/>
+                    </a:p>
+                  </a:txBody>
+                  <a:tcPr marL="91440" marR="91440" marT="27432" marB="27432" anchor="ctr">
+                    <a:lnL w="9525" cap="flat" cmpd="sng" algn="ctr">
+                      <a:solidFill>
+                        <a:srgbClr val="E5E7EB"/>
+                      </a:solidFill>
+                      <a:prstDash val="solid"/>
+                      <a:round/>
+                      <a:headEnd type="none" w="med" len="med"/>
+                      <a:tailEnd type="none" w="med" len="med"/>
+                    </a:lnL>
+                    <a:lnR w="9525" cap="flat" cmpd="sng" algn="ctr">
+                      <a:solidFill>
+                        <a:srgbClr val="E5E7EB"/>
+                      </a:solidFill>
+                      <a:prstDash val="solid"/>
+                      <a:round/>
+                      <a:headEnd type="none" w="med" len="med"/>
+                      <a:tailEnd type="none" w="med" len="med"/>
+                    </a:lnR>
+                    <a:lnT w="9525" cap="flat" cmpd="sng" algn="ctr">
+                      <a:solidFill>
+                        <a:srgbClr val="E5E7EB"/>
+                      </a:solidFill>
+                      <a:prstDash val="solid"/>
+                      <a:round/>
+                      <a:headEnd type="none" w="med" len="med"/>
+                      <a:tailEnd type="none" w="med" len="med"/>
+                    </a:lnT>
+                    <a:lnB w="9525" cap="flat" cmpd="sng" algn="ctr">
+                      <a:solidFill>
+                        <a:srgbClr val="E5E7EB"/>
+                      </a:solidFill>
+                      <a:prstDash val="solid"/>
+                      <a:round/>
+                      <a:headEnd type="none" w="med" len="med"/>
+                      <a:tailEnd type="none" w="med" len="med"/>
+                    </a:lnB>
+                  </a:tcPr>
+                </a:tc>
+              </a:tr>
+              <a:tr h="475488">
+                <a:tc>
+                  <a:txBody>
+                    <a:bodyPr/>
+                    <a:lstStyle/>
+                    <a:p>
+                      <a:pPr indent="0" marL="0">
+                        <a:buNone/>
+                      </a:pPr>
+                      <a:r>
+                        <a:rPr lang="en-US" sz="1300" b="1" dirty="0">
+                          <a:solidFill>
+                            <a:srgbClr val="1C1C24"/>
+                          </a:solidFill>
+                        </a:rPr>
+                        <a:t>Nyitvatartás</a:t>
+                      </a:r>
+                      <a:endParaRPr lang="en-US" sz="1300" dirty="0"/>
+                    </a:p>
+                  </a:txBody>
+                  <a:tcPr marL="91440" marR="91440" marT="27432" marB="27432" anchor="ctr">
+                    <a:lnL w="9525" cap="flat" cmpd="sng" algn="ctr">
+                      <a:solidFill>
+                        <a:srgbClr val="E5E7EB"/>
+                      </a:solidFill>
+                      <a:prstDash val="solid"/>
+                      <a:round/>
+                      <a:headEnd type="none" w="med" len="med"/>
+                      <a:tailEnd type="none" w="med" len="med"/>
+                    </a:lnL>
+                    <a:lnR w="9525" cap="flat" cmpd="sng" algn="ctr">
+                      <a:solidFill>
+                        <a:srgbClr val="E5E7EB"/>
+                      </a:solidFill>
+                      <a:prstDash val="solid"/>
+                      <a:round/>
+                      <a:headEnd type="none" w="med" len="med"/>
+                      <a:tailEnd type="none" w="med" len="med"/>
+                    </a:lnR>
+                    <a:lnT w="9525" cap="flat" cmpd="sng" algn="ctr">
+                      <a:solidFill>
+                        <a:srgbClr val="E5E7EB"/>
+                      </a:solidFill>
+                      <a:prstDash val="solid"/>
+                      <a:round/>
+                      <a:headEnd type="none" w="med" len="med"/>
+                      <a:tailEnd type="none" w="med" len="med"/>
+                    </a:lnT>
+                    <a:lnB w="9525" cap="flat" cmpd="sng" algn="ctr">
+                      <a:solidFill>
+                        <a:srgbClr val="E5E7EB"/>
+                      </a:solidFill>
+                      <a:prstDash val="solid"/>
+                      <a:round/>
+                      <a:headEnd type="none" w="med" len="med"/>
+                      <a:tailEnd type="none" w="med" len="med"/>
+                    </a:lnB>
+                  </a:tcPr>
+                </a:tc>
+                <a:tc>
+                  <a:txBody>
+                    <a:bodyPr/>
+                    <a:lstStyle/>
+                    <a:p>
+                      <a:pPr indent="0" marL="0">
+                        <a:buNone/>
+                      </a:pPr>
+                      <a:r>
+                        <a:rPr lang="en-US" sz="1300" dirty="0">
+                          <a:solidFill>
+                            <a:srgbClr val="1C1C24"/>
+                          </a:solidFill>
+                        </a:rPr>
+                        <a:t>2026. okt. 12-től: naponta 9–17 (utolsó belépés 16:30). Márc. 1. – okt. 11.: 9–19</a:t>
+                      </a:r>
+                      <a:endParaRPr lang="en-US" sz="1300" dirty="0"/>
+                    </a:p>
+                  </a:txBody>
+                  <a:tcPr marL="91440" marR="91440" marT="27432" marB="27432" anchor="ctr">
+                    <a:lnL w="9525" cap="flat" cmpd="sng" algn="ctr">
+                      <a:solidFill>
+                        <a:srgbClr val="E5E7EB"/>
+                      </a:solidFill>
+                      <a:prstDash val="solid"/>
+                      <a:round/>
+                      <a:headEnd type="none" w="med" len="med"/>
+                      <a:tailEnd type="none" w="med" len="med"/>
+                    </a:lnL>
+                    <a:lnR w="9525" cap="flat" cmpd="sng" algn="ctr">
+                      <a:solidFill>
+                        <a:srgbClr val="E5E7EB"/>
+                      </a:solidFill>
+                      <a:prstDash val="solid"/>
+                      <a:round/>
+                      <a:headEnd type="none" w="med" len="med"/>
+                      <a:tailEnd type="none" w="med" len="med"/>
+                    </a:lnR>
+                    <a:lnT w="9525" cap="flat" cmpd="sng" algn="ctr">
+                      <a:solidFill>
+                        <a:srgbClr val="E5E7EB"/>
+                      </a:solidFill>
+                      <a:prstDash val="solid"/>
+                      <a:round/>
+                      <a:headEnd type="none" w="med" len="med"/>
+                      <a:tailEnd type="none" w="med" len="med"/>
+                    </a:lnT>
+                    <a:lnB w="9525" cap="flat" cmpd="sng" algn="ctr">
+                      <a:solidFill>
+                        <a:srgbClr val="E5E7EB"/>
+                      </a:solidFill>
+                      <a:prstDash val="solid"/>
+                      <a:round/>
+                      <a:headEnd type="none" w="med" len="med"/>
+                      <a:tailEnd type="none" w="med" len="med"/>
+                    </a:lnB>
+                  </a:tcPr>
+                </a:tc>
+              </a:tr>
+              <a:tr h="475488">
+                <a:tc>
+                  <a:txBody>
+                    <a:bodyPr/>
+                    <a:lstStyle/>
+                    <a:p>
+                      <a:pPr indent="0" marL="0">
+                        <a:buNone/>
+                      </a:pPr>
+                      <a:r>
+                        <a:rPr lang="en-US" sz="1300" b="1" dirty="0">
+                          <a:solidFill>
+                            <a:srgbClr val="1C1C24"/>
+                          </a:solidFill>
+                        </a:rPr>
+                        <a:t>Belépő</a:t>
+                      </a:r>
+                      <a:endParaRPr lang="en-US" sz="1300" dirty="0"/>
+                    </a:p>
+                  </a:txBody>
+                  <a:tcPr marL="91440" marR="91440" marT="27432" marB="27432" anchor="ctr">
+                    <a:lnL w="9525" cap="flat" cmpd="sng" algn="ctr">
+                      <a:solidFill>
+                        <a:srgbClr val="E5E7EB"/>
+                      </a:solidFill>
+                      <a:prstDash val="solid"/>
+                      <a:round/>
+                      <a:headEnd type="none" w="med" len="med"/>
+                      <a:tailEnd type="none" w="med" len="med"/>
+                    </a:lnL>
+                    <a:lnR w="9525" cap="flat" cmpd="sng" algn="ctr">
+                      <a:solidFill>
+                        <a:srgbClr val="E5E7EB"/>
+                      </a:solidFill>
+                      <a:prstDash val="solid"/>
+                      <a:round/>
+                      <a:headEnd type="none" w="med" len="med"/>
+                      <a:tailEnd type="none" w="med" len="med"/>
+                    </a:lnR>
+                    <a:lnT w="9525" cap="flat" cmpd="sng" algn="ctr">
+                      <a:solidFill>
+                        <a:srgbClr val="E5E7EB"/>
+                      </a:solidFill>
+                      <a:prstDash val="solid"/>
+                      <a:round/>
+                      <a:headEnd type="none" w="med" len="med"/>
+                      <a:tailEnd type="none" w="med" len="med"/>
+                    </a:lnT>
+                    <a:lnB w="9525" cap="flat" cmpd="sng" algn="ctr">
+                      <a:solidFill>
+                        <a:srgbClr val="E5E7EB"/>
+                      </a:solidFill>
+                      <a:prstDash val="solid"/>
+                      <a:round/>
+                      <a:headEnd type="none" w="med" len="med"/>
+                      <a:tailEnd type="none" w="med" len="med"/>
+                    </a:lnB>
+                  </a:tcPr>
+                </a:tc>
+                <a:tc>
+                  <a:txBody>
+                    <a:bodyPr/>
+                    <a:lstStyle/>
+                    <a:p>
+                      <a:pPr indent="0" marL="0">
+                        <a:buNone/>
+                      </a:pPr>
+                      <a:r>
+                        <a:rPr lang="en-US" sz="1300" dirty="0">
+                          <a:solidFill>
+                            <a:srgbClr val="1C1C24"/>
+                          </a:solidFill>
+                        </a:rPr>
+                        <a:t>Ingyenes</a:t>
+                      </a:r>
+                      <a:endParaRPr lang="en-US" sz="1300" dirty="0"/>
+                    </a:p>
+                  </a:txBody>
+                  <a:tcPr marL="91440" marR="91440" marT="27432" marB="27432" anchor="ctr">
+                    <a:lnL w="9525" cap="flat" cmpd="sng" algn="ctr">
+                      <a:solidFill>
+                        <a:srgbClr val="E5E7EB"/>
+                      </a:solidFill>
+                      <a:prstDash val="solid"/>
+                      <a:round/>
+                      <a:headEnd type="none" w="med" len="med"/>
+                      <a:tailEnd type="none" w="med" len="med"/>
+                    </a:lnL>
+                    <a:lnR w="9525" cap="flat" cmpd="sng" algn="ctr">
+                      <a:solidFill>
+                        <a:srgbClr val="E5E7EB"/>
+                      </a:solidFill>
+                      <a:prstDash val="solid"/>
+                      <a:round/>
+                      <a:headEnd type="none" w="med" len="med"/>
+                      <a:tailEnd type="none" w="med" len="med"/>
+                    </a:lnR>
+                    <a:lnT w="9525" cap="flat" cmpd="sng" algn="ctr">
+                      <a:solidFill>
+                        <a:srgbClr val="E5E7EB"/>
+                      </a:solidFill>
+                      <a:prstDash val="solid"/>
+                      <a:round/>
+                      <a:headEnd type="none" w="med" len="med"/>
+                      <a:tailEnd type="none" w="med" len="med"/>
+                    </a:lnT>
+                    <a:lnB w="9525" cap="flat" cmpd="sng" algn="ctr">
+                      <a:solidFill>
+                        <a:srgbClr val="E5E7EB"/>
+                      </a:solidFill>
+                      <a:prstDash val="solid"/>
+                      <a:round/>
+                      <a:headEnd type="none" w="med" len="med"/>
+                      <a:tailEnd type="none" w="med" len="med"/>
+                    </a:lnB>
+                  </a:tcPr>
+                </a:tc>
+              </a:tr>
+              <a:tr h="475488">
+                <a:tc>
+                  <a:txBody>
+                    <a:bodyPr/>
+                    <a:lstStyle/>
+                    <a:p>
+                      <a:pPr indent="0" marL="0">
+                        <a:buNone/>
+                      </a:pPr>
+                      <a:r>
+                        <a:rPr lang="en-US" sz="1300" b="1" dirty="0">
+                          <a:solidFill>
+                            <a:srgbClr val="1C1C24"/>
+                          </a:solidFill>
+                        </a:rPr>
+                        <a:t>Vezetett túra</a:t>
+                      </a:r>
+                      <a:endParaRPr lang="en-US" sz="1300" dirty="0"/>
+                    </a:p>
+                  </a:txBody>
+                  <a:tcPr marL="91440" marR="91440" marT="27432" marB="27432" anchor="ctr">
+                    <a:lnL w="9525" cap="flat" cmpd="sng" algn="ctr">
+                      <a:solidFill>
+                        <a:srgbClr val="E5E7EB"/>
+                      </a:solidFill>
+                      <a:prstDash val="solid"/>
+                      <a:round/>
+                      <a:headEnd type="none" w="med" len="med"/>
+                      <a:tailEnd type="none" w="med" len="med"/>
+                    </a:lnL>
+                    <a:lnR w="9525" cap="flat" cmpd="sng" algn="ctr">
+                      <a:solidFill>
+                        <a:srgbClr val="E5E7EB"/>
+                      </a:solidFill>
+                      <a:prstDash val="solid"/>
+                      <a:round/>
+                      <a:headEnd type="none" w="med" len="med"/>
+                      <a:tailEnd type="none" w="med" len="med"/>
+                    </a:lnR>
+                    <a:lnT w="9525" cap="flat" cmpd="sng" algn="ctr">
+                      <a:solidFill>
+                        <a:srgbClr val="E5E7EB"/>
+                      </a:solidFill>
+                      <a:prstDash val="solid"/>
+                      <a:round/>
+                      <a:headEnd type="none" w="med" len="med"/>
+                      <a:tailEnd type="none" w="med" len="med"/>
+                    </a:lnT>
+                    <a:lnB w="9525" cap="flat" cmpd="sng" algn="ctr">
+                      <a:solidFill>
+                        <a:srgbClr val="E5E7EB"/>
+                      </a:solidFill>
+                      <a:prstDash val="solid"/>
+                      <a:round/>
+                      <a:headEnd type="none" w="med" len="med"/>
+                      <a:tailEnd type="none" w="med" len="med"/>
+                    </a:lnB>
+                  </a:tcPr>
+                </a:tc>
+                <a:tc>
+                  <a:txBody>
+                    <a:bodyPr/>
+                    <a:lstStyle/>
+                    <a:p>
+                      <a:pPr indent="0" marL="0">
+                        <a:buNone/>
+                      </a:pPr>
+                      <a:r>
+                        <a:rPr lang="en-US" sz="1300" dirty="0">
+                          <a:solidFill>
+                            <a:srgbClr val="1C1C24"/>
+                          </a:solidFill>
+                        </a:rPr>
+                        <a:t>Olasz nyelven, kb. 60 perc, 7 € — szombat 15:30, vasárnap 11:00; jegy csak online: coopculture.it</a:t>
+                      </a:r>
+                      <a:endParaRPr lang="en-US" sz="1300" dirty="0"/>
+                    </a:p>
+                  </a:txBody>
+                  <a:tcPr marL="91440" marR="91440" marT="27432" marB="27432" anchor="ctr">
+                    <a:lnL w="9525" cap="flat" cmpd="sng" algn="ctr">
+                      <a:solidFill>
+                        <a:srgbClr val="E5E7EB"/>
+                      </a:solidFill>
+                      <a:prstDash val="solid"/>
+                      <a:round/>
+                      <a:headEnd type="none" w="med" len="med"/>
+                      <a:tailEnd type="none" w="med" len="med"/>
+                    </a:lnL>
+                    <a:lnR w="9525" cap="flat" cmpd="sng" algn="ctr">
+                      <a:solidFill>
+                        <a:srgbClr val="E5E7EB"/>
+                      </a:solidFill>
+                      <a:prstDash val="solid"/>
+                      <a:round/>
+                      <a:headEnd type="none" w="med" len="med"/>
+                      <a:tailEnd type="none" w="med" len="med"/>
+                    </a:lnR>
+                    <a:lnT w="9525" cap="flat" cmpd="sng" algn="ctr">
+                      <a:solidFill>
+                        <a:srgbClr val="E5E7EB"/>
+                      </a:solidFill>
+                      <a:prstDash val="solid"/>
+                      <a:round/>
+                      <a:headEnd type="none" w="med" len="med"/>
+                      <a:tailEnd type="none" w="med" len="med"/>
+                    </a:lnT>
+                    <a:lnB w="9525" cap="flat" cmpd="sng" algn="ctr">
+                      <a:solidFill>
+                        <a:srgbClr val="E5E7EB"/>
+                      </a:solidFill>
+                      <a:prstDash val="solid"/>
+                      <a:round/>
+                      <a:headEnd type="none" w="med" len="med"/>
+                      <a:tailEnd type="none" w="med" len="med"/>
+                    </a:lnB>
+                  </a:tcPr>
+                </a:tc>
+              </a:tr>
+              <a:tr h="475488">
+                <a:tc>
+                  <a:txBody>
+                    <a:bodyPr/>
+                    <a:lstStyle/>
+                    <a:p>
+                      <a:pPr indent="0" marL="0">
+                        <a:buNone/>
+                      </a:pPr>
+                      <a:r>
+                        <a:rPr lang="en-US" sz="1300" b="1" dirty="0">
+                          <a:solidFill>
+                            <a:srgbClr val="1C1C24"/>
+                          </a:solidFill>
+                        </a:rPr>
+                        <a:t>Csoportos látogatás</a:t>
+                      </a:r>
+                      <a:endParaRPr lang="en-US" sz="1300" dirty="0"/>
+                    </a:p>
+                  </a:txBody>
+                  <a:tcPr marL="91440" marR="91440" marT="27432" marB="27432" anchor="ctr">
+                    <a:lnL w="9525" cap="flat" cmpd="sng" algn="ctr">
+                      <a:solidFill>
+                        <a:srgbClr val="E5E7EB"/>
+                      </a:solidFill>
+                      <a:prstDash val="solid"/>
+                      <a:round/>
+                      <a:headEnd type="none" w="med" len="med"/>
+                      <a:tailEnd type="none" w="med" len="med"/>
+                    </a:lnL>
+                    <a:lnR w="9525" cap="flat" cmpd="sng" algn="ctr">
+                      <a:solidFill>
+                        <a:srgbClr val="E5E7EB"/>
+                      </a:solidFill>
+                      <a:prstDash val="solid"/>
+                      <a:round/>
+                      <a:headEnd type="none" w="med" len="med"/>
+                      <a:tailEnd type="none" w="med" len="med"/>
+                    </a:lnR>
+                    <a:lnT w="9525" cap="flat" cmpd="sng" algn="ctr">
+                      <a:solidFill>
+                        <a:srgbClr val="E5E7EB"/>
+                      </a:solidFill>
+                      <a:prstDash val="solid"/>
+                      <a:round/>
+                      <a:headEnd type="none" w="med" len="med"/>
+                      <a:tailEnd type="none" w="med" len="med"/>
+                    </a:lnT>
+                    <a:lnB w="9525" cap="flat" cmpd="sng" algn="ctr">
+                      <a:solidFill>
+                        <a:srgbClr val="E5E7EB"/>
+                      </a:solidFill>
+                      <a:prstDash val="solid"/>
+                      <a:round/>
+                      <a:headEnd type="none" w="med" len="med"/>
+                      <a:tailEnd type="none" w="med" len="med"/>
+                    </a:lnB>
+                  </a:tcPr>
+                </a:tc>
+                <a:tc>
+                  <a:txBody>
+                    <a:bodyPr/>
+                    <a:lstStyle/>
+                    <a:p>
+                      <a:pPr indent="0" marL="0">
+                        <a:buNone/>
+                      </a:pPr>
+                      <a:r>
+                        <a:rPr lang="en-US" sz="1300" dirty="0">
+                          <a:solidFill>
+                            <a:srgbClr val="1C1C24"/>
+                          </a:solidFill>
+                        </a:rPr>
+                        <a:t>Előzetes bejelentés: prenotazione.ingresso.risiera@comune.trieste.it</a:t>
+                      </a:r>
+                      <a:endParaRPr lang="en-US" sz="1300" dirty="0"/>
+                    </a:p>
+                  </a:txBody>
+                  <a:tcPr marL="91440" marR="91440" marT="27432" marB="27432" anchor="ctr">
+                    <a:lnL w="9525" cap="flat" cmpd="sng" algn="ctr">
+                      <a:solidFill>
+                        <a:srgbClr val="E5E7EB"/>
+                      </a:solidFill>
+                      <a:prstDash val="solid"/>
+                      <a:round/>
+                      <a:headEnd type="none" w="med" len="med"/>
+                      <a:tailEnd type="none" w="med" len="med"/>
+                    </a:lnL>
+                    <a:lnR w="9525" cap="flat" cmpd="sng" algn="ctr">
+                      <a:solidFill>
+                        <a:srgbClr val="E5E7EB"/>
+                      </a:solidFill>
+                      <a:prstDash val="solid"/>
+                      <a:round/>
+                      <a:headEnd type="none" w="med" len="med"/>
+                      <a:tailEnd type="none" w="med" len="med"/>
+                    </a:lnR>
+                    <a:lnT w="9525" cap="flat" cmpd="sng" algn="ctr">
+                      <a:solidFill>
+                        <a:srgbClr val="E5E7EB"/>
+                      </a:solidFill>
+                      <a:prstDash val="solid"/>
+                      <a:round/>
+                      <a:headEnd type="none" w="med" len="med"/>
+                      <a:tailEnd type="none" w="med" len="med"/>
+                    </a:lnT>
+                    <a:lnB w="9525" cap="flat" cmpd="sng" algn="ctr">
+                      <a:solidFill>
+                        <a:srgbClr val="E5E7EB"/>
+                      </a:solidFill>
+                      <a:prstDash val="solid"/>
+                      <a:round/>
+                      <a:headEnd type="none" w="med" len="med"/>
+                      <a:tailEnd type="none" w="med" len="med"/>
+                    </a:lnB>
+                  </a:tcPr>
+                </a:tc>
+              </a:tr>
+              <a:tr h="475488">
+                <a:tc>
+                  <a:txBody>
+                    <a:bodyPr/>
+                    <a:lstStyle/>
+                    <a:p>
+                      <a:pPr indent="0" marL="0">
+                        <a:buNone/>
+                      </a:pPr>
+                      <a:r>
+                        <a:rPr lang="en-US" sz="1300" b="1" dirty="0">
+                          <a:solidFill>
+                            <a:srgbClr val="1C1C24"/>
+                          </a:solidFill>
+                        </a:rPr>
+                        <a:t>Telefon</a:t>
+                      </a:r>
+                      <a:endParaRPr lang="en-US" sz="1300" dirty="0"/>
+                    </a:p>
+                  </a:txBody>
+                  <a:tcPr marL="91440" marR="91440" marT="27432" marB="27432" anchor="ctr">
+                    <a:lnL w="9525" cap="flat" cmpd="sng" algn="ctr">
+                      <a:solidFill>
+                        <a:srgbClr val="E5E7EB"/>
+                      </a:solidFill>
+                      <a:prstDash val="solid"/>
+                      <a:round/>
+                      <a:headEnd type="none" w="med" len="med"/>
+                      <a:tailEnd type="none" w="med" len="med"/>
+                    </a:lnL>
+                    <a:lnR w="9525" cap="flat" cmpd="sng" algn="ctr">
+                      <a:solidFill>
+                        <a:srgbClr val="E5E7EB"/>
+                      </a:solidFill>
+                      <a:prstDash val="solid"/>
+                      <a:round/>
+                      <a:headEnd type="none" w="med" len="med"/>
+                      <a:tailEnd type="none" w="med" len="med"/>
+                    </a:lnR>
+                    <a:lnT w="9525" cap="flat" cmpd="sng" algn="ctr">
+                      <a:solidFill>
+                        <a:srgbClr val="E5E7EB"/>
+                      </a:solidFill>
+                      <a:prstDash val="solid"/>
+                      <a:round/>
+                      <a:headEnd type="none" w="med" len="med"/>
+                      <a:tailEnd type="none" w="med" len="med"/>
+                    </a:lnT>
+                    <a:lnB w="9525" cap="flat" cmpd="sng" algn="ctr">
+                      <a:solidFill>
+                        <a:srgbClr val="E5E7EB"/>
+                      </a:solidFill>
+                      <a:prstDash val="solid"/>
+                      <a:round/>
+                      <a:headEnd type="none" w="med" len="med"/>
+                      <a:tailEnd type="none" w="med" len="med"/>
+                    </a:lnB>
+                  </a:tcPr>
+                </a:tc>
+                <a:tc>
+                  <a:txBody>
+                    <a:bodyPr/>
+                    <a:lstStyle/>
+                    <a:p>
+                      <a:pPr indent="0" marL="0">
+                        <a:buNone/>
+                      </a:pPr>
+                      <a:r>
+                        <a:rPr lang="en-US" sz="1300" dirty="0">
+                          <a:solidFill>
+                            <a:srgbClr val="1C1C24"/>
+                          </a:solidFill>
+                        </a:rPr>
+                        <a:t>+39 040 826202 (múzeum) · CoopCulture: 040 9892032</a:t>
+                      </a:r>
+                      <a:endParaRPr lang="en-US" sz="1300" dirty="0"/>
+                    </a:p>
+                  </a:txBody>
+                  <a:tcPr marL="91440" marR="91440" marT="27432" marB="27432" anchor="ctr">
+                    <a:lnL w="9525" cap="flat" cmpd="sng" algn="ctr">
+                      <a:solidFill>
+                        <a:srgbClr val="E5E7EB"/>
+                      </a:solidFill>
+                      <a:prstDash val="solid"/>
+                      <a:round/>
+                      <a:headEnd type="none" w="med" len="med"/>
+                      <a:tailEnd type="none" w="med" len="med"/>
+                    </a:lnL>
+                    <a:lnR w="9525" cap="flat" cmpd="sng" algn="ctr">
+                      <a:solidFill>
+                        <a:srgbClr val="E5E7EB"/>
+                      </a:solidFill>
+                      <a:prstDash val="solid"/>
+                      <a:round/>
+                      <a:headEnd type="none" w="med" len="med"/>
+                      <a:tailEnd type="none" w="med" len="med"/>
+                    </a:lnR>
+                    <a:lnT w="9525" cap="flat" cmpd="sng" algn="ctr">
+                      <a:solidFill>
+                        <a:srgbClr val="E5E7EB"/>
+                      </a:solidFill>
+                      <a:prstDash val="solid"/>
+                      <a:round/>
+                      <a:headEnd type="none" w="med" len="med"/>
+                      <a:tailEnd type="none" w="med" len="med"/>
+                    </a:lnT>
+                    <a:lnB w="9525" cap="flat" cmpd="sng" algn="ctr">
+                      <a:solidFill>
+                        <a:srgbClr val="E5E7EB"/>
+                      </a:solidFill>
+                      <a:prstDash val="solid"/>
+                      <a:round/>
+                      <a:headEnd type="none" w="med" len="med"/>
+                      <a:tailEnd type="none" w="med" len="med"/>
+                    </a:lnB>
+                  </a:tcPr>
+                </a:tc>
+              </a:tr>
+              <a:tr h="475488">
+                <a:tc>
+                  <a:txBody>
+                    <a:bodyPr/>
+                    <a:lstStyle/>
+                    <a:p>
+                      <a:pPr indent="0" marL="0">
+                        <a:buNone/>
+                      </a:pPr>
+                      <a:r>
+                        <a:rPr lang="en-US" sz="1300" b="1" dirty="0">
+                          <a:solidFill>
+                            <a:srgbClr val="1C1C24"/>
+                          </a:solidFill>
+                        </a:rPr>
+                        <a:t>Odajutás</a:t>
+                      </a:r>
+                      <a:endParaRPr lang="en-US" sz="1300" dirty="0"/>
+                    </a:p>
+                  </a:txBody>
+                  <a:tcPr marL="91440" marR="91440" marT="27432" marB="27432" anchor="ctr">
+                    <a:lnL w="9525" cap="flat" cmpd="sng" algn="ctr">
+                      <a:solidFill>
+                        <a:srgbClr val="E5E7EB"/>
+                      </a:solidFill>
+                      <a:prstDash val="solid"/>
+                      <a:round/>
+                      <a:headEnd type="none" w="med" len="med"/>
+                      <a:tailEnd type="none" w="med" len="med"/>
+                    </a:lnL>
+                    <a:lnR w="9525" cap="flat" cmpd="sng" algn="ctr">
+                      <a:solidFill>
+                        <a:srgbClr val="E5E7EB"/>
+                      </a:solidFill>
+                      <a:prstDash val="solid"/>
+                      <a:round/>
+                      <a:headEnd type="none" w="med" len="med"/>
+                      <a:tailEnd type="none" w="med" len="med"/>
+                    </a:lnR>
+                    <a:lnT w="9525" cap="flat" cmpd="sng" algn="ctr">
+                      <a:solidFill>
+                        <a:srgbClr val="E5E7EB"/>
+                      </a:solidFill>
+                      <a:prstDash val="solid"/>
+                      <a:round/>
+                      <a:headEnd type="none" w="med" len="med"/>
+                      <a:tailEnd type="none" w="med" len="med"/>
+                    </a:lnT>
+                    <a:lnB w="9525" cap="flat" cmpd="sng" algn="ctr">
+                      <a:solidFill>
+                        <a:srgbClr val="E5E7EB"/>
+                      </a:solidFill>
+                      <a:prstDash val="solid"/>
+                      <a:round/>
+                      <a:headEnd type="none" w="med" len="med"/>
+                      <a:tailEnd type="none" w="med" len="med"/>
+                    </a:lnB>
+                  </a:tcPr>
+                </a:tc>
+                <a:tc>
+                  <a:txBody>
+                    <a:bodyPr/>
+                    <a:lstStyle/>
+                    <a:p>
+                      <a:pPr indent="0" marL="0">
+                        <a:buNone/>
+                      </a:pPr>
+                      <a:r>
+                        <a:rPr lang="en-US" sz="1300" dirty="0">
+                          <a:solidFill>
+                            <a:srgbClr val="1C1C24"/>
+                          </a:solidFill>
+                        </a:rPr>
+                        <a:t>Busz 10: Valmaura megálló (~3 perc gyalog) · Busz 8: Via del Carpineto (~7 perc gyalog)</a:t>
+                      </a:r>
+                      <a:endParaRPr lang="en-US" sz="1300" dirty="0"/>
+                    </a:p>
+                  </a:txBody>
+                  <a:tcPr marL="91440" marR="91440" marT="27432" marB="27432" anchor="ctr">
+                    <a:lnL w="9525" cap="flat" cmpd="sng" algn="ctr">
+                      <a:solidFill>
+                        <a:srgbClr val="E5E7EB"/>
+                      </a:solidFill>
+                      <a:prstDash val="solid"/>
+                      <a:round/>
+                      <a:headEnd type="none" w="med" len="med"/>
+                      <a:tailEnd type="none" w="med" len="med"/>
+                    </a:lnL>
+                    <a:lnR w="9525" cap="flat" cmpd="sng" algn="ctr">
+                      <a:solidFill>
+                        <a:srgbClr val="E5E7EB"/>
+                      </a:solidFill>
+                      <a:prstDash val="solid"/>
+                      <a:round/>
+                      <a:headEnd type="none" w="med" len="med"/>
+                      <a:tailEnd type="none" w="med" len="med"/>
+                    </a:lnR>
+                    <a:lnT w="9525" cap="flat" cmpd="sng" algn="ctr">
+                      <a:solidFill>
+                        <a:srgbClr val="E5E7EB"/>
+                      </a:solidFill>
+                      <a:prstDash val="solid"/>
+                      <a:round/>
+                      <a:headEnd type="none" w="med" len="med"/>
+                      <a:tailEnd type="none" w="med" len="med"/>
+                    </a:lnT>
+                    <a:lnB w="9525" cap="flat" cmpd="sng" algn="ctr">
+                      <a:solidFill>
+                        <a:srgbClr val="E5E7EB"/>
+                      </a:solidFill>
+                      <a:prstDash val="solid"/>
+                      <a:round/>
+                      <a:headEnd type="none" w="med" len="med"/>
+                      <a:tailEnd type="none" w="med" len="med"/>
+                    </a:lnB>
+                  </a:tcPr>
+                </a:tc>
+              </a:tr>
+              <a:tr h="475488">
+                <a:tc>
+                  <a:txBody>
+                    <a:bodyPr/>
+                    <a:lstStyle/>
+                    <a:p>
+                      <a:pPr indent="0" marL="0">
+                        <a:buNone/>
+                      </a:pPr>
+                      <a:r>
+                        <a:rPr lang="en-US" sz="1300" b="1" dirty="0">
+                          <a:solidFill>
+                            <a:srgbClr val="1C1C24"/>
+                          </a:solidFill>
+                        </a:rPr>
+                        <a:t>Figyelem</a:t>
+                      </a:r>
+                      <a:endParaRPr lang="en-US" sz="1300" dirty="0"/>
+                    </a:p>
+                  </a:txBody>
+                  <a:tcPr marL="91440" marR="91440" marT="27432" marB="27432" anchor="ctr">
+                    <a:lnL w="9525" cap="flat" cmpd="sng" algn="ctr">
+                      <a:solidFill>
+                        <a:srgbClr val="E5E7EB"/>
+                      </a:solidFill>
+                      <a:prstDash val="solid"/>
+                      <a:round/>
+                      <a:headEnd type="none" w="med" len="med"/>
+                      <a:tailEnd type="none" w="med" len="med"/>
+                    </a:lnL>
+                    <a:lnR w="9525" cap="flat" cmpd="sng" algn="ctr">
+                      <a:solidFill>
+                        <a:srgbClr val="E5E7EB"/>
+                      </a:solidFill>
+                      <a:prstDash val="solid"/>
+                      <a:round/>
+                      <a:headEnd type="none" w="med" len="med"/>
+                      <a:tailEnd type="none" w="med" len="med"/>
+                    </a:lnR>
+                    <a:lnT w="9525" cap="flat" cmpd="sng" algn="ctr">
+                      <a:solidFill>
+                        <a:srgbClr val="E5E7EB"/>
+                      </a:solidFill>
+                      <a:prstDash val="solid"/>
+                      <a:round/>
+                      <a:headEnd type="none" w="med" len="med"/>
+                      <a:tailEnd type="none" w="med" len="med"/>
+                    </a:lnT>
+                    <a:lnB w="9525" cap="flat" cmpd="sng" algn="ctr">
+                      <a:solidFill>
+                        <a:srgbClr val="E5E7EB"/>
+                      </a:solidFill>
+                      <a:prstDash val="solid"/>
+                      <a:round/>
+                      <a:headEnd type="none" w="med" len="med"/>
+                      <a:tailEnd type="none" w="med" len="med"/>
+                    </a:lnB>
+                  </a:tcPr>
+                </a:tc>
+                <a:tc>
+                  <a:txBody>
+                    <a:bodyPr/>
+                    <a:lstStyle/>
+                    <a:p>
+                      <a:pPr indent="0" marL="0">
+                        <a:buNone/>
+                      </a:pPr>
+                      <a:r>
+                        <a:rPr lang="en-US" sz="1300" dirty="0">
+                          <a:solidFill>
+                            <a:srgbClr val="1C1C24"/>
+                          </a:solidFill>
+                        </a:rPr>
+                        <a:t>Felújítás miatt az ideiglenes bejárat a Piazzale De Simone felől lehet — indulás előtt nézzétek meg az oldalt</a:t>
+                      </a:r>
+                      <a:endParaRPr lang="en-US" sz="1300" dirty="0"/>
+                    </a:p>
+                  </a:txBody>
+                  <a:tcPr marL="91440" marR="91440" marT="27432" marB="27432" anchor="ctr">
+                    <a:lnL w="9525" cap="flat" cmpd="sng" algn="ctr">
+                      <a:solidFill>
+                        <a:srgbClr val="E5E7EB"/>
+                      </a:solidFill>
+                      <a:prstDash val="solid"/>
+                      <a:round/>
+                      <a:headEnd type="none" w="med" len="med"/>
+                      <a:tailEnd type="none" w="med" len="med"/>
+                    </a:lnL>
+                    <a:lnR w="9525" cap="flat" cmpd="sng" algn="ctr">
+                      <a:solidFill>
+                        <a:srgbClr val="E5E7EB"/>
+                      </a:solidFill>
+                      <a:prstDash val="solid"/>
+                      <a:round/>
+                      <a:headEnd type="none" w="med" len="med"/>
+                      <a:tailEnd type="none" w="med" len="med"/>
+                    </a:lnR>
+                    <a:lnT w="9525" cap="flat" cmpd="sng" algn="ctr">
+                      <a:solidFill>
+                        <a:srgbClr val="E5E7EB"/>
+                      </a:solidFill>
+                      <a:prstDash val="solid"/>
+                      <a:round/>
+                      <a:headEnd type="none" w="med" len="med"/>
+                      <a:tailEnd type="none" w="med" len="med"/>
+                    </a:lnT>
+                    <a:lnB w="9525" cap="flat" cmpd="sng" algn="ctr">
+                      <a:solidFill>
+                        <a:srgbClr val="E5E7EB"/>
+                      </a:solidFill>
+                      <a:prstDash val="solid"/>
+                      <a:round/>
+                      <a:headEnd type="none" w="med" len="med"/>
+                      <a:tailEnd type="none" w="med" len="med"/>
+                    </a:lnB>
+                  </a:tcPr>
+                </a:tc>
+              </a:tr>
+            </a:tbl>
+          </a:graphicData>
+        </a:graphic>
+      </p:graphicFrame>
+      <p:sp>
+        <p:nvSpPr>
+          <p:cNvPr id="4" name="Text 1"/>
+          <p:cNvSpPr txBox="1"/>
+          <p:nvPr/>
+        </p:nvSpPr>
+        <p:spPr>
+          <a:xfrm>
+            <a:off x="548640" y="5532120"/>
+            <a:ext cx="11064240" cy="457200"/>
+          </a:xfrm>
+          <a:prstGeom prst="rect">
+            <a:avLst/>
+          </a:prstGeom>
+          <a:noFill/>
+          <a:ln/>
+        </p:spPr>
+        <p:txBody>
+          <a:bodyPr wrap="square" lIns="0" tIns="0" rIns="0" bIns="0" rtlCol="0" anchor="ctr"/>
+          <a:lstStyle/>
+          <a:p>
+            <a:pPr indent="0" marL="0">
+              <a:buNone/>
+            </a:pPr>
+            <a:r>
+              <a:rPr lang="en-US" sz="1300" i="1" dirty="0">
+                <a:solidFill>
+                  <a:schemeClr val="accent1"/>
+                </a:solidFill>
+              </a:rPr>
+              <a:t>Illem: nemzeti emlékmű és temetőhöz hasonló hely — halk beszéd, tiszteletteljes viselkedés; fényképezés előtt nézzétek meg a kiírásokat.</a:t>
+            </a:r>
+            <a:endParaRPr lang="en-US" sz="1300" dirty="0"/>
+          </a:p>
+        </p:txBody>
+      </p:sp>
+      <p:sp>
+        <p:nvSpPr>
+          <p:cNvPr id="5" name="Forrás"/>
+          <p:cNvSpPr txBox="1"/>
+          <p:nvPr/>
+        </p:nvSpPr>
+        <p:spPr>
+          <a:xfrm>
+            <a:off x="548640" y="6053328"/>
+            <a:ext cx="11064240" cy="329184"/>
+          </a:xfrm>
+          <a:prstGeom prst="rect">
+            <a:avLst/>
+          </a:prstGeom>
+          <a:noFill/>
+          <a:ln/>
+        </p:spPr>
+        <p:txBody>
+          <a:bodyPr wrap="square" lIns="0" tIns="0" rIns="0" bIns="0" rtlCol="0" anchor="t"/>
+          <a:lstStyle/>
+          <a:p>
+            <a:pPr indent="0" marL="0">
+              <a:buNone/>
+            </a:pPr>
+            <a:r>
+              <a:rPr lang="en-US" sz="1000" i="1" dirty="0">
+                <a:solidFill>
+                  <a:schemeClr val="accent4"/>
+                </a:solidFill>
+              </a:rPr>
+              <a:t>Forrás: risierasansabba.it (nyitvatartás, csoportok); Prima Friuli, 2026. okt. 9. (túrák); CoopCulture (busz, jegyek). Az adatok változhatnak.</a:t>
+            </a:r>
+            <a:endParaRPr lang="en-US" sz="1000" dirty="0"/>
+          </a:p>
+        </p:txBody>
+      </p:sp>
+      <p:sp>
+        <p:nvSpPr>
+          <p:cNvPr id="25" name="Slide Number Placeholder 0"/>
+          <p:cNvSpPr>
+            <a:spLocks noGrp="1"/>
+          </p:cNvSpPr>
+          <p:nvPr>
+            <p:ph type="sldNum" sz="quarter" idx="4294967295"/>
+          </p:nvPr>
+        </p:nvSpPr>
+        <p:spPr>
+          <a:xfrm>
+            <a:off x="11064240" y="6446520"/>
+            <a:ext cx="548640" cy="274320"/>
+          </a:xfrm>
+          <a:prstGeom prst="rect">
+            <a:avLst/>
+          </a:prstGeom>
+          <a:extLst>
+            <a:ext uri="{C572A759-6A51-4108-AA02-DFA0A04FC94B}">
+              <ma14:wrappingTextBoxFlag xmlns:ma14="http://schemas.microsoft.com/office/mac/drawingml/2011/main" val="0"/>
+            </a:ext>
+          </a:extLst>
+        </p:spPr>
+        <p:txBody>
+          <a:bodyPr/>
+          <a:lstStyle>
+            <a:lvl1pPr>
+              <a:defRPr sz="1000">
+                <a:solidFill>
+                  <a:schemeClr val="accent4"/>
+                </a:solidFill>
+              </a:defRPr>
+            </a:lvl1pPr>
+          </a:lstStyle>
+          <a:p>
+            <a:pPr algn="r"/>
+            <a:fld id="{F7021451-1387-4CA6-816F-3879F97B5CBC}" type="slidenum">
+              <a:rPr b="0" lang="en-US"/>
+              <a:t>49</a:t>
+            </a:fld>
+            <a:endParaRPr lang="en-US"/>
           </a:p>
         </p:txBody>
       </p:sp>
@@ -30168,6 +37709,2070 @@
               <a:t>5</a:t>
             </a:fld>
             <a:endParaRPr lang="en-US"/>
+          </a:p>
+        </p:txBody>
+      </p:sp>
+    </p:spTree>
+  </p:cSld>
+  <p:clrMapOvr>
+    <a:masterClrMapping/>
+  </p:clrMapOvr>
+</p:sld>
+</file>
+
+<file path=ppt/slides/slide50.xml><?xml version="1.0" encoding="utf-8"?>
+<p:sld xmlns:a="http://schemas.openxmlformats.org/drawingml/2006/main" xmlns:r="http://schemas.openxmlformats.org/officeDocument/2006/relationships" xmlns:p="http://schemas.openxmlformats.org/presentationml/2006/main">
+  <p:cSld name="Slide 50">
+    <p:spTree>
+      <p:nvGrpSpPr>
+        <p:cNvPr id="1" name=""/>
+        <p:cNvGrpSpPr/>
+        <p:nvPr/>
+      </p:nvGrpSpPr>
+      <p:grpSpPr>
+        <a:xfrm>
+          <a:off x="0" y="0"/>
+          <a:ext cx="0" cy="0"/>
+          <a:chOff x="0" y="0"/>
+          <a:chExt cx="0" cy="0"/>
+        </a:xfrm>
+      </p:grpSpPr>
+      <p:sp>
+        <p:nvSpPr>
+          <p:cNvPr id="2" name="Text 0"/>
+          <p:cNvSpPr/>
+          <p:nvPr>
+            <p:ph idx="100" type="title" hasCustomPrompt="1"/>
+          </p:nvPr>
+        </p:nvSpPr>
+        <p:spPr>
+          <a:xfrm>
+            <a:off x="548640" y="320040"/>
+            <a:ext cx="11064240" cy="731520"/>
+          </a:xfrm>
+          <a:prstGeom prst="rect">
+            <a:avLst/>
+          </a:prstGeom>
+          <a:noFill/>
+          <a:ln/>
+        </p:spPr>
+        <p:txBody>
+          <a:bodyPr wrap="square" lIns="0" tIns="0" rIns="0" bIns="0" rtlCol="0" anchor="ctr"/>
+          <a:lstStyle/>
+          <a:p>
+            <a:pPr algn="l" indent="0" marL="0">
+              <a:buNone/>
+            </a:pPr>
+            <a:r>
+              <a:rPr lang="en-US" sz="3200" b="1" dirty="0">
+                <a:solidFill>
+                  <a:schemeClr val="tx1"/>
+                </a:solidFill>
+                <a:latin typeface="Cambria" pitchFamily="34" charset="0"/>
+                <a:ea typeface="Cambria" pitchFamily="34" charset="-122"/>
+                <a:cs typeface="Cambria" pitchFamily="34" charset="-120"/>
+              </a:rPr>
+              <a:t>Forgatókönyv a kapu előtti mini-előadáshoz</a:t>
+            </a:r>
+            <a:endParaRPr lang="en-US" sz="3200" dirty="0"/>
+          </a:p>
+        </p:txBody>
+      </p:sp>
+      <p:sp>
+        <p:nvSpPr>
+          <p:cNvPr id="3" name="Kártya"/>
+          <p:cNvSpPr/>
+          <p:nvPr/>
+        </p:nvSpPr>
+        <p:spPr>
+          <a:xfrm>
+            <a:off x="548640" y="1234440"/>
+            <a:ext cx="5440680" cy="1444752"/>
+          </a:xfrm>
+          <a:prstGeom prst="roundRect">
+            <a:avLst>
+              <a:gd name="adj" fmla="val 5063"/>
+            </a:avLst>
+          </a:prstGeom>
+          <a:solidFill>
+            <a:schemeClr val="bg2"/>
+          </a:solidFill>
+          <a:ln w="12700">
+            <a:solidFill>
+              <a:schemeClr val="bg2"/>
+            </a:solidFill>
+            <a:prstDash val="solid"/>
+          </a:ln>
+        </p:spPr>
+      </p:sp>
+      <p:sp>
+        <p:nvSpPr>
+          <p:cNvPr id="4" name="Shape 2"/>
+          <p:cNvSpPr/>
+          <p:nvPr/>
+        </p:nvSpPr>
+        <p:spPr>
+          <a:xfrm>
+            <a:off x="731520" y="1417320"/>
+            <a:ext cx="502920" cy="502920"/>
+          </a:xfrm>
+          <a:prstGeom prst="ellipse">
+            <a:avLst/>
+          </a:prstGeom>
+          <a:solidFill>
+            <a:schemeClr val="accent1"/>
+          </a:solidFill>
+          <a:ln w="12700">
+            <a:solidFill>
+              <a:schemeClr val="accent1"/>
+            </a:solidFill>
+            <a:prstDash val="solid"/>
+          </a:ln>
+        </p:spPr>
+      </p:sp>
+      <p:sp>
+        <p:nvSpPr>
+          <p:cNvPr id="5" name="Text 3"/>
+          <p:cNvSpPr txBox="1"/>
+          <p:nvPr/>
+        </p:nvSpPr>
+        <p:spPr>
+          <a:xfrm>
+            <a:off x="731520" y="1417320"/>
+            <a:ext cx="502920" cy="502920"/>
+          </a:xfrm>
+          <a:prstGeom prst="rect">
+            <a:avLst/>
+          </a:prstGeom>
+          <a:noFill/>
+          <a:ln/>
+        </p:spPr>
+        <p:txBody>
+          <a:bodyPr wrap="square" lIns="0" tIns="0" rIns="0" bIns="0" rtlCol="0" anchor="ctr"/>
+          <a:lstStyle/>
+          <a:p>
+            <a:pPr algn="ctr" indent="0" marL="0">
+              <a:buNone/>
+            </a:pPr>
+            <a:r>
+              <a:rPr lang="en-US" sz="1800" b="1" dirty="0">
+                <a:solidFill>
+                  <a:schemeClr val="bg1"/>
+                </a:solidFill>
+              </a:rPr>
+              <a:t>A</a:t>
+            </a:r>
+            <a:endParaRPr lang="en-US" sz="1800" dirty="0"/>
+          </a:p>
+        </p:txBody>
+      </p:sp>
+      <p:sp>
+        <p:nvSpPr>
+          <p:cNvPr id="6" name="Text 4"/>
+          <p:cNvSpPr txBox="1"/>
+          <p:nvPr/>
+        </p:nvSpPr>
+        <p:spPr>
+          <a:xfrm>
+            <a:off x="1417320" y="1417320"/>
+            <a:ext cx="4434840" cy="384048"/>
+          </a:xfrm>
+          <a:prstGeom prst="rect">
+            <a:avLst/>
+          </a:prstGeom>
+          <a:noFill/>
+          <a:ln/>
+        </p:spPr>
+        <p:txBody>
+          <a:bodyPr wrap="square" lIns="0" tIns="0" rIns="0" bIns="0" rtlCol="0" anchor="ctr"/>
+          <a:lstStyle/>
+          <a:p>
+            <a:pPr indent="0" marL="0">
+              <a:buNone/>
+            </a:pPr>
+            <a:r>
+              <a:rPr lang="en-US" sz="1600" b="1" dirty="0">
+                <a:solidFill>
+                  <a:schemeClr val="tx1"/>
+                </a:solidFill>
+              </a:rPr>
+              <a:t>1. Hol vagyunk?</a:t>
+            </a:r>
+            <a:endParaRPr lang="en-US" sz="1600" dirty="0"/>
+          </a:p>
+        </p:txBody>
+      </p:sp>
+      <p:sp>
+        <p:nvSpPr>
+          <p:cNvPr id="7" name="Text 5"/>
+          <p:cNvSpPr txBox="1"/>
+          <p:nvPr/>
+        </p:nvSpPr>
+        <p:spPr>
+          <a:xfrm>
+            <a:off x="1417320" y="1783080"/>
+            <a:ext cx="4434840" cy="868680"/>
+          </a:xfrm>
+          <a:prstGeom prst="rect">
+            <a:avLst/>
+          </a:prstGeom>
+          <a:noFill/>
+          <a:ln/>
+        </p:spPr>
+        <p:txBody>
+          <a:bodyPr wrap="square" lIns="0" tIns="0" rIns="0" bIns="0" rtlCol="0" anchor="t"/>
+          <a:lstStyle/>
+          <a:p>
+            <a:pPr indent="0" marL="0">
+              <a:buNone/>
+            </a:pPr>
+            <a:r>
+              <a:rPr lang="en-US" sz="1300" dirty="0">
+                <a:solidFill>
+                  <a:schemeClr val="tx1"/>
+                </a:solidFill>
+              </a:rPr>
+              <a:t>Egykori rizsmalom. 1943 szeptembere után a németek Triesztet közvetlenül igazgatták (OZAK) — itt nem a salòi bábállam, hanem az SS volt az úr.</a:t>
+            </a:r>
+            <a:endParaRPr lang="en-US" sz="1300" dirty="0"/>
+          </a:p>
+        </p:txBody>
+      </p:sp>
+      <p:sp>
+        <p:nvSpPr>
+          <p:cNvPr id="8" name="Kártya"/>
+          <p:cNvSpPr/>
+          <p:nvPr/>
+        </p:nvSpPr>
+        <p:spPr>
+          <a:xfrm>
+            <a:off x="6172200" y="1234440"/>
+            <a:ext cx="5440680" cy="1444752"/>
+          </a:xfrm>
+          <a:prstGeom prst="roundRect">
+            <a:avLst>
+              <a:gd name="adj" fmla="val 5063"/>
+            </a:avLst>
+          </a:prstGeom>
+          <a:solidFill>
+            <a:schemeClr val="bg2"/>
+          </a:solidFill>
+          <a:ln w="12700">
+            <a:solidFill>
+              <a:schemeClr val="bg2"/>
+            </a:solidFill>
+            <a:prstDash val="solid"/>
+          </a:ln>
+        </p:spPr>
+      </p:sp>
+      <p:sp>
+        <p:nvSpPr>
+          <p:cNvPr id="9" name="Shape 7"/>
+          <p:cNvSpPr/>
+          <p:nvPr/>
+        </p:nvSpPr>
+        <p:spPr>
+          <a:xfrm>
+            <a:off x="6355080" y="1417320"/>
+            <a:ext cx="502920" cy="502920"/>
+          </a:xfrm>
+          <a:prstGeom prst="ellipse">
+            <a:avLst/>
+          </a:prstGeom>
+          <a:solidFill>
+            <a:schemeClr val="accent3"/>
+          </a:solidFill>
+          <a:ln w="12700">
+            <a:solidFill>
+              <a:schemeClr val="accent1"/>
+            </a:solidFill>
+            <a:prstDash val="solid"/>
+          </a:ln>
+        </p:spPr>
+      </p:sp>
+      <p:sp>
+        <p:nvSpPr>
+          <p:cNvPr id="10" name="Text 8"/>
+          <p:cNvSpPr txBox="1"/>
+          <p:nvPr/>
+        </p:nvSpPr>
+        <p:spPr>
+          <a:xfrm>
+            <a:off x="6355080" y="1417320"/>
+            <a:ext cx="502920" cy="502920"/>
+          </a:xfrm>
+          <a:prstGeom prst="rect">
+            <a:avLst/>
+          </a:prstGeom>
+          <a:noFill/>
+          <a:ln/>
+        </p:spPr>
+        <p:txBody>
+          <a:bodyPr wrap="square" lIns="0" tIns="0" rIns="0" bIns="0" rtlCol="0" anchor="ctr"/>
+          <a:lstStyle/>
+          <a:p>
+            <a:pPr algn="ctr" indent="0" marL="0">
+              <a:buNone/>
+            </a:pPr>
+            <a:r>
+              <a:rPr lang="en-US" sz="1800" b="1" dirty="0">
+                <a:solidFill>
+                  <a:schemeClr val="bg1"/>
+                </a:solidFill>
+              </a:rPr>
+              <a:t>B</a:t>
+            </a:r>
+            <a:endParaRPr lang="en-US" sz="1800" dirty="0"/>
+          </a:p>
+        </p:txBody>
+      </p:sp>
+      <p:sp>
+        <p:nvSpPr>
+          <p:cNvPr id="11" name="Text 9"/>
+          <p:cNvSpPr txBox="1"/>
+          <p:nvPr/>
+        </p:nvSpPr>
+        <p:spPr>
+          <a:xfrm>
+            <a:off x="7040880" y="1417320"/>
+            <a:ext cx="4434840" cy="384048"/>
+          </a:xfrm>
+          <a:prstGeom prst="rect">
+            <a:avLst/>
+          </a:prstGeom>
+          <a:noFill/>
+          <a:ln/>
+        </p:spPr>
+        <p:txBody>
+          <a:bodyPr wrap="square" lIns="0" tIns="0" rIns="0" bIns="0" rtlCol="0" anchor="ctr"/>
+          <a:lstStyle/>
+          <a:p>
+            <a:pPr indent="0" marL="0">
+              <a:buNone/>
+            </a:pPr>
+            <a:r>
+              <a:rPr lang="en-US" sz="1600" b="1" dirty="0">
+                <a:solidFill>
+                  <a:schemeClr val="tx1"/>
+                </a:solidFill>
+              </a:rPr>
+              <a:t>2. Kik jöttek ide?</a:t>
+            </a:r>
+            <a:endParaRPr lang="en-US" sz="1600" dirty="0"/>
+          </a:p>
+        </p:txBody>
+      </p:sp>
+      <p:sp>
+        <p:nvSpPr>
+          <p:cNvPr id="12" name="Text 10"/>
+          <p:cNvSpPr txBox="1"/>
+          <p:nvPr/>
+        </p:nvSpPr>
+        <p:spPr>
+          <a:xfrm>
+            <a:off x="7040880" y="1783080"/>
+            <a:ext cx="4434840" cy="868680"/>
+          </a:xfrm>
+          <a:prstGeom prst="rect">
+            <a:avLst/>
+          </a:prstGeom>
+          <a:noFill/>
+          <a:ln/>
+        </p:spPr>
+        <p:txBody>
+          <a:bodyPr wrap="square" lIns="0" tIns="0" rIns="0" bIns="0" rtlCol="0" anchor="t"/>
+          <a:lstStyle/>
+          <a:p>
+            <a:pPr indent="0" marL="0">
+              <a:buNone/>
+            </a:pPr>
+            <a:r>
+              <a:rPr lang="en-US" sz="1300" dirty="0">
+                <a:solidFill>
+                  <a:schemeClr val="tx1"/>
+                </a:solidFill>
+              </a:rPr>
+              <a:t>Globocnik és Wirth emberei, akik előtte Bełżecet, Sobibórt és Treblinkát működtették. A gyilkolás „szakértői” Lengyelországból érkeztek.</a:t>
+            </a:r>
+            <a:endParaRPr lang="en-US" sz="1300" dirty="0"/>
+          </a:p>
+        </p:txBody>
+      </p:sp>
+      <p:sp>
+        <p:nvSpPr>
+          <p:cNvPr id="13" name="Kártya"/>
+          <p:cNvSpPr/>
+          <p:nvPr/>
+        </p:nvSpPr>
+        <p:spPr>
+          <a:xfrm>
+            <a:off x="548640" y="2807208"/>
+            <a:ext cx="5440680" cy="1444752"/>
+          </a:xfrm>
+          <a:prstGeom prst="roundRect">
+            <a:avLst>
+              <a:gd name="adj" fmla="val 5063"/>
+            </a:avLst>
+          </a:prstGeom>
+          <a:solidFill>
+            <a:schemeClr val="bg2"/>
+          </a:solidFill>
+          <a:ln w="12700">
+            <a:solidFill>
+              <a:schemeClr val="bg2"/>
+            </a:solidFill>
+            <a:prstDash val="solid"/>
+          </a:ln>
+        </p:spPr>
+      </p:sp>
+      <p:sp>
+        <p:nvSpPr>
+          <p:cNvPr id="14" name="Shape 12"/>
+          <p:cNvSpPr/>
+          <p:nvPr/>
+        </p:nvSpPr>
+        <p:spPr>
+          <a:xfrm>
+            <a:off x="731520" y="2990088"/>
+            <a:ext cx="502920" cy="502920"/>
+          </a:xfrm>
+          <a:prstGeom prst="ellipse">
+            <a:avLst/>
+          </a:prstGeom>
+          <a:solidFill>
+            <a:schemeClr val="accent1"/>
+          </a:solidFill>
+          <a:ln w="12700">
+            <a:solidFill>
+              <a:schemeClr val="accent1"/>
+            </a:solidFill>
+            <a:prstDash val="solid"/>
+          </a:ln>
+        </p:spPr>
+      </p:sp>
+      <p:sp>
+        <p:nvSpPr>
+          <p:cNvPr id="15" name="Text 13"/>
+          <p:cNvSpPr txBox="1"/>
+          <p:nvPr/>
+        </p:nvSpPr>
+        <p:spPr>
+          <a:xfrm>
+            <a:off x="731520" y="2990088"/>
+            <a:ext cx="502920" cy="502920"/>
+          </a:xfrm>
+          <a:prstGeom prst="rect">
+            <a:avLst/>
+          </a:prstGeom>
+          <a:noFill/>
+          <a:ln/>
+        </p:spPr>
+        <p:txBody>
+          <a:bodyPr wrap="square" lIns="0" tIns="0" rIns="0" bIns="0" rtlCol="0" anchor="ctr"/>
+          <a:lstStyle/>
+          <a:p>
+            <a:pPr algn="ctr" indent="0" marL="0">
+              <a:buNone/>
+            </a:pPr>
+            <a:r>
+              <a:rPr lang="en-US" sz="1800" b="1" dirty="0">
+                <a:solidFill>
+                  <a:schemeClr val="bg1"/>
+                </a:solidFill>
+              </a:rPr>
+              <a:t>A</a:t>
+            </a:r>
+            <a:endParaRPr lang="en-US" sz="1800" dirty="0"/>
+          </a:p>
+        </p:txBody>
+      </p:sp>
+      <p:sp>
+        <p:nvSpPr>
+          <p:cNvPr id="16" name="Text 14"/>
+          <p:cNvSpPr txBox="1"/>
+          <p:nvPr/>
+        </p:nvSpPr>
+        <p:spPr>
+          <a:xfrm>
+            <a:off x="1417320" y="2990088"/>
+            <a:ext cx="4434840" cy="384048"/>
+          </a:xfrm>
+          <a:prstGeom prst="rect">
+            <a:avLst/>
+          </a:prstGeom>
+          <a:noFill/>
+          <a:ln/>
+        </p:spPr>
+        <p:txBody>
+          <a:bodyPr wrap="square" lIns="0" tIns="0" rIns="0" bIns="0" rtlCol="0" anchor="ctr"/>
+          <a:lstStyle/>
+          <a:p>
+            <a:pPr indent="0" marL="0">
+              <a:buNone/>
+            </a:pPr>
+            <a:r>
+              <a:rPr lang="en-US" sz="1600" b="1" dirty="0">
+                <a:solidFill>
+                  <a:schemeClr val="tx1"/>
+                </a:solidFill>
+              </a:rPr>
+              <a:t>3. Mi történt itt?</a:t>
+            </a:r>
+            <a:endParaRPr lang="en-US" sz="1600" dirty="0"/>
+          </a:p>
+        </p:txBody>
+      </p:sp>
+      <p:sp>
+        <p:nvSpPr>
+          <p:cNvPr id="17" name="Text 15"/>
+          <p:cNvSpPr txBox="1"/>
+          <p:nvPr/>
+        </p:nvSpPr>
+        <p:spPr>
+          <a:xfrm>
+            <a:off x="1417320" y="3355848"/>
+            <a:ext cx="4434840" cy="868680"/>
+          </a:xfrm>
+          <a:prstGeom prst="rect">
+            <a:avLst/>
+          </a:prstGeom>
+          <a:noFill/>
+          <a:ln/>
+        </p:spPr>
+        <p:txBody>
+          <a:bodyPr wrap="square" lIns="0" tIns="0" rIns="0" bIns="0" rtlCol="0" anchor="t"/>
+          <a:lstStyle/>
+          <a:p>
+            <a:pPr indent="0" marL="0">
+              <a:buNone/>
+            </a:pPr>
+            <a:r>
+              <a:rPr lang="en-US" sz="1300" dirty="0">
+                <a:solidFill>
+                  <a:schemeClr val="tx1"/>
+                </a:solidFill>
+              </a:rPr>
+              <a:t>Fogolytábor, kínzások, kivégzések; 1944. ápr. 4-től krematórium — az egyetlen Olaszországban. 1945 áprilisában felrobbantották.</a:t>
+            </a:r>
+            <a:endParaRPr lang="en-US" sz="1300" dirty="0"/>
+          </a:p>
+        </p:txBody>
+      </p:sp>
+      <p:sp>
+        <p:nvSpPr>
+          <p:cNvPr id="18" name="Kártya"/>
+          <p:cNvSpPr/>
+          <p:nvPr/>
+        </p:nvSpPr>
+        <p:spPr>
+          <a:xfrm>
+            <a:off x="6172200" y="2807208"/>
+            <a:ext cx="5440680" cy="1444752"/>
+          </a:xfrm>
+          <a:prstGeom prst="roundRect">
+            <a:avLst>
+              <a:gd name="adj" fmla="val 5063"/>
+            </a:avLst>
+          </a:prstGeom>
+          <a:solidFill>
+            <a:schemeClr val="bg2"/>
+          </a:solidFill>
+          <a:ln w="12700">
+            <a:solidFill>
+              <a:schemeClr val="bg2"/>
+            </a:solidFill>
+            <a:prstDash val="solid"/>
+          </a:ln>
+        </p:spPr>
+      </p:sp>
+      <p:sp>
+        <p:nvSpPr>
+          <p:cNvPr id="19" name="Shape 17"/>
+          <p:cNvSpPr/>
+          <p:nvPr/>
+        </p:nvSpPr>
+        <p:spPr>
+          <a:xfrm>
+            <a:off x="6355080" y="2990088"/>
+            <a:ext cx="502920" cy="502920"/>
+          </a:xfrm>
+          <a:prstGeom prst="ellipse">
+            <a:avLst/>
+          </a:prstGeom>
+          <a:solidFill>
+            <a:schemeClr val="accent3"/>
+          </a:solidFill>
+          <a:ln w="12700">
+            <a:solidFill>
+              <a:schemeClr val="accent1"/>
+            </a:solidFill>
+            <a:prstDash val="solid"/>
+          </a:ln>
+        </p:spPr>
+      </p:sp>
+      <p:sp>
+        <p:nvSpPr>
+          <p:cNvPr id="20" name="Text 18"/>
+          <p:cNvSpPr txBox="1"/>
+          <p:nvPr/>
+        </p:nvSpPr>
+        <p:spPr>
+          <a:xfrm>
+            <a:off x="6355080" y="2990088"/>
+            <a:ext cx="502920" cy="502920"/>
+          </a:xfrm>
+          <a:prstGeom prst="rect">
+            <a:avLst/>
+          </a:prstGeom>
+          <a:noFill/>
+          <a:ln/>
+        </p:spPr>
+        <p:txBody>
+          <a:bodyPr wrap="square" lIns="0" tIns="0" rIns="0" bIns="0" rtlCol="0" anchor="ctr"/>
+          <a:lstStyle/>
+          <a:p>
+            <a:pPr algn="ctr" indent="0" marL="0">
+              <a:buNone/>
+            </a:pPr>
+            <a:r>
+              <a:rPr lang="en-US" sz="1800" b="1" dirty="0">
+                <a:solidFill>
+                  <a:schemeClr val="bg1"/>
+                </a:solidFill>
+              </a:rPr>
+              <a:t>B</a:t>
+            </a:r>
+            <a:endParaRPr lang="en-US" sz="1800" dirty="0"/>
+          </a:p>
+        </p:txBody>
+      </p:sp>
+      <p:sp>
+        <p:nvSpPr>
+          <p:cNvPr id="21" name="Text 19"/>
+          <p:cNvSpPr txBox="1"/>
+          <p:nvPr/>
+        </p:nvSpPr>
+        <p:spPr>
+          <a:xfrm>
+            <a:off x="7040880" y="2990088"/>
+            <a:ext cx="4434840" cy="384048"/>
+          </a:xfrm>
+          <a:prstGeom prst="rect">
+            <a:avLst/>
+          </a:prstGeom>
+          <a:noFill/>
+          <a:ln/>
+        </p:spPr>
+        <p:txBody>
+          <a:bodyPr wrap="square" lIns="0" tIns="0" rIns="0" bIns="0" rtlCol="0" anchor="ctr"/>
+          <a:lstStyle/>
+          <a:p>
+            <a:pPr indent="0" marL="0">
+              <a:buNone/>
+            </a:pPr>
+            <a:r>
+              <a:rPr lang="en-US" sz="1600" b="1" dirty="0">
+                <a:solidFill>
+                  <a:schemeClr val="tx1"/>
+                </a:solidFill>
+              </a:rPr>
+              <a:t>4. A zsidók sorsa</a:t>
+            </a:r>
+            <a:endParaRPr lang="en-US" sz="1600" dirty="0"/>
+          </a:p>
+        </p:txBody>
+      </p:sp>
+      <p:sp>
+        <p:nvSpPr>
+          <p:cNvPr id="22" name="Text 20"/>
+          <p:cNvSpPr txBox="1"/>
+          <p:nvPr/>
+        </p:nvSpPr>
+        <p:spPr>
+          <a:xfrm>
+            <a:off x="7040880" y="3355848"/>
+            <a:ext cx="4434840" cy="868680"/>
+          </a:xfrm>
+          <a:prstGeom prst="rect">
+            <a:avLst/>
+          </a:prstGeom>
+          <a:noFill/>
+          <a:ln/>
+        </p:spPr>
+        <p:txBody>
+          <a:bodyPr wrap="square" lIns="0" tIns="0" rIns="0" bIns="0" rtlCol="0" anchor="t"/>
+          <a:lstStyle/>
+          <a:p>
+            <a:pPr indent="0" marL="0">
+              <a:buNone/>
+            </a:pPr>
+            <a:r>
+              <a:rPr lang="en-US" sz="1300" dirty="0">
+                <a:solidFill>
+                  <a:schemeClr val="tx1"/>
+                </a:solidFill>
+              </a:rPr>
+              <a:t>Innen indultak a vonatok Auschwitzba: az olaszországi zsidó szerelvények kb. fele Triesztből. A 700+ deportált trieszti zsidóból kb. 20 tért haza.</a:t>
+            </a:r>
+            <a:endParaRPr lang="en-US" sz="1300" dirty="0"/>
+          </a:p>
+        </p:txBody>
+      </p:sp>
+      <p:sp>
+        <p:nvSpPr>
+          <p:cNvPr id="23" name="Kártya"/>
+          <p:cNvSpPr/>
+          <p:nvPr/>
+        </p:nvSpPr>
+        <p:spPr>
+          <a:xfrm>
+            <a:off x="548640" y="4379976"/>
+            <a:ext cx="5440680" cy="1444752"/>
+          </a:xfrm>
+          <a:prstGeom prst="roundRect">
+            <a:avLst>
+              <a:gd name="adj" fmla="val 5063"/>
+            </a:avLst>
+          </a:prstGeom>
+          <a:solidFill>
+            <a:schemeClr val="bg2"/>
+          </a:solidFill>
+          <a:ln w="12700">
+            <a:solidFill>
+              <a:schemeClr val="bg2"/>
+            </a:solidFill>
+            <a:prstDash val="solid"/>
+          </a:ln>
+        </p:spPr>
+      </p:sp>
+      <p:sp>
+        <p:nvSpPr>
+          <p:cNvPr id="24" name="Shape 22"/>
+          <p:cNvSpPr/>
+          <p:nvPr/>
+        </p:nvSpPr>
+        <p:spPr>
+          <a:xfrm>
+            <a:off x="731520" y="4562856"/>
+            <a:ext cx="502920" cy="502920"/>
+          </a:xfrm>
+          <a:prstGeom prst="ellipse">
+            <a:avLst/>
+          </a:prstGeom>
+          <a:solidFill>
+            <a:schemeClr val="accent1"/>
+          </a:solidFill>
+          <a:ln w="12700">
+            <a:solidFill>
+              <a:schemeClr val="accent1"/>
+            </a:solidFill>
+            <a:prstDash val="solid"/>
+          </a:ln>
+        </p:spPr>
+      </p:sp>
+      <p:sp>
+        <p:nvSpPr>
+          <p:cNvPr id="25" name="Text 23"/>
+          <p:cNvSpPr txBox="1"/>
+          <p:nvPr/>
+        </p:nvSpPr>
+        <p:spPr>
+          <a:xfrm>
+            <a:off x="731520" y="4562856"/>
+            <a:ext cx="502920" cy="502920"/>
+          </a:xfrm>
+          <a:prstGeom prst="rect">
+            <a:avLst/>
+          </a:prstGeom>
+          <a:noFill/>
+          <a:ln/>
+        </p:spPr>
+        <p:txBody>
+          <a:bodyPr wrap="square" lIns="0" tIns="0" rIns="0" bIns="0" rtlCol="0" anchor="ctr"/>
+          <a:lstStyle/>
+          <a:p>
+            <a:pPr algn="ctr" indent="0" marL="0">
+              <a:buNone/>
+            </a:pPr>
+            <a:r>
+              <a:rPr lang="en-US" sz="1800" b="1" dirty="0">
+                <a:solidFill>
+                  <a:schemeClr val="bg1"/>
+                </a:solidFill>
+              </a:rPr>
+              <a:t>A</a:t>
+            </a:r>
+            <a:endParaRPr lang="en-US" sz="1800" dirty="0"/>
+          </a:p>
+        </p:txBody>
+      </p:sp>
+      <p:sp>
+        <p:nvSpPr>
+          <p:cNvPr id="26" name="Text 24"/>
+          <p:cNvSpPr txBox="1"/>
+          <p:nvPr/>
+        </p:nvSpPr>
+        <p:spPr>
+          <a:xfrm>
+            <a:off x="1417320" y="4562856"/>
+            <a:ext cx="4434840" cy="384048"/>
+          </a:xfrm>
+          <a:prstGeom prst="rect">
+            <a:avLst/>
+          </a:prstGeom>
+          <a:noFill/>
+          <a:ln/>
+        </p:spPr>
+        <p:txBody>
+          <a:bodyPr wrap="square" lIns="0" tIns="0" rIns="0" bIns="0" rtlCol="0" anchor="ctr"/>
+          <a:lstStyle/>
+          <a:p>
+            <a:pPr indent="0" marL="0">
+              <a:buNone/>
+            </a:pPr>
+            <a:r>
+              <a:rPr lang="en-US" sz="1600" b="1" dirty="0">
+                <a:solidFill>
+                  <a:schemeClr val="tx1"/>
+                </a:solidFill>
+              </a:rPr>
+              <a:t>5. A többi áldozat</a:t>
+            </a:r>
+            <a:endParaRPr lang="en-US" sz="1600" dirty="0"/>
+          </a:p>
+        </p:txBody>
+      </p:sp>
+      <p:sp>
+        <p:nvSpPr>
+          <p:cNvPr id="27" name="Text 25"/>
+          <p:cNvSpPr txBox="1"/>
+          <p:nvPr/>
+        </p:nvSpPr>
+        <p:spPr>
+          <a:xfrm>
+            <a:off x="1417320" y="4928616"/>
+            <a:ext cx="4434840" cy="868680"/>
+          </a:xfrm>
+          <a:prstGeom prst="rect">
+            <a:avLst/>
+          </a:prstGeom>
+          <a:noFill/>
+          <a:ln/>
+        </p:spPr>
+        <p:txBody>
+          <a:bodyPr wrap="square" lIns="0" tIns="0" rIns="0" bIns="0" rtlCol="0" anchor="t"/>
+          <a:lstStyle/>
+          <a:p>
+            <a:pPr indent="0" marL="0">
+              <a:buNone/>
+            </a:pPr>
+            <a:r>
+              <a:rPr lang="en-US" sz="1300" dirty="0">
+                <a:solidFill>
+                  <a:schemeClr val="tx1"/>
+                </a:solidFill>
+              </a:rPr>
+              <a:t>Szlovén, horvát és olasz partizánok, politikai foglyok: legalább 2 000, a becslések szerint akár 5 000 halott.</a:t>
+            </a:r>
+            <a:endParaRPr lang="en-US" sz="1300" dirty="0"/>
+          </a:p>
+        </p:txBody>
+      </p:sp>
+      <p:sp>
+        <p:nvSpPr>
+          <p:cNvPr id="28" name="Kártya"/>
+          <p:cNvSpPr/>
+          <p:nvPr/>
+        </p:nvSpPr>
+        <p:spPr>
+          <a:xfrm>
+            <a:off x="6172200" y="4379976"/>
+            <a:ext cx="5440680" cy="1444752"/>
+          </a:xfrm>
+          <a:prstGeom prst="roundRect">
+            <a:avLst>
+              <a:gd name="adj" fmla="val 5063"/>
+            </a:avLst>
+          </a:prstGeom>
+          <a:solidFill>
+            <a:schemeClr val="bg2"/>
+          </a:solidFill>
+          <a:ln w="12700">
+            <a:solidFill>
+              <a:schemeClr val="bg2"/>
+            </a:solidFill>
+            <a:prstDash val="solid"/>
+          </a:ln>
+        </p:spPr>
+      </p:sp>
+      <p:sp>
+        <p:nvSpPr>
+          <p:cNvPr id="29" name="Shape 27"/>
+          <p:cNvSpPr/>
+          <p:nvPr/>
+        </p:nvSpPr>
+        <p:spPr>
+          <a:xfrm>
+            <a:off x="6355080" y="4562856"/>
+            <a:ext cx="502920" cy="502920"/>
+          </a:xfrm>
+          <a:prstGeom prst="ellipse">
+            <a:avLst/>
+          </a:prstGeom>
+          <a:solidFill>
+            <a:schemeClr val="accent3"/>
+          </a:solidFill>
+          <a:ln w="12700">
+            <a:solidFill>
+              <a:schemeClr val="accent1"/>
+            </a:solidFill>
+            <a:prstDash val="solid"/>
+          </a:ln>
+        </p:spPr>
+      </p:sp>
+      <p:sp>
+        <p:nvSpPr>
+          <p:cNvPr id="30" name="Text 28"/>
+          <p:cNvSpPr txBox="1"/>
+          <p:nvPr/>
+        </p:nvSpPr>
+        <p:spPr>
+          <a:xfrm>
+            <a:off x="6355080" y="4562856"/>
+            <a:ext cx="502920" cy="502920"/>
+          </a:xfrm>
+          <a:prstGeom prst="rect">
+            <a:avLst/>
+          </a:prstGeom>
+          <a:noFill/>
+          <a:ln/>
+        </p:spPr>
+        <p:txBody>
+          <a:bodyPr wrap="square" lIns="0" tIns="0" rIns="0" bIns="0" rtlCol="0" anchor="ctr"/>
+          <a:lstStyle/>
+          <a:p>
+            <a:pPr algn="ctr" indent="0" marL="0">
+              <a:buNone/>
+            </a:pPr>
+            <a:r>
+              <a:rPr lang="en-US" sz="1800" b="1" dirty="0">
+                <a:solidFill>
+                  <a:schemeClr val="bg1"/>
+                </a:solidFill>
+              </a:rPr>
+              <a:t>B</a:t>
+            </a:r>
+            <a:endParaRPr lang="en-US" sz="1800" dirty="0"/>
+          </a:p>
+        </p:txBody>
+      </p:sp>
+      <p:sp>
+        <p:nvSpPr>
+          <p:cNvPr id="31" name="Text 29"/>
+          <p:cNvSpPr txBox="1"/>
+          <p:nvPr/>
+        </p:nvSpPr>
+        <p:spPr>
+          <a:xfrm>
+            <a:off x="7040880" y="4562856"/>
+            <a:ext cx="4434840" cy="384048"/>
+          </a:xfrm>
+          <a:prstGeom prst="rect">
+            <a:avLst/>
+          </a:prstGeom>
+          <a:noFill/>
+          <a:ln/>
+        </p:spPr>
+        <p:txBody>
+          <a:bodyPr wrap="square" lIns="0" tIns="0" rIns="0" bIns="0" rtlCol="0" anchor="ctr"/>
+          <a:lstStyle/>
+          <a:p>
+            <a:pPr indent="0" marL="0">
+              <a:buNone/>
+            </a:pPr>
+            <a:r>
+              <a:rPr lang="en-US" sz="1600" b="1" dirty="0">
+                <a:solidFill>
+                  <a:schemeClr val="tx1"/>
+                </a:solidFill>
+              </a:rPr>
+              <a:t>6. Emlékezet</a:t>
+            </a:r>
+            <a:endParaRPr lang="en-US" sz="1600" dirty="0"/>
+          </a:p>
+        </p:txBody>
+      </p:sp>
+      <p:sp>
+        <p:nvSpPr>
+          <p:cNvPr id="32" name="Text 30"/>
+          <p:cNvSpPr txBox="1"/>
+          <p:nvPr/>
+        </p:nvSpPr>
+        <p:spPr>
+          <a:xfrm>
+            <a:off x="7040880" y="4928616"/>
+            <a:ext cx="4434840" cy="868680"/>
+          </a:xfrm>
+          <a:prstGeom prst="rect">
+            <a:avLst/>
+          </a:prstGeom>
+          <a:noFill/>
+          <a:ln/>
+        </p:spPr>
+        <p:txBody>
+          <a:bodyPr wrap="square" lIns="0" tIns="0" rIns="0" bIns="0" rtlCol="0" anchor="t"/>
+          <a:lstStyle/>
+          <a:p>
+            <a:pPr indent="0" marL="0">
+              <a:buNone/>
+            </a:pPr>
+            <a:r>
+              <a:rPr lang="en-US" sz="1300" dirty="0">
+                <a:solidFill>
+                  <a:schemeClr val="tx1"/>
+                </a:solidFill>
+              </a:rPr>
+              <a:t>Nemzeti emlékmű 1965, múzeum 1975, per csak 1976-ban. Kérdés a végére: miért tartott ennyi ideig, hogy Olaszország szembenézzen ezzel?</a:t>
+            </a:r>
+            <a:endParaRPr lang="en-US" sz="1300" dirty="0"/>
+          </a:p>
+        </p:txBody>
+      </p:sp>
+      <p:sp>
+        <p:nvSpPr>
+          <p:cNvPr id="33" name="Forrás"/>
+          <p:cNvSpPr txBox="1"/>
+          <p:nvPr/>
+        </p:nvSpPr>
+        <p:spPr>
+          <a:xfrm>
+            <a:off x="548640" y="6053328"/>
+            <a:ext cx="11064240" cy="329184"/>
+          </a:xfrm>
+          <a:prstGeom prst="rect">
+            <a:avLst/>
+          </a:prstGeom>
+          <a:noFill/>
+          <a:ln/>
+        </p:spPr>
+        <p:txBody>
+          <a:bodyPr wrap="square" lIns="0" tIns="0" rIns="0" bIns="0" rtlCol="0" anchor="t"/>
+          <a:lstStyle/>
+          <a:p>
+            <a:pPr indent="0" marL="0">
+              <a:buNone/>
+            </a:pPr>
+            <a:r>
+              <a:rPr lang="en-US" sz="1000" i="1" dirty="0">
+                <a:solidFill>
+                  <a:schemeClr val="accent4"/>
+                </a:solidFill>
+              </a:rPr>
+              <a:t>Forrás: A trieszti fejezet diáinak adatai alapján. „A” és „B” = a két előadó; a blokkok kb. 1 percesek.</a:t>
+            </a:r>
+            <a:endParaRPr lang="en-US" sz="1000" dirty="0"/>
+          </a:p>
+        </p:txBody>
+      </p:sp>
+      <p:sp>
+        <p:nvSpPr>
+          <p:cNvPr id="25" name="Slide Number Placeholder 0"/>
+          <p:cNvSpPr>
+            <a:spLocks noGrp="1"/>
+          </p:cNvSpPr>
+          <p:nvPr>
+            <p:ph type="sldNum" sz="quarter" idx="4294967295"/>
+          </p:nvPr>
+        </p:nvSpPr>
+        <p:spPr>
+          <a:xfrm>
+            <a:off x="11064240" y="6446520"/>
+            <a:ext cx="548640" cy="274320"/>
+          </a:xfrm>
+          <a:prstGeom prst="rect">
+            <a:avLst/>
+          </a:prstGeom>
+          <a:extLst>
+            <a:ext uri="{C572A759-6A51-4108-AA02-DFA0A04FC94B}">
+              <ma14:wrappingTextBoxFlag xmlns:ma14="http://schemas.microsoft.com/office/mac/drawingml/2011/main" val="0"/>
+            </a:ext>
+          </a:extLst>
+        </p:spPr>
+        <p:txBody>
+          <a:bodyPr/>
+          <a:lstStyle>
+            <a:lvl1pPr>
+              <a:defRPr sz="1000">
+                <a:solidFill>
+                  <a:schemeClr val="accent4"/>
+                </a:solidFill>
+              </a:defRPr>
+            </a:lvl1pPr>
+          </a:lstStyle>
+          <a:p>
+            <a:pPr algn="r"/>
+            <a:fld id="{F7021451-1387-4CA6-816F-3879F97B5CBC}" type="slidenum">
+              <a:rPr b="0" lang="en-US"/>
+              <a:t>50</a:t>
+            </a:fld>
+            <a:endParaRPr lang="en-US"/>
+          </a:p>
+        </p:txBody>
+      </p:sp>
+    </p:spTree>
+  </p:cSld>
+  <p:clrMapOvr>
+    <a:masterClrMapping/>
+  </p:clrMapOvr>
+</p:sld>
+</file>
+
+<file path=ppt/slides/slide51.xml><?xml version="1.0" encoding="utf-8"?>
+<p:sld xmlns:a="http://schemas.openxmlformats.org/drawingml/2006/main" xmlns:r="http://schemas.openxmlformats.org/officeDocument/2006/relationships" xmlns:p="http://schemas.openxmlformats.org/presentationml/2006/main">
+  <p:cSld name="Slide 51">
+    <p:spTree>
+      <p:nvGrpSpPr>
+        <p:cNvPr id="1" name=""/>
+        <p:cNvGrpSpPr/>
+        <p:nvPr/>
+      </p:nvGrpSpPr>
+      <p:grpSpPr>
+        <a:xfrm>
+          <a:off x="0" y="0"/>
+          <a:ext cx="0" cy="0"/>
+          <a:chOff x="0" y="0"/>
+          <a:chExt cx="0" cy="0"/>
+        </a:xfrm>
+      </p:grpSpPr>
+      <p:sp>
+        <p:nvSpPr>
+          <p:cNvPr id="2" name="Text 0"/>
+          <p:cNvSpPr/>
+          <p:nvPr>
+            <p:ph idx="100" type="title" hasCustomPrompt="1"/>
+          </p:nvPr>
+        </p:nvSpPr>
+        <p:spPr>
+          <a:xfrm>
+            <a:off x="548640" y="320040"/>
+            <a:ext cx="11064240" cy="731520"/>
+          </a:xfrm>
+          <a:prstGeom prst="rect">
+            <a:avLst/>
+          </a:prstGeom>
+          <a:noFill/>
+          <a:ln/>
+        </p:spPr>
+        <p:txBody>
+          <a:bodyPr wrap="square" lIns="0" tIns="0" rIns="0" bIns="0" rtlCol="0" anchor="ctr"/>
+          <a:lstStyle/>
+          <a:p>
+            <a:pPr algn="l" indent="0" marL="0">
+              <a:buNone/>
+            </a:pPr>
+            <a:r>
+              <a:rPr lang="en-US" sz="3200" b="1" dirty="0">
+                <a:solidFill>
+                  <a:schemeClr val="tx1"/>
+                </a:solidFill>
+                <a:latin typeface="Cambria" pitchFamily="34" charset="0"/>
+                <a:ea typeface="Cambria" pitchFamily="34" charset="-122"/>
+                <a:cs typeface="Cambria" pitchFamily="34" charset="-120"/>
+              </a:rPr>
+              <a:t>Kérdések a látogatás utánra</a:t>
+            </a:r>
+            <a:endParaRPr lang="en-US" sz="3200" dirty="0"/>
+          </a:p>
+        </p:txBody>
+      </p:sp>
+      <p:sp>
+        <p:nvSpPr>
+          <p:cNvPr id="3" name="Text 1"/>
+          <p:cNvSpPr txBox="1"/>
+          <p:nvPr/>
+        </p:nvSpPr>
+        <p:spPr>
+          <a:xfrm>
+            <a:off x="548640" y="1234440"/>
+            <a:ext cx="640080" cy="777240"/>
+          </a:xfrm>
+          <a:prstGeom prst="rect">
+            <a:avLst/>
+          </a:prstGeom>
+          <a:noFill/>
+          <a:ln/>
+        </p:spPr>
+        <p:txBody>
+          <a:bodyPr wrap="square" lIns="0" tIns="0" rIns="0" bIns="0" rtlCol="0" anchor="t"/>
+          <a:lstStyle/>
+          <a:p>
+            <a:pPr indent="0" marL="0">
+              <a:buNone/>
+            </a:pPr>
+            <a:r>
+              <a:rPr lang="en-US" sz="3200" b="1" dirty="0">
+                <a:solidFill>
+                  <a:schemeClr val="accent1"/>
+                </a:solidFill>
+                <a:latin typeface="Cambria" pitchFamily="34" charset="0"/>
+                <a:ea typeface="Cambria" pitchFamily="34" charset="-122"/>
+                <a:cs typeface="Cambria" pitchFamily="34" charset="-120"/>
+              </a:rPr>
+              <a:t>1</a:t>
+            </a:r>
+            <a:endParaRPr lang="en-US" sz="3200" dirty="0"/>
+          </a:p>
+        </p:txBody>
+      </p:sp>
+      <p:sp>
+        <p:nvSpPr>
+          <p:cNvPr id="4" name="Text 2"/>
+          <p:cNvSpPr txBox="1"/>
+          <p:nvPr/>
+        </p:nvSpPr>
+        <p:spPr>
+          <a:xfrm>
+            <a:off x="1280160" y="1280160"/>
+            <a:ext cx="10332720" cy="777240"/>
+          </a:xfrm>
+          <a:prstGeom prst="rect">
+            <a:avLst/>
+          </a:prstGeom>
+          <a:noFill/>
+          <a:ln/>
+        </p:spPr>
+        <p:txBody>
+          <a:bodyPr wrap="square" lIns="0" tIns="0" rIns="0" bIns="0" rtlCol="0" anchor="t"/>
+          <a:lstStyle/>
+          <a:p>
+            <a:pPr indent="0" marL="0">
+              <a:buNone/>
+            </a:pPr>
+            <a:r>
+              <a:rPr lang="en-US" sz="1600" dirty="0">
+                <a:solidFill>
+                  <a:schemeClr val="tx1"/>
+                </a:solidFill>
+              </a:rPr>
+              <a:t>Miért éppen Triesztben épült ki az egyetlen olaszországi tábor krematóriummal? (Gondoljatok az OZAK-ra és a Reinhard-csoportra.)</a:t>
+            </a:r>
+            <a:endParaRPr lang="en-US" sz="1600" dirty="0"/>
+          </a:p>
+        </p:txBody>
+      </p:sp>
+      <p:sp>
+        <p:nvSpPr>
+          <p:cNvPr id="5" name="Text 3"/>
+          <p:cNvSpPr txBox="1"/>
+          <p:nvPr/>
+        </p:nvSpPr>
+        <p:spPr>
+          <a:xfrm>
+            <a:off x="548640" y="2176272"/>
+            <a:ext cx="640080" cy="777240"/>
+          </a:xfrm>
+          <a:prstGeom prst="rect">
+            <a:avLst/>
+          </a:prstGeom>
+          <a:noFill/>
+          <a:ln/>
+        </p:spPr>
+        <p:txBody>
+          <a:bodyPr wrap="square" lIns="0" tIns="0" rIns="0" bIns="0" rtlCol="0" anchor="t"/>
+          <a:lstStyle/>
+          <a:p>
+            <a:pPr indent="0" marL="0">
+              <a:buNone/>
+            </a:pPr>
+            <a:r>
+              <a:rPr lang="en-US" sz="3200" b="1" dirty="0">
+                <a:solidFill>
+                  <a:schemeClr val="accent1"/>
+                </a:solidFill>
+                <a:latin typeface="Cambria" pitchFamily="34" charset="0"/>
+                <a:ea typeface="Cambria" pitchFamily="34" charset="-122"/>
+                <a:cs typeface="Cambria" pitchFamily="34" charset="-120"/>
+              </a:rPr>
+              <a:t>2</a:t>
+            </a:r>
+            <a:endParaRPr lang="en-US" sz="3200" dirty="0"/>
+          </a:p>
+        </p:txBody>
+      </p:sp>
+      <p:sp>
+        <p:nvSpPr>
+          <p:cNvPr id="6" name="Text 4"/>
+          <p:cNvSpPr txBox="1"/>
+          <p:nvPr/>
+        </p:nvSpPr>
+        <p:spPr>
+          <a:xfrm>
+            <a:off x="1280160" y="2221992"/>
+            <a:ext cx="10332720" cy="777240"/>
+          </a:xfrm>
+          <a:prstGeom prst="rect">
+            <a:avLst/>
+          </a:prstGeom>
+          <a:noFill/>
+          <a:ln/>
+        </p:spPr>
+        <p:txBody>
+          <a:bodyPr wrap="square" lIns="0" tIns="0" rIns="0" bIns="0" rtlCol="0" anchor="t"/>
+          <a:lstStyle/>
+          <a:p>
+            <a:pPr indent="0" marL="0">
+              <a:buNone/>
+            </a:pPr>
+            <a:r>
+              <a:rPr lang="en-US" sz="1600" dirty="0">
+                <a:solidFill>
+                  <a:schemeClr val="tx1"/>
+                </a:solidFill>
+              </a:rPr>
+              <a:t>Mit üzen Boico építészete — a magas falak, az üres udvar, a krematórium „lenyomata”? Mit éreztetek belépéskor?</a:t>
+            </a:r>
+            <a:endParaRPr lang="en-US" sz="1600" dirty="0"/>
+          </a:p>
+        </p:txBody>
+      </p:sp>
+      <p:sp>
+        <p:nvSpPr>
+          <p:cNvPr id="7" name="Text 5"/>
+          <p:cNvSpPr txBox="1"/>
+          <p:nvPr/>
+        </p:nvSpPr>
+        <p:spPr>
+          <a:xfrm>
+            <a:off x="548640" y="3118104"/>
+            <a:ext cx="640080" cy="777240"/>
+          </a:xfrm>
+          <a:prstGeom prst="rect">
+            <a:avLst/>
+          </a:prstGeom>
+          <a:noFill/>
+          <a:ln/>
+        </p:spPr>
+        <p:txBody>
+          <a:bodyPr wrap="square" lIns="0" tIns="0" rIns="0" bIns="0" rtlCol="0" anchor="t"/>
+          <a:lstStyle/>
+          <a:p>
+            <a:pPr indent="0" marL="0">
+              <a:buNone/>
+            </a:pPr>
+            <a:r>
+              <a:rPr lang="en-US" sz="3200" b="1" dirty="0">
+                <a:solidFill>
+                  <a:schemeClr val="accent1"/>
+                </a:solidFill>
+                <a:latin typeface="Cambria" pitchFamily="34" charset="0"/>
+                <a:ea typeface="Cambria" pitchFamily="34" charset="-122"/>
+                <a:cs typeface="Cambria" pitchFamily="34" charset="-120"/>
+              </a:rPr>
+              <a:t>3</a:t>
+            </a:r>
+            <a:endParaRPr lang="en-US" sz="3200" dirty="0"/>
+          </a:p>
+        </p:txBody>
+      </p:sp>
+      <p:sp>
+        <p:nvSpPr>
+          <p:cNvPr id="8" name="Text 6"/>
+          <p:cNvSpPr txBox="1"/>
+          <p:nvPr/>
+        </p:nvSpPr>
+        <p:spPr>
+          <a:xfrm>
+            <a:off x="1280160" y="3163824"/>
+            <a:ext cx="10332720" cy="777240"/>
+          </a:xfrm>
+          <a:prstGeom prst="rect">
+            <a:avLst/>
+          </a:prstGeom>
+          <a:noFill/>
+          <a:ln/>
+        </p:spPr>
+        <p:txBody>
+          <a:bodyPr wrap="square" lIns="0" tIns="0" rIns="0" bIns="0" rtlCol="0" anchor="t"/>
+          <a:lstStyle/>
+          <a:p>
+            <a:pPr indent="0" marL="0">
+              <a:buNone/>
+            </a:pPr>
+            <a:r>
+              <a:rPr lang="en-US" sz="1600" dirty="0">
+                <a:solidFill>
+                  <a:schemeClr val="tx1"/>
+                </a:solidFill>
+              </a:rPr>
+              <a:t>Miért különböznek ennyire az áldozati számok, és mit jelent ez a történetírás számára?</a:t>
+            </a:r>
+            <a:endParaRPr lang="en-US" sz="1600" dirty="0"/>
+          </a:p>
+        </p:txBody>
+      </p:sp>
+      <p:sp>
+        <p:nvSpPr>
+          <p:cNvPr id="9" name="Text 7"/>
+          <p:cNvSpPr txBox="1"/>
+          <p:nvPr/>
+        </p:nvSpPr>
+        <p:spPr>
+          <a:xfrm>
+            <a:off x="548640" y="4059936"/>
+            <a:ext cx="640080" cy="777240"/>
+          </a:xfrm>
+          <a:prstGeom prst="rect">
+            <a:avLst/>
+          </a:prstGeom>
+          <a:noFill/>
+          <a:ln/>
+        </p:spPr>
+        <p:txBody>
+          <a:bodyPr wrap="square" lIns="0" tIns="0" rIns="0" bIns="0" rtlCol="0" anchor="t"/>
+          <a:lstStyle/>
+          <a:p>
+            <a:pPr indent="0" marL="0">
+              <a:buNone/>
+            </a:pPr>
+            <a:r>
+              <a:rPr lang="en-US" sz="3200" b="1" dirty="0">
+                <a:solidFill>
+                  <a:schemeClr val="accent1"/>
+                </a:solidFill>
+                <a:latin typeface="Cambria" pitchFamily="34" charset="0"/>
+                <a:ea typeface="Cambria" pitchFamily="34" charset="-122"/>
+                <a:cs typeface="Cambria" pitchFamily="34" charset="-120"/>
+              </a:rPr>
+              <a:t>4</a:t>
+            </a:r>
+            <a:endParaRPr lang="en-US" sz="3200" dirty="0"/>
+          </a:p>
+        </p:txBody>
+      </p:sp>
+      <p:sp>
+        <p:nvSpPr>
+          <p:cNvPr id="10" name="Text 8"/>
+          <p:cNvSpPr txBox="1"/>
+          <p:nvPr/>
+        </p:nvSpPr>
+        <p:spPr>
+          <a:xfrm>
+            <a:off x="1280160" y="4105656"/>
+            <a:ext cx="10332720" cy="777240"/>
+          </a:xfrm>
+          <a:prstGeom prst="rect">
+            <a:avLst/>
+          </a:prstGeom>
+          <a:noFill/>
+          <a:ln/>
+        </p:spPr>
+        <p:txBody>
+          <a:bodyPr wrap="square" lIns="0" tIns="0" rIns="0" bIns="0" rtlCol="0" anchor="t"/>
+          <a:lstStyle/>
+          <a:p>
+            <a:pPr indent="0" marL="0">
+              <a:buNone/>
+            </a:pPr>
+            <a:r>
+              <a:rPr lang="en-US" sz="1600" dirty="0">
+                <a:solidFill>
+                  <a:schemeClr val="tx1"/>
+                </a:solidFill>
+              </a:rPr>
+              <a:t>Hogyan kapcsolódik ez a hely a magyar holokauszthoz? (1944 tavasza, ugyanaz a végállomás: Auschwitz.)</a:t>
+            </a:r>
+            <a:endParaRPr lang="en-US" sz="1600" dirty="0"/>
+          </a:p>
+        </p:txBody>
+      </p:sp>
+      <p:sp>
+        <p:nvSpPr>
+          <p:cNvPr id="11" name="Text 9"/>
+          <p:cNvSpPr txBox="1"/>
+          <p:nvPr/>
+        </p:nvSpPr>
+        <p:spPr>
+          <a:xfrm>
+            <a:off x="548640" y="5001768"/>
+            <a:ext cx="640080" cy="777240"/>
+          </a:xfrm>
+          <a:prstGeom prst="rect">
+            <a:avLst/>
+          </a:prstGeom>
+          <a:noFill/>
+          <a:ln/>
+        </p:spPr>
+        <p:txBody>
+          <a:bodyPr wrap="square" lIns="0" tIns="0" rIns="0" bIns="0" rtlCol="0" anchor="t"/>
+          <a:lstStyle/>
+          <a:p>
+            <a:pPr indent="0" marL="0">
+              <a:buNone/>
+            </a:pPr>
+            <a:r>
+              <a:rPr lang="en-US" sz="3200" b="1" dirty="0">
+                <a:solidFill>
+                  <a:schemeClr val="accent1"/>
+                </a:solidFill>
+                <a:latin typeface="Cambria" pitchFamily="34" charset="0"/>
+                <a:ea typeface="Cambria" pitchFamily="34" charset="-122"/>
+                <a:cs typeface="Cambria" pitchFamily="34" charset="-120"/>
+              </a:rPr>
+              <a:t>5</a:t>
+            </a:r>
+            <a:endParaRPr lang="en-US" sz="3200" dirty="0"/>
+          </a:p>
+        </p:txBody>
+      </p:sp>
+      <p:sp>
+        <p:nvSpPr>
+          <p:cNvPr id="12" name="Text 10"/>
+          <p:cNvSpPr txBox="1"/>
+          <p:nvPr/>
+        </p:nvSpPr>
+        <p:spPr>
+          <a:xfrm>
+            <a:off x="1280160" y="5047488"/>
+            <a:ext cx="10332720" cy="777240"/>
+          </a:xfrm>
+          <a:prstGeom prst="rect">
+            <a:avLst/>
+          </a:prstGeom>
+          <a:noFill/>
+          <a:ln/>
+        </p:spPr>
+        <p:txBody>
+          <a:bodyPr wrap="square" lIns="0" tIns="0" rIns="0" bIns="0" rtlCol="0" anchor="t"/>
+          <a:lstStyle/>
+          <a:p>
+            <a:pPr indent="0" marL="0">
+              <a:buNone/>
+            </a:pPr>
+            <a:r>
+              <a:rPr lang="en-US" sz="1600" dirty="0">
+                <a:solidFill>
+                  <a:schemeClr val="tx1"/>
+                </a:solidFill>
+              </a:rPr>
+              <a:t>Mit tanít a késői, 1976-os per az igazságszolgáltatásról és az emlékezetről?</a:t>
+            </a:r>
+            <a:endParaRPr lang="en-US" sz="1600" dirty="0"/>
+          </a:p>
+        </p:txBody>
+      </p:sp>
+      <p:sp>
+        <p:nvSpPr>
+          <p:cNvPr id="25" name="Slide Number Placeholder 0"/>
+          <p:cNvSpPr>
+            <a:spLocks noGrp="1"/>
+          </p:cNvSpPr>
+          <p:nvPr>
+            <p:ph type="sldNum" sz="quarter" idx="4294967295"/>
+          </p:nvPr>
+        </p:nvSpPr>
+        <p:spPr>
+          <a:xfrm>
+            <a:off x="11064240" y="6446520"/>
+            <a:ext cx="548640" cy="274320"/>
+          </a:xfrm>
+          <a:prstGeom prst="rect">
+            <a:avLst/>
+          </a:prstGeom>
+          <a:extLst>
+            <a:ext uri="{C572A759-6A51-4108-AA02-DFA0A04FC94B}">
+              <ma14:wrappingTextBoxFlag xmlns:ma14="http://schemas.microsoft.com/office/mac/drawingml/2011/main" val="0"/>
+            </a:ext>
+          </a:extLst>
+        </p:spPr>
+        <p:txBody>
+          <a:bodyPr/>
+          <a:lstStyle>
+            <a:lvl1pPr>
+              <a:defRPr sz="1000">
+                <a:solidFill>
+                  <a:schemeClr val="accent4"/>
+                </a:solidFill>
+              </a:defRPr>
+            </a:lvl1pPr>
+          </a:lstStyle>
+          <a:p>
+            <a:pPr algn="r"/>
+            <a:fld id="{F7021451-1387-4CA6-816F-3879F97B5CBC}" type="slidenum">
+              <a:rPr b="0" lang="en-US"/>
+              <a:t>51</a:t>
+            </a:fld>
+            <a:endParaRPr lang="en-US"/>
+          </a:p>
+        </p:txBody>
+      </p:sp>
+    </p:spTree>
+  </p:cSld>
+  <p:clrMapOvr>
+    <a:masterClrMapping/>
+  </p:clrMapOvr>
+</p:sld>
+</file>
+
+<file path=ppt/slides/slide52.xml><?xml version="1.0" encoding="utf-8"?>
+<p:sld xmlns:a="http://schemas.openxmlformats.org/drawingml/2006/main" xmlns:r="http://schemas.openxmlformats.org/officeDocument/2006/relationships" xmlns:p="http://schemas.openxmlformats.org/presentationml/2006/main">
+  <p:cSld name="Slide 52">
+    <p:spTree>
+      <p:nvGrpSpPr>
+        <p:cNvPr id="1" name=""/>
+        <p:cNvGrpSpPr/>
+        <p:nvPr/>
+      </p:nvGrpSpPr>
+      <p:grpSpPr>
+        <a:xfrm>
+          <a:off x="0" y="0"/>
+          <a:ext cx="0" cy="0"/>
+          <a:chOff x="0" y="0"/>
+          <a:chExt cx="0" cy="0"/>
+        </a:xfrm>
+      </p:grpSpPr>
+      <p:sp>
+        <p:nvSpPr>
+          <p:cNvPr id="2" name="Text 0"/>
+          <p:cNvSpPr/>
+          <p:nvPr>
+            <p:ph idx="100" type="title" hasCustomPrompt="1"/>
+          </p:nvPr>
+        </p:nvSpPr>
+        <p:spPr>
+          <a:xfrm>
+            <a:off x="548640" y="320040"/>
+            <a:ext cx="11064240" cy="731520"/>
+          </a:xfrm>
+          <a:prstGeom prst="rect">
+            <a:avLst/>
+          </a:prstGeom>
+          <a:noFill/>
+          <a:ln/>
+        </p:spPr>
+        <p:txBody>
+          <a:bodyPr wrap="square" lIns="0" tIns="0" rIns="0" bIns="0" rtlCol="0" anchor="ctr"/>
+          <a:lstStyle/>
+          <a:p>
+            <a:pPr algn="l" indent="0" marL="0">
+              <a:buNone/>
+            </a:pPr>
+            <a:r>
+              <a:rPr lang="en-US" sz="3200" b="1" dirty="0">
+                <a:solidFill>
+                  <a:schemeClr val="tx1"/>
+                </a:solidFill>
+                <a:latin typeface="Cambria" pitchFamily="34" charset="0"/>
+                <a:ea typeface="Cambria" pitchFamily="34" charset="-122"/>
+                <a:cs typeface="Cambria" pitchFamily="34" charset="-120"/>
+              </a:rPr>
+              <a:t>Források a trieszti fejezethez</a:t>
+            </a:r>
+            <a:endParaRPr lang="en-US" sz="3200" dirty="0"/>
+          </a:p>
+        </p:txBody>
+      </p:sp>
+      <p:sp>
+        <p:nvSpPr>
+          <p:cNvPr id="3" name="Text 1"/>
+          <p:cNvSpPr txBox="1"/>
+          <p:nvPr/>
+        </p:nvSpPr>
+        <p:spPr>
+          <a:xfrm>
+            <a:off x="548640" y="1234440"/>
+            <a:ext cx="11064240" cy="4754880"/>
+          </a:xfrm>
+          <a:prstGeom prst="rect">
+            <a:avLst/>
+          </a:prstGeom>
+          <a:noFill/>
+          <a:ln/>
+        </p:spPr>
+        <p:txBody>
+          <a:bodyPr wrap="square" lIns="0" tIns="0" rIns="0" bIns="0" rtlCol="0" anchor="t"/>
+          <a:lstStyle/>
+          <a:p>
+            <a:pPr marL="342900" indent="-342900">
+              <a:spcAft>
+                <a:spcPts val="600"/>
+              </a:spcAft>
+              <a:buSzPct val="100000"/>
+              <a:buChar char="•"/>
+            </a:pPr>
+            <a:r>
+              <a:rPr lang="en-US" sz="1400" dirty="0">
+                <a:solidFill>
+                  <a:schemeClr val="tx1"/>
+                </a:solidFill>
+              </a:rPr>
+              <a:t>Civico Museo della Risiera di San Sabba — risierasansabba.it (olasz, angol, német, horvát nyelvű ismertető; nyitvatartás; „Destinazione Lager” katalógus)</a:t>
+            </a:r>
+            <a:endParaRPr lang="en-US" sz="1400" dirty="0"/>
+          </a:p>
+          <a:p>
+            <a:pPr marL="342900" indent="-342900">
+              <a:spcAft>
+                <a:spcPts val="600"/>
+              </a:spcAft>
+              <a:buSzPct val="100000"/>
+              <a:buChar char="•"/>
+            </a:pPr>
+            <a:r>
+              <a:rPr lang="en-US" sz="1400" dirty="0">
+                <a:solidFill>
+                  <a:schemeClr val="tx1"/>
+                </a:solidFill>
+              </a:rPr>
+              <a:t>CoopCulture — coopculture.it (vezetett túrák, jegyek, megközelítés)</a:t>
+            </a:r>
+            <a:endParaRPr lang="en-US" sz="1400" dirty="0"/>
+          </a:p>
+          <a:p>
+            <a:pPr marL="342900" indent="-342900">
+              <a:spcAft>
+                <a:spcPts val="600"/>
+              </a:spcAft>
+              <a:buSzPct val="100000"/>
+              <a:buChar char="•"/>
+            </a:pPr>
+            <a:r>
+              <a:rPr lang="en-US" sz="1400" dirty="0">
+                <a:solidFill>
+                  <a:schemeClr val="tx1"/>
+                </a:solidFill>
+              </a:rPr>
+              <a:t>Prima Friuli: „Trieste, alla Risiera visite guidate nel weekend…” (2026. okt. 9.)</a:t>
+            </a:r>
+            <a:endParaRPr lang="en-US" sz="1400" dirty="0"/>
+          </a:p>
+          <a:p>
+            <a:pPr marL="342900" indent="-342900">
+              <a:spcAft>
+                <a:spcPts val="600"/>
+              </a:spcAft>
+              <a:buSzPct val="100000"/>
+              <a:buChar char="•"/>
+            </a:pPr>
+            <a:r>
+              <a:rPr lang="en-US" sz="1400" dirty="0">
+                <a:solidFill>
+                  <a:schemeClr val="tx1"/>
+                </a:solidFill>
+              </a:rPr>
+              <a:t>ANED — deportati.it (a Risiera története; „Il processo della Risiera” kiállítás)</a:t>
+            </a:r>
+            <a:endParaRPr lang="en-US" sz="1400" dirty="0"/>
+          </a:p>
+          <a:p>
+            <a:pPr marL="342900" indent="-342900">
+              <a:spcAft>
+                <a:spcPts val="600"/>
+              </a:spcAft>
+              <a:buSzPct val="100000"/>
+              <a:buChar char="•"/>
+            </a:pPr>
+            <a:r>
+              <a:rPr lang="en-US" sz="1400" dirty="0">
+                <a:solidFill>
+                  <a:schemeClr val="tx1"/>
+                </a:solidFill>
+              </a:rPr>
+              <a:t>ANPI — anpi.it („Risiera di San Sabba”)</a:t>
+            </a:r>
+            <a:endParaRPr lang="en-US" sz="1400" dirty="0"/>
+          </a:p>
+          <a:p>
+            <a:pPr marL="342900" indent="-342900">
+              <a:spcAft>
+                <a:spcPts val="600"/>
+              </a:spcAft>
+              <a:buSzPct val="100000"/>
+              <a:buChar char="•"/>
+            </a:pPr>
+            <a:r>
+              <a:rPr lang="en-US" sz="1400" dirty="0">
+                <a:solidFill>
+                  <a:schemeClr val="tx1"/>
+                </a:solidFill>
+              </a:rPr>
+              <a:t>ns-taeter-italien.org — Risiera di San Sabba (tettesek)</a:t>
+            </a:r>
+            <a:endParaRPr lang="en-US" sz="1400" dirty="0"/>
+          </a:p>
+          <a:p>
+            <a:pPr marL="342900" indent="-342900">
+              <a:spcAft>
+                <a:spcPts val="600"/>
+              </a:spcAft>
+              <a:buSzPct val="100000"/>
+              <a:buChar char="•"/>
+            </a:pPr>
+            <a:r>
+              <a:rPr lang="en-US" sz="1400" dirty="0">
+                <a:solidFill>
+                  <a:schemeClr val="tx1"/>
+                </a:solidFill>
+              </a:rPr>
+              <a:t>Regione FVG — regionestoriafvg.eu; turismofvg.it</a:t>
+            </a:r>
+            <a:endParaRPr lang="en-US" sz="1400" dirty="0"/>
+          </a:p>
+          <a:p>
+            <a:pPr marL="342900" indent="-342900">
+              <a:spcAft>
+                <a:spcPts val="600"/>
+              </a:spcAft>
+              <a:buSzPct val="100000"/>
+              <a:buChar char="•"/>
+            </a:pPr>
+            <a:r>
+              <a:rPr lang="en-US" sz="1400" dirty="0">
+                <a:solidFill>
+                  <a:schemeClr val="tx1"/>
+                </a:solidFill>
+              </a:rPr>
+              <a:t>atrieste.eu — Trieszt kronológiája 1943–1945 (Marco Coslovich kutatásai nyomán)</a:t>
+            </a:r>
+            <a:endParaRPr lang="en-US" sz="1400" dirty="0"/>
+          </a:p>
+          <a:p>
+            <a:pPr marL="342900" indent="-342900">
+              <a:spcAft>
+                <a:spcPts val="600"/>
+              </a:spcAft>
+              <a:buSzPct val="100000"/>
+              <a:buChar char="•"/>
+            </a:pPr>
+            <a:r>
+              <a:rPr lang="en-US" sz="1400" dirty="0">
+                <a:solidFill>
+                  <a:schemeClr val="tx1"/>
+                </a:solidFill>
+              </a:rPr>
+              <a:t>Comunità ebraica di Trieste — triestebraica.it (zsinagóga, Carlo e Vera Wagner Múzeum)</a:t>
+            </a:r>
+            <a:endParaRPr lang="en-US" sz="1400" dirty="0"/>
+          </a:p>
+          <a:p>
+            <a:pPr marL="342900" indent="-342900">
+              <a:spcAft>
+                <a:spcPts val="600"/>
+              </a:spcAft>
+              <a:buSzPct val="100000"/>
+              <a:buChar char="•"/>
+            </a:pPr>
+            <a:r>
+              <a:rPr lang="en-US" sz="1400" dirty="0">
+                <a:solidFill>
+                  <a:schemeClr val="tx1"/>
+                </a:solidFill>
+              </a:rPr>
+              <a:t>Università di Trieste — „Basta, qui siamo finiti!” 1938: le leggi razziste a Trieste</a:t>
+            </a:r>
+            <a:endParaRPr lang="en-US" sz="1400" dirty="0"/>
+          </a:p>
+          <a:p>
+            <a:pPr marL="342900" indent="-342900">
+              <a:spcAft>
+                <a:spcPts val="600"/>
+              </a:spcAft>
+              <a:buSzPct val="100000"/>
+              <a:buChar char="•"/>
+            </a:pPr>
+            <a:r>
+              <a:rPr lang="en-US" sz="1400" dirty="0">
+                <a:solidFill>
+                  <a:schemeClr val="tx1"/>
+                </a:solidFill>
+              </a:rPr>
+              <a:t>Matta, T.: Il lager di San Sabba. Dall’occupazione nazista al processo di Trieste. Beit, 2012.</a:t>
+            </a:r>
+            <a:endParaRPr lang="en-US" sz="1400" dirty="0"/>
+          </a:p>
+        </p:txBody>
+      </p:sp>
+      <p:sp>
+        <p:nvSpPr>
+          <p:cNvPr id="25" name="Slide Number Placeholder 0"/>
+          <p:cNvSpPr>
+            <a:spLocks noGrp="1"/>
+          </p:cNvSpPr>
+          <p:nvPr>
+            <p:ph type="sldNum" sz="quarter" idx="4294967295"/>
+          </p:nvPr>
+        </p:nvSpPr>
+        <p:spPr>
+          <a:xfrm>
+            <a:off x="11064240" y="6446520"/>
+            <a:ext cx="548640" cy="274320"/>
+          </a:xfrm>
+          <a:prstGeom prst="rect">
+            <a:avLst/>
+          </a:prstGeom>
+          <a:extLst>
+            <a:ext uri="{C572A759-6A51-4108-AA02-DFA0A04FC94B}">
+              <ma14:wrappingTextBoxFlag xmlns:ma14="http://schemas.microsoft.com/office/mac/drawingml/2011/main" val="0"/>
+            </a:ext>
+          </a:extLst>
+        </p:spPr>
+        <p:txBody>
+          <a:bodyPr/>
+          <a:lstStyle>
+            <a:lvl1pPr>
+              <a:defRPr sz="1000">
+                <a:solidFill>
+                  <a:schemeClr val="accent4"/>
+                </a:solidFill>
+              </a:defRPr>
+            </a:lvl1pPr>
+          </a:lstStyle>
+          <a:p>
+            <a:pPr algn="r"/>
+            <a:fld id="{F7021451-1387-4CA6-816F-3879F97B5CBC}" type="slidenum">
+              <a:rPr b="0" lang="en-US"/>
+              <a:t>52</a:t>
+            </a:fld>
+            <a:endParaRPr lang="en-US"/>
+          </a:p>
+        </p:txBody>
+      </p:sp>
+    </p:spTree>
+  </p:cSld>
+  <p:clrMapOvr>
+    <a:masterClrMapping/>
+  </p:clrMapOvr>
+</p:sld>
+</file>
+
+<file path=ppt/slides/slide53.xml><?xml version="1.0" encoding="utf-8"?>
+<p:sld xmlns:a="http://schemas.openxmlformats.org/drawingml/2006/main" xmlns:r="http://schemas.openxmlformats.org/officeDocument/2006/relationships" xmlns:p="http://schemas.openxmlformats.org/presentationml/2006/main">
+  <p:cSld name="Slide 53">
+    <p:spTree>
+      <p:nvGrpSpPr>
+        <p:cNvPr id="1" name=""/>
+        <p:cNvGrpSpPr/>
+        <p:nvPr/>
+      </p:nvGrpSpPr>
+      <p:grpSpPr>
+        <a:xfrm>
+          <a:off x="0" y="0"/>
+          <a:ext cx="0" cy="0"/>
+          <a:chOff x="0" y="0"/>
+          <a:chExt cx="0" cy="0"/>
+        </a:xfrm>
+      </p:grpSpPr>
+      <p:sp>
+        <p:nvSpPr>
+          <p:cNvPr id="2" name="Text 0"/>
+          <p:cNvSpPr/>
+          <p:nvPr>
+            <p:ph idx="100" type="title" hasCustomPrompt="1"/>
+          </p:nvPr>
+        </p:nvSpPr>
+        <p:spPr>
+          <a:xfrm>
+            <a:off x="731520" y="1828800"/>
+            <a:ext cx="10698480" cy="1645920"/>
+          </a:xfrm>
+          <a:prstGeom prst="rect">
+            <a:avLst/>
+          </a:prstGeom>
+          <a:noFill/>
+          <a:ln/>
+        </p:spPr>
+        <p:txBody>
+          <a:bodyPr wrap="square" lIns="0" tIns="0" rIns="0" bIns="0" rtlCol="0" anchor="b"/>
+          <a:lstStyle/>
+          <a:p>
+            <a:pPr algn="l" indent="0" marL="0">
+              <a:buNone/>
+            </a:pPr>
+            <a:r>
+              <a:rPr lang="en-US" sz="4800" b="1" dirty="0">
+                <a:solidFill>
+                  <a:schemeClr val="bg1"/>
+                </a:solidFill>
+                <a:latin typeface="Cambria" pitchFamily="34" charset="0"/>
+                <a:ea typeface="Cambria" pitchFamily="34" charset="-122"/>
+                <a:cs typeface="Cambria" pitchFamily="34" charset="-120"/>
+              </a:rPr>
+              <a:t>„Megtörtént, tehát újra megtörténhet.”</a:t>
+            </a:r>
+            <a:endParaRPr lang="en-US" sz="4800" dirty="0"/>
+          </a:p>
+        </p:txBody>
+      </p:sp>
+      <p:sp>
+        <p:nvSpPr>
+          <p:cNvPr id="3" name="Text 0"/>
+          <p:cNvSpPr/>
+          <p:nvPr>
+            <p:ph idx="101" type="body" hasCustomPrompt="1"/>
+          </p:nvPr>
+        </p:nvSpPr>
+        <p:spPr>
+          <a:xfrm>
+            <a:off x="731520" y="3657600"/>
+            <a:ext cx="10058400" cy="1188720"/>
+          </a:xfrm>
+          <a:prstGeom prst="rect">
+            <a:avLst/>
+          </a:prstGeom>
+          <a:noFill/>
+          <a:ln/>
+        </p:spPr>
+        <p:txBody>
+          <a:bodyPr wrap="square" lIns="0" tIns="0" rIns="0" bIns="0" rtlCol="0" anchor="t"/>
+          <a:lstStyle/>
+          <a:p>
+            <a:pPr indent="0" marL="0">
+              <a:buNone/>
+            </a:pPr>
+            <a:r>
+              <a:rPr lang="en-US" sz="2000" dirty="0">
+                <a:solidFill>
+                  <a:srgbClr val="D1D5DB"/>
+                </a:solidFill>
+              </a:rPr>
+              <a:t>Primo Levi: A megfojtottak és a megmenekültek (1986) — szabad fordítás</a:t>
+            </a:r>
+            <a:endParaRPr lang="en-US" sz="2000" dirty="0"/>
+          </a:p>
+        </p:txBody>
+      </p:sp>
+      <p:sp>
+        <p:nvSpPr>
+          <p:cNvPr id="4" name="Text 2"/>
+          <p:cNvSpPr txBox="1"/>
+          <p:nvPr/>
+        </p:nvSpPr>
+        <p:spPr>
+          <a:xfrm>
+            <a:off x="731520" y="5760720"/>
+            <a:ext cx="10058400" cy="457200"/>
+          </a:xfrm>
+          <a:prstGeom prst="rect">
+            <a:avLst/>
+          </a:prstGeom>
+          <a:noFill/>
+          <a:ln/>
+        </p:spPr>
+        <p:txBody>
+          <a:bodyPr wrap="square" lIns="0" tIns="0" rIns="0" bIns="0" rtlCol="0" anchor="ctr"/>
+          <a:lstStyle/>
+          <a:p>
+            <a:pPr indent="0" marL="0">
+              <a:buNone/>
+            </a:pPr>
+            <a:r>
+              <a:rPr lang="en-US" sz="1600" i="1" dirty="0">
+                <a:solidFill>
+                  <a:schemeClr val="accent3"/>
+                </a:solidFill>
+              </a:rPr>
+              <a:t>Emlékezni azért, hogy megértsük — és megértsük, hogy felismerjük.</a:t>
+            </a:r>
+            <a:endParaRPr lang="en-US" sz="1600" dirty="0"/>
           </a:p>
         </p:txBody>
       </p:sp>
